--- a/docs/review_ppt/physical_mode_paper_ko.pptx
+++ b/docs/review_ppt/physical_mode_paper_ko.pptx
@@ -7805,7 +7805,7 @@
         <p:spPr>
           <a:xfrm>
             <a:off x="457200" y="1188720"/>
-            <a:ext cx="10972800" cy="3064103"/>
+            <a:ext cx="10972800" cy="4306355"/>
           </a:xfrm>
           <a:prstGeom prst="rect">
             <a:avLst/>
@@ -8410,7 +8410,7 @@
                 </a:solidFill>
                 <a:latin typeface="Malgun Gothic"/>
               </a:rPr>
-              <a:t>결과 (7) — §4.6 cross-model NULL: pixel-encodability 는 saturation 특이적</a:t>
+              <a:t>결과 (7) — §4.6 cross-model layer sweep (n=10) + Idefics2 9-layer disambiguation</a:t>
             </a:r>
           </a:p>
         </p:txBody>
@@ -8445,597 +8445,35 @@
                 </a:solidFill>
                 <a:latin typeface="Malgun Gothic"/>
               </a:rPr>
-              <a:t>LLaVA-1.5 자체 v_L10 으로도 0/5 PMR flip, projection 은 매칭</a:t>
-            </a:r>
-          </a:p>
-        </p:txBody>
-      </p:sp>
-      <p:graphicFrame>
-        <p:nvGraphicFramePr>
-          <p:cNvPr id="5" name="Table 4"/>
-          <p:cNvGraphicFramePr>
-            <a:graphicFrameLocks noGrp="1"/>
-          </p:cNvGraphicFramePr>
-          <p:nvPr/>
-        </p:nvGraphicFramePr>
-        <p:xfrm>
-          <a:off x="274320" y="1188720"/>
-          <a:ext cx="11612880" cy="3657600"/>
-        </p:xfrm>
-        <a:graphic>
-          <a:graphicData uri="http://schemas.openxmlformats.org/drawingml/2006/table">
-            <a:tbl>
-              <a:tblPr firstRow="1" bandRow="1">
-                <a:tableStyleId>{5C22544A-7EE6-4342-B048-85BDC9FD1C3A}</a:tableStyleId>
-              </a:tblPr>
-              <a:tblGrid>
-                <a:gridCol w="2903220"/>
-                <a:gridCol w="2903220"/>
-                <a:gridCol w="2903220"/>
-                <a:gridCol w="2903220"/>
-              </a:tblGrid>
-              <a:tr h="522514">
-                <a:tc>
-                  <a:txBody>
-                    <a:bodyPr/>
-                    <a:lstStyle/>
-                    <a:p>
-                      <a:r>
-                        <a:rPr sz="1100" b="1">
-                          <a:solidFill>
-                            <a:srgbClr val="FFFFFF"/>
-                          </a:solidFill>
-                          <a:latin typeface="Malgun Gothic"/>
-                        </a:rPr>
-                        <a:t>테스트</a:t>
-                      </a:r>
-                    </a:p>
-                  </a:txBody>
-                  <a:tcPr>
-                    <a:solidFill>
-                      <a:srgbClr val="2E4A7F"/>
-                    </a:solidFill>
-                  </a:tcPr>
-                </a:tc>
-                <a:tc>
-                  <a:txBody>
-                    <a:bodyPr/>
-                    <a:lstStyle/>
-                    <a:p>
-                      <a:r>
-                        <a:rPr sz="1100" b="1">
-                          <a:solidFill>
-                            <a:srgbClr val="FFFFFF"/>
-                          </a:solidFill>
-                          <a:latin typeface="Malgun Gothic"/>
-                        </a:rPr>
-                        <a:t>v_L10 flip</a:t>
-                      </a:r>
-                    </a:p>
-                  </a:txBody>
-                  <a:tcPr>
-                    <a:solidFill>
-                      <a:srgbClr val="2E4A7F"/>
-                    </a:solidFill>
-                  </a:tcPr>
-                </a:tc>
-                <a:tc>
-                  <a:txBody>
-                    <a:bodyPr/>
-                    <a:lstStyle/>
-                    <a:p>
-                      <a:r>
-                        <a:rPr sz="1100" b="1">
-                          <a:solidFill>
-                            <a:srgbClr val="FFFFFF"/>
-                          </a:solidFill>
-                          <a:latin typeface="Malgun Gothic"/>
-                        </a:rPr>
-                        <a:t>projection 변화</a:t>
-                      </a:r>
-                    </a:p>
-                  </a:txBody>
-                  <a:tcPr>
-                    <a:solidFill>
-                      <a:srgbClr val="2E4A7F"/>
-                    </a:solidFill>
-                  </a:tcPr>
-                </a:tc>
-                <a:tc>
-                  <a:txBody>
-                    <a:bodyPr/>
-                    <a:lstStyle/>
-                    <a:p>
-                      <a:r>
-                        <a:rPr sz="1100" b="1">
-                          <a:solidFill>
-                            <a:srgbClr val="FFFFFF"/>
-                          </a:solidFill>
-                          <a:latin typeface="Malgun Gothic"/>
-                        </a:rPr>
-                        <a:t>해석</a:t>
-                      </a:r>
-                    </a:p>
-                  </a:txBody>
-                  <a:tcPr>
-                    <a:solidFill>
-                      <a:srgbClr val="2E4A7F"/>
-                    </a:solidFill>
-                  </a:tcPr>
-                </a:tc>
-              </a:tr>
-              <a:tr h="522514">
-                <a:tc>
-                  <a:txBody>
-                    <a:bodyPr/>
-                    <a:lstStyle/>
-                    <a:p>
-                      <a:r>
-                        <a:rPr sz="1100">
-                          <a:latin typeface="Malgun Gothic"/>
-                        </a:rPr>
-                        <a:t>§4.6 (Qwen)</a:t>
-                      </a:r>
-                    </a:p>
-                  </a:txBody>
-                  <a:tcPr>
-                    <a:solidFill>
-                      <a:srgbClr val="FFFFFF"/>
-                    </a:solidFill>
-                  </a:tcPr>
-                </a:tc>
-                <a:tc>
-                  <a:txBody>
-                    <a:bodyPr/>
-                    <a:lstStyle/>
-                    <a:p>
-                      <a:r>
-                        <a:rPr sz="1100">
-                          <a:latin typeface="Malgun Gothic"/>
-                        </a:rPr>
-                        <a:t>5/5 at ε=0.05</a:t>
-                      </a:r>
-                    </a:p>
-                  </a:txBody>
-                  <a:tcPr>
-                    <a:solidFill>
-                      <a:srgbClr val="FFFFFF"/>
-                    </a:solidFill>
-                  </a:tcPr>
-                </a:tc>
-                <a:tc>
-                  <a:txBody>
-                    <a:bodyPr/>
-                    <a:lstStyle/>
-                    <a:p>
-                      <a:r>
-                        <a:rPr sz="1100">
-                          <a:latin typeface="Malgun Gothic"/>
-                        </a:rPr>
-                        <a:t>8 → ~100</a:t>
-                      </a:r>
-                    </a:p>
-                  </a:txBody>
-                  <a:tcPr>
-                    <a:solidFill>
-                      <a:srgbClr val="FFFFFF"/>
-                    </a:solidFill>
-                  </a:tcPr>
-                </a:tc>
-                <a:tc>
-                  <a:txBody>
-                    <a:bodyPr/>
-                    <a:lstStyle/>
-                    <a:p>
-                      <a:r>
-                        <a:rPr sz="1100">
-                          <a:latin typeface="Malgun Gothic"/>
-                        </a:rPr>
-                        <a:t>성공 — Qwen 은 픽셀 인코드 가능</a:t>
-                      </a:r>
-                    </a:p>
-                  </a:txBody>
-                  <a:tcPr>
-                    <a:solidFill>
-                      <a:srgbClr val="FFFFFF"/>
-                    </a:solidFill>
-                  </a:tcPr>
-                </a:tc>
-              </a:tr>
-              <a:tr h="522514">
-                <a:tc>
-                  <a:txBody>
-                    <a:bodyPr/>
-                    <a:lstStyle/>
-                    <a:p>
-                      <a:r>
-                        <a:rPr sz="1100">
-                          <a:latin typeface="Malgun Gothic"/>
-                        </a:rPr>
-                        <a:t>Transfer (Qwen → LLaVA)</a:t>
-                      </a:r>
-                    </a:p>
-                  </a:txBody>
-                  <a:tcPr>
-                    <a:solidFill>
-                      <a:srgbClr val="F6F8FC"/>
-                    </a:solidFill>
-                  </a:tcPr>
-                </a:tc>
-                <a:tc>
-                  <a:txBody>
-                    <a:bodyPr/>
-                    <a:lstStyle/>
-                    <a:p>
-                      <a:r>
-                        <a:rPr sz="1100">
-                          <a:latin typeface="Malgun Gothic"/>
-                        </a:rPr>
-                        <a:t>0/5</a:t>
-                      </a:r>
-                    </a:p>
-                  </a:txBody>
-                  <a:tcPr>
-                    <a:solidFill>
-                      <a:srgbClr val="F6F8FC"/>
-                    </a:solidFill>
-                  </a:tcPr>
-                </a:tc>
-                <a:tc>
-                  <a:txBody>
-                    <a:bodyPr/>
-                    <a:lstStyle/>
-                    <a:p>
-                      <a:r>
-                        <a:rPr sz="1100">
-                          <a:latin typeface="Malgun Gothic"/>
-                        </a:rPr>
-                        <a:t>(transfer)</a:t>
-                      </a:r>
-                    </a:p>
-                  </a:txBody>
-                  <a:tcPr>
-                    <a:solidFill>
-                      <a:srgbClr val="F6F8FC"/>
-                    </a:solidFill>
-                  </a:tcPr>
-                </a:tc>
-                <a:tc>
-                  <a:txBody>
-                    <a:bodyPr/>
-                    <a:lstStyle/>
-                    <a:p>
-                      <a:r>
-                        <a:rPr sz="1100">
-                          <a:latin typeface="Malgun Gothic"/>
-                        </a:rPr>
-                        <a:t>Adversarial 모델별 — 일반적</a:t>
-                      </a:r>
-                    </a:p>
-                  </a:txBody>
-                  <a:tcPr>
-                    <a:solidFill>
-                      <a:srgbClr val="F6F8FC"/>
-                    </a:solidFill>
-                  </a:tcPr>
-                </a:tc>
-              </a:tr>
-              <a:tr h="522514">
-                <a:tc>
-                  <a:txBody>
-                    <a:bodyPr/>
-                    <a:lstStyle/>
-                    <a:p>
-                      <a:r>
-                        <a:rPr sz="1100">
-                          <a:latin typeface="Malgun Gothic"/>
-                        </a:rPr>
-                        <a:t>Transfer (Qwen → LLaVA-Next)</a:t>
-                      </a:r>
-                    </a:p>
-                  </a:txBody>
-                  <a:tcPr>
-                    <a:solidFill>
-                      <a:srgbClr val="FFFFFF"/>
-                    </a:solidFill>
-                  </a:tcPr>
-                </a:tc>
-                <a:tc>
-                  <a:txBody>
-                    <a:bodyPr/>
-                    <a:lstStyle/>
-                    <a:p>
-                      <a:r>
-                        <a:rPr sz="1100">
-                          <a:latin typeface="Malgun Gothic"/>
-                        </a:rPr>
-                        <a:t>0/5</a:t>
-                      </a:r>
-                    </a:p>
-                  </a:txBody>
-                  <a:tcPr>
-                    <a:solidFill>
-                      <a:srgbClr val="FFFFFF"/>
-                    </a:solidFill>
-                  </a:tcPr>
-                </a:tc>
-                <a:tc>
-                  <a:txBody>
-                    <a:bodyPr/>
-                    <a:lstStyle/>
-                    <a:p>
-                      <a:r>
-                        <a:rPr sz="1100">
-                          <a:latin typeface="Malgun Gothic"/>
-                        </a:rPr>
-                        <a:t>(transfer)</a:t>
-                      </a:r>
-                    </a:p>
-                  </a:txBody>
-                  <a:tcPr>
-                    <a:solidFill>
-                      <a:srgbClr val="FFFFFF"/>
-                    </a:solidFill>
-                  </a:tcPr>
-                </a:tc>
-                <a:tc>
-                  <a:txBody>
-                    <a:bodyPr/>
-                    <a:lstStyle/>
-                    <a:p>
-                      <a:r>
-                        <a:rPr sz="1100">
-                          <a:latin typeface="Malgun Gothic"/>
-                        </a:rPr>
-                        <a:t>동일</a:t>
-                      </a:r>
-                    </a:p>
-                  </a:txBody>
-                  <a:tcPr>
-                    <a:solidFill>
-                      <a:srgbClr val="FFFFFF"/>
-                    </a:solidFill>
-                  </a:tcPr>
-                </a:tc>
-              </a:tr>
-              <a:tr h="522514">
-                <a:tc>
-                  <a:txBody>
-                    <a:bodyPr/>
-                    <a:lstStyle/>
-                    <a:p>
-                      <a:r>
-                        <a:rPr sz="1100">
-                          <a:latin typeface="Malgun Gothic"/>
-                        </a:rPr>
-                        <a:t>Transfer (Qwen → Idefics2)</a:t>
-                      </a:r>
-                    </a:p>
-                  </a:txBody>
-                  <a:tcPr>
-                    <a:solidFill>
-                      <a:srgbClr val="F6F8FC"/>
-                    </a:solidFill>
-                  </a:tcPr>
-                </a:tc>
-                <a:tc>
-                  <a:txBody>
-                    <a:bodyPr/>
-                    <a:lstStyle/>
-                    <a:p>
-                      <a:r>
-                        <a:rPr sz="1100">
-                          <a:latin typeface="Malgun Gothic"/>
-                        </a:rPr>
-                        <a:t>0/5</a:t>
-                      </a:r>
-                    </a:p>
-                  </a:txBody>
-                  <a:tcPr>
-                    <a:solidFill>
-                      <a:srgbClr val="F6F8FC"/>
-                    </a:solidFill>
-                  </a:tcPr>
-                </a:tc>
-                <a:tc>
-                  <a:txBody>
-                    <a:bodyPr/>
-                    <a:lstStyle/>
-                    <a:p>
-                      <a:r>
-                        <a:rPr sz="1100">
-                          <a:latin typeface="Malgun Gothic"/>
-                        </a:rPr>
-                        <a:t>(transfer)</a:t>
-                      </a:r>
-                    </a:p>
-                  </a:txBody>
-                  <a:tcPr>
-                    <a:solidFill>
-                      <a:srgbClr val="F6F8FC"/>
-                    </a:solidFill>
-                  </a:tcPr>
-                </a:tc>
-                <a:tc>
-                  <a:txBody>
-                    <a:bodyPr/>
-                    <a:lstStyle/>
-                    <a:p>
-                      <a:r>
-                        <a:rPr sz="1100">
-                          <a:latin typeface="Malgun Gothic"/>
-                        </a:rPr>
-                        <a:t>동일</a:t>
-                      </a:r>
-                    </a:p>
-                  </a:txBody>
-                  <a:tcPr>
-                    <a:solidFill>
-                      <a:srgbClr val="F6F8FC"/>
-                    </a:solidFill>
-                  </a:tcPr>
-                </a:tc>
-              </a:tr>
-              <a:tr h="522514">
-                <a:tc>
-                  <a:txBody>
-                    <a:bodyPr/>
-                    <a:lstStyle/>
-                    <a:p>
-                      <a:r>
-                        <a:rPr sz="1100">
-                          <a:latin typeface="Malgun Gothic"/>
-                        </a:rPr>
-                        <a:t>Transfer (Qwen → InternVL3)</a:t>
-                      </a:r>
-                    </a:p>
-                  </a:txBody>
-                  <a:tcPr>
-                    <a:solidFill>
-                      <a:srgbClr val="FFFFFF"/>
-                    </a:solidFill>
-                  </a:tcPr>
-                </a:tc>
-                <a:tc>
-                  <a:txBody>
-                    <a:bodyPr/>
-                    <a:lstStyle/>
-                    <a:p>
-                      <a:r>
-                        <a:rPr sz="1100">
-                          <a:latin typeface="Malgun Gothic"/>
-                        </a:rPr>
-                        <a:t>0/5 (음의 transfer)</a:t>
-                      </a:r>
-                    </a:p>
-                  </a:txBody>
-                  <a:tcPr>
-                    <a:solidFill>
-                      <a:srgbClr val="FFFFFF"/>
-                    </a:solidFill>
-                  </a:tcPr>
-                </a:tc>
-                <a:tc>
-                  <a:txBody>
-                    <a:bodyPr/>
-                    <a:lstStyle/>
-                    <a:p>
-                      <a:r>
-                        <a:rPr sz="1100">
-                          <a:latin typeface="Malgun Gothic"/>
-                        </a:rPr>
-                        <a:t>1.0 → 0.2 unconstrained</a:t>
-                      </a:r>
-                    </a:p>
-                  </a:txBody>
-                  <a:tcPr>
-                    <a:solidFill>
-                      <a:srgbClr val="FFFFFF"/>
-                    </a:solidFill>
-                  </a:tcPr>
-                </a:tc>
-                <a:tc>
-                  <a:txBody>
-                    <a:bodyPr/>
-                    <a:lstStyle/>
-                    <a:p>
-                      <a:r>
-                        <a:rPr sz="1100">
-                          <a:latin typeface="Malgun Gothic"/>
-                        </a:rPr>
-                        <a:t>큰 ε 가 saturated 출력 교란</a:t>
-                      </a:r>
-                    </a:p>
-                  </a:txBody>
-                  <a:tcPr>
-                    <a:solidFill>
-                      <a:srgbClr val="FFFFFF"/>
-                    </a:solidFill>
-                  </a:tcPr>
-                </a:tc>
-              </a:tr>
-              <a:tr h="522516">
-                <a:tc>
-                  <a:txBody>
-                    <a:bodyPr/>
-                    <a:lstStyle/>
-                    <a:p>
-                      <a:r>
-                        <a:rPr sz="1100">
-                          <a:latin typeface="Malgun Gothic"/>
-                        </a:rPr>
-                        <a:t>**LLaVA-1.5 자체 v_L10**</a:t>
-                      </a:r>
-                    </a:p>
-                  </a:txBody>
-                  <a:tcPr>
-                    <a:solidFill>
-                      <a:srgbClr val="F6F8FC"/>
-                    </a:solidFill>
-                  </a:tcPr>
-                </a:tc>
-                <a:tc>
-                  <a:txBody>
-                    <a:bodyPr/>
-                    <a:lstStyle/>
-                    <a:p>
-                      <a:r>
-                        <a:rPr sz="1100">
-                          <a:latin typeface="Malgun Gothic"/>
-                        </a:rPr>
-                        <a:t>**0/5 모든 ε**</a:t>
-                      </a:r>
-                    </a:p>
-                  </a:txBody>
-                  <a:tcPr>
-                    <a:solidFill>
-                      <a:srgbClr val="F6F8FC"/>
-                    </a:solidFill>
-                  </a:tcPr>
-                </a:tc>
-                <a:tc>
-                  <a:txBody>
-                    <a:bodyPr/>
-                    <a:lstStyle/>
-                    <a:p>
-                      <a:r>
-                        <a:rPr sz="1100">
-                          <a:latin typeface="Malgun Gothic"/>
-                        </a:rPr>
-                        <a:t>**8 → 150-200 (Qwen 매칭)**</a:t>
-                      </a:r>
-                    </a:p>
-                  </a:txBody>
-                  <a:tcPr>
-                    <a:solidFill>
-                      <a:srgbClr val="F6F8FC"/>
-                    </a:solidFill>
-                  </a:tcPr>
-                </a:tc>
-                <a:tc>
-                  <a:txBody>
-                    <a:bodyPr/>
-                    <a:lstStyle/>
-                    <a:p>
-                      <a:r>
-                        <a:rPr sz="1100">
-                          <a:latin typeface="Malgun Gothic"/>
-                        </a:rPr>
-                        <a:t>**Projection vs Behavior 분리 — pixel-encodability 는 Qwen 만**</a:t>
-                      </a:r>
-                    </a:p>
-                  </a:txBody>
-                  <a:tcPr>
-                    <a:solidFill>
-                      <a:srgbClr val="F6F8FC"/>
-                    </a:solidFill>
-                  </a:tcPr>
-                </a:tc>
-              </a:tr>
-            </a:tbl>
-          </a:graphicData>
-        </a:graphic>
-      </p:graphicFrame>
+              <a:t>3 of 5 testable architectures supports pixel-encodability; Idefics2 falsifies (L5-L31), perceiver-resampler 후보</a:t>
+            </a:r>
+          </a:p>
+        </p:txBody>
+      </p:sp>
+      <p:pic>
+        <p:nvPicPr>
+          <p:cNvPr id="5" name="Picture 4" descr="sec4_6_cross_model_layer_sweep.png"/>
+          <p:cNvPicPr>
+            <a:picLocks noChangeAspect="1"/>
+          </p:cNvPicPr>
+          <p:nvPr/>
+        </p:nvPicPr>
+        <p:blipFill>
+          <a:blip r:embed="rId2"/>
+          <a:stretch>
+            <a:fillRect/>
+          </a:stretch>
+        </p:blipFill>
+        <p:spPr>
+          <a:xfrm>
+            <a:off x="274320" y="1143000"/>
+            <a:ext cx="7772400" cy="5238474"/>
+          </a:xfrm>
+          <a:prstGeom prst="rect">
+            <a:avLst/>
+          </a:prstGeom>
+        </p:spPr>
+      </p:pic>
       <p:sp>
         <p:nvSpPr>
           <p:cNvPr id="6" name="TextBox 5"/>
@@ -9044,8 +8482,43 @@
         </p:nvSpPr>
         <p:spPr>
           <a:xfrm>
-            <a:off x="457200" y="4937760"/>
-            <a:ext cx="11247120" cy="1828800"/>
+            <a:off x="274320" y="5120640"/>
+            <a:ext cx="7772400" cy="365760"/>
+          </a:xfrm>
+          <a:prstGeom prst="rect">
+            <a:avLst/>
+          </a:prstGeom>
+          <a:noFill/>
+        </p:spPr>
+        <p:txBody>
+          <a:bodyPr wrap="none">
+            <a:spAutoFit/>
+          </a:bodyPr>
+          <a:lstStyle/>
+          <a:p>
+            <a:pPr algn="ctr"/>
+            <a:r>
+              <a:rPr sz="1100" i="1">
+                <a:solidFill>
+                  <a:srgbClr val="666666"/>
+                </a:solidFill>
+                <a:latin typeface="Malgun Gothic"/>
+              </a:rPr>
+              <a:t>5 모델 × LM 레이어 별 PMR flip rate (n=10, ε=0.1, Wilson 95% CI). Idefics2 panel 은 9 레이어 (L5-L31, 16-97% relative depth) 표시.</a:t>
+            </a:r>
+          </a:p>
+        </p:txBody>
+      </p:sp>
+      <p:sp>
+        <p:nvSpPr>
+          <p:cNvPr id="7" name="TextBox 6"/>
+          <p:cNvSpPr txBox="1"/>
+          <p:nvPr/>
+        </p:nvSpPr>
+        <p:spPr>
+          <a:xfrm>
+            <a:off x="8229600" y="1188720"/>
+            <a:ext cx="3657600" cy="5029200"/>
           </a:xfrm>
           <a:prstGeom prst="rect">
             <a:avLst/>
@@ -9064,13 +8537,13 @@
               </a:lnSpc>
             </a:pPr>
             <a:r>
-              <a:rPr sz="1300">
+              <a:rPr sz="1100">
                 <a:solidFill>
                   <a:srgbClr val="333333"/>
                 </a:solidFill>
                 <a:latin typeface="Malgun Gothic"/>
               </a:rPr>
-              <a:t>• Gradient ascent 자체는 LLaVA-1.5 에서 정상 작동 — projection 8→200 도달, gradient 흐름 검증됨. 하지만 LM 출력은 변하지 않음.</a:t>
+              <a:t>• **Qwen** (SigLIP+Qwen2): broad shortcuts at L5/10/15/20/25 (Wilson 하한 0.49–0.72).</a:t>
             </a:r>
           </a:p>
           <a:p>
@@ -9080,13 +8553,13 @@
               </a:lnSpc>
             </a:pPr>
             <a:r>
-              <a:rPr sz="1300">
+              <a:rPr sz="1100">
                 <a:solidFill>
                   <a:srgbClr val="333333"/>
                 </a:solidFill>
                 <a:latin typeface="Malgun Gothic"/>
               </a:rPr>
-              <a:t>• **해석**: Qwen 의 saturated SigLIP 이 LM 이 직접 읽는 픽셀-to-L10 채널을 만듦. LLaVA-1.5 의 unsaturated CLIP 은 그 채널이 없음.</a:t>
+              <a:t>• **LLaVA-Next** (CLIP+AnyRes+Mistral): L20+L25 모두 10/10.</a:t>
             </a:r>
           </a:p>
           <a:p>
@@ -9096,20 +8569,123 @@
               </a:lnSpc>
             </a:pPr>
             <a:r>
-              <a:rPr sz="1300">
+              <a:rPr sz="1100">
                 <a:solidFill>
                   <a:srgbClr val="333333"/>
                 </a:solidFill>
                 <a:latin typeface="Malgun Gothic"/>
               </a:rPr>
-              <a:t>• → **H-shortcut** 은 Qwen-scoped. M9 PMR-천장 / §4.7 결정-안정성 천장과 평행한 **세 번째 saturation 시그니처**.</a:t>
-            </a:r>
-          </a:p>
-        </p:txBody>
-      </p:sp>
-      <p:sp>
-        <p:nvSpPr>
-          <p:cNvPr id="7" name="TextBox 6"/>
+              <a:t>• **LLaVA-1.5** (CLIP+Vicuna): L25 only, 4/10 (n=10 에서 약화).</a:t>
+            </a:r>
+          </a:p>
+          <a:p>
+            <a:pPr algn="l">
+              <a:lnSpc>
+                <a:spcPct val="115000"/>
+              </a:lnSpc>
+            </a:pPr>
+            <a:r>
+              <a:rPr sz="1100">
+                <a:solidFill>
+                  <a:srgbClr val="333333"/>
+                </a:solidFill>
+                <a:latin typeface="Malgun Gothic"/>
+              </a:rPr>
+              <a:t>• **Idefics2** (SigLIP-SO400M + perceiver-resampler + Mistral): **9 레이어 모두 0/10** (1 isolated noise hit at L28 on different stim than L25). v_L projection 은 정상 ascending (-11→+28 at L26-30, -72→+163 at L31). **Wrong-relative-depth falsified**.</a:t>
+            </a:r>
+          </a:p>
+          <a:p>
+            <a:pPr algn="l">
+              <a:lnSpc>
+                <a:spcPct val="115000"/>
+              </a:lnSpc>
+            </a:pPr>
+            <a:r>
+              <a:rPr sz="1100">
+                <a:solidFill>
+                  <a:srgbClr val="333333"/>
+                </a:solidFill>
+                <a:latin typeface="Malgun Gothic"/>
+              </a:rPr>
+              <a:t>• **InternVL3**: protocol-saturated (baseline_pmr=1.0).</a:t>
+            </a:r>
+          </a:p>
+          <a:p>
+            <a:pPr algn="l">
+              <a:lnSpc>
+                <a:spcPct val="115000"/>
+              </a:lnSpc>
+            </a:pPr>
+            <a:r>
+              <a:rPr sz="1100">
+                <a:solidFill>
+                  <a:srgbClr val="333333"/>
+                </a:solidFill>
+                <a:latin typeface="Malgun Gothic"/>
+              </a:rPr>
+              <a:t>• **Random controls**: 1/250 trials in aggregate.</a:t>
+            </a:r>
+          </a:p>
+        </p:txBody>
+      </p:sp>
+      <p:sp>
+        <p:nvSpPr>
+          <p:cNvPr id="8" name="TextBox 7"/>
+          <p:cNvSpPr txBox="1"/>
+          <p:nvPr/>
+        </p:nvSpPr>
+        <p:spPr>
+          <a:xfrm>
+            <a:off x="274320" y="5669280"/>
+            <a:ext cx="11612880" cy="1371600"/>
+          </a:xfrm>
+          <a:prstGeom prst="rect">
+            <a:avLst/>
+          </a:prstGeom>
+          <a:noFill/>
+        </p:spPr>
+        <p:txBody>
+          <a:bodyPr wrap="square">
+            <a:spAutoFit/>
+          </a:bodyPr>
+          <a:lstStyle/>
+          <a:p>
+            <a:pPr algn="l">
+              <a:lnSpc>
+                <a:spcPct val="115000"/>
+              </a:lnSpc>
+            </a:pPr>
+            <a:r>
+              <a:rPr sz="1200">
+                <a:solidFill>
+                  <a:srgbClr val="333333"/>
+                </a:solidFill>
+                <a:latin typeface="Malgun Gothic"/>
+              </a:rPr>
+              <a:t>• **해석**: pixel-encodability 는 architecture-conditional. **Encoder saturation 만으로는 부족** — Idefics2 (SigLIP-SO400M, AUC 0.93) 는 Qwen/LLaVA-Next 보다 saturated 된 인코더지만 0 shortcuts.</a:t>
+            </a:r>
+          </a:p>
+          <a:p>
+            <a:pPr algn="l">
+              <a:lnSpc>
+                <a:spcPct val="115000"/>
+              </a:lnSpc>
+            </a:pPr>
+            <a:r>
+              <a:rPr sz="1200">
+                <a:solidFill>
+                  <a:srgbClr val="333333"/>
+                </a:solidFill>
+                <a:latin typeface="Malgun Gothic"/>
+              </a:rPr>
+              <a:t>• **Perceiver-resampler 후보**: Idefics2 만 perceiver projector (다른 모델은 MLP). 5-model design 은 isolate 못함 (encoder + projector + AnyRes 동시 다름) — controlled projector-swap 필요.</a:t>
+            </a:r>
+          </a:p>
+        </p:txBody>
+      </p:sp>
+      <p:sp>
+        <p:nvSpPr>
+          <p:cNvPr id="9" name="TextBox 8"/>
           <p:cNvSpPr txBox="1"/>
           <p:nvPr/>
         </p:nvSpPr>
@@ -9144,7 +8720,7 @@
       </p:sp>
       <p:sp>
         <p:nvSpPr>
-          <p:cNvPr id="8" name="TextBox 7"/>
+          <p:cNvPr id="10" name="TextBox 9"/>
           <p:cNvSpPr txBox="1"/>
           <p:nvPr/>
         </p:nvSpPr>
@@ -10129,13 +9705,13 @@
               </a:lnSpc>
             </a:pPr>
             <a:r>
-              <a:rPr sz="1600">
+              <a:rPr sz="1500">
                 <a:solidFill>
                   <a:srgbClr val="333333"/>
                 </a:solidFill>
                 <a:latin typeface="Malgun Gothic"/>
               </a:rPr>
-              <a:t>• **Signature 3 — Pixel encodability** (§4.6 cross-model, NEW): Qwen 은 픽셀-공간 gradient ascent 로 PMR flip 가능 (ε=0.05 5/5). LLaVA-1.5 는 projection 이 매칭되어도 0/5 flip — pixel-to-L10 channel 이 없음.</a:t>
+              <a:t>• **Signature 3 — Pixel encodability** (§4.6 5-model n=10 layer sweep + Idefics2 9-layer disambiguation): **3 of 5 testable** architectures 가 픽셀-공간 gradient ascent 로 PMR flip (Qwen broad, LLaVA-Next L20+L25, LLaVA-1.5 L25 weak). Idefics2 는 L5-L31 9 레이어 모두 0 — **perceiver-resampler bottleneck 후보** (projector isolation 미검증). InternVL3 protocol-saturated.</a:t>
             </a:r>
           </a:p>
           <a:p>
@@ -10151,7 +9727,7 @@
                 </a:solidFill>
                 <a:latin typeface="Malgun Gothic"/>
               </a:rPr>
-              <a:t>• 3가지 signature 가 **동일한 architecture-level saturation 속성** 의 다른 표현. "encoder representational capacity 만으로 결정" 이라는 단순 인코더 가설은 disconfirm — joint encoder + LM 이 결정자.</a:t>
+              <a:t>• 3가지 signature 가 **동일한 architecture-level saturation 속성** 의 다른 표현. "encoder representational capacity 만으로 결정" 이라는 단순 인코더 가설은 disconfirm — joint encoder + LM + **projector design** (MLP vs perceiver) 이 결정자.</a:t>
             </a:r>
           </a:p>
         </p:txBody>
@@ -10356,7 +9932,7 @@
                 </a:solidFill>
                 <a:latin typeface="Malgun Gothic"/>
               </a:rPr>
-              <a:t>• **LM-only counterfactual 부재**: LLaVA-1.5 → LLaVA-Next 의 0.52 PMR jump 는 4축 confound (AnyRes / projector / training / LM family). 동일 인코더 LM-swap 은 future work.</a:t>
+              <a:t>• **Projector isolation 미검증**: §4.6 5-model design 은 Idefics2 가 MLP-projector 모델들과 encoder + projector + AnyRes 동시에 다름. Perceiver-resampler 가 leading remaining candidate 이지만 controlled projector-swap test (동일 encoder/LM 에서 perceiver↔MLP) 은 재학습 필요 — out of scope.</a:t>
             </a:r>
           </a:p>
           <a:p>
@@ -10372,7 +9948,7 @@
                 </a:solidFill>
                 <a:latin typeface="Malgun Gothic"/>
               </a:rPr>
-              <a:t>• **v_L10 은 1-d class-mean 축**: SAE / multi-axis decomposition 으로 pixel-encodable 한 *다른* 방향이 있을 수 있음 — LLaVA 에서도.</a:t>
+              <a:t>• **LM-only counterfactual 부재**: LLaVA-1.5 → LLaVA-Next 의 0.52 PMR jump 는 4축 confound (AnyRes / projector / training / LM family). 동일 인코더 LM-swap 은 future work.</a:t>
             </a:r>
           </a:p>
           <a:p>
@@ -10388,7 +9964,7 @@
                 </a:solidFill>
                 <a:latin typeface="Malgun Gothic"/>
               </a:rPr>
-              <a:t>• **§4.6 cross-model 부분 검증**: LLaVA-Next / Idefics2 / InternVL3 는 M2 stim 위 v_L10 이 class-imbalanced (n_neg = 9, 5, 1) 라 per-model gradient ascent 안 함. 더 어려운 stim (M8a / M8c) 으로 검증 가능.</a:t>
+              <a:t>• **InternVL3 untestable** under §4.6 protocol: `line_blank_none_fall_*` baseline_pmr=1.0. Alternative-baseline stim 탐색 필요.</a:t>
             </a:r>
           </a:p>
           <a:p>
@@ -10398,13 +9974,13 @@
               </a:lnSpc>
             </a:pPr>
             <a:r>
-              <a:rPr sz="1400">
+              <a:rPr sz="1300">
                 <a:solidFill>
                   <a:srgbClr val="333333"/>
                 </a:solidFill>
                 <a:latin typeface="Malgun Gothic"/>
               </a:rPr>
-              <a:t>• **M5b 보류**: SIP / activation patching / SAE 메커니즘 분석 — 다음 paper-section gap.</a:t>
+              <a:t>• **v_L10 은 1-d class-mean 축**: SAE / multi-axis decomposition 으로 pixel-encodable 한 *다른* 방향이 있을 수 있음. **2026-04-28 Cross-model SAE 4 모델 학습 완료** (LLaVA-1.5/Next/Idefics2/InternVL3); intervention runs 가 다음 단계.</a:t>
             </a:r>
           </a:p>
           <a:p>
@@ -10436,7 +10012,23 @@
                 </a:solidFill>
                 <a:latin typeface="Malgun Gothic"/>
               </a:rPr>
-              <a:t>• **Human baseline 미수집**: M7 Prolific (20 raters × 50 stim) 예산 있음, 미실시.</a:t>
+              <a:t>• **Human baseline 미수집**: M7 Prolific (20 raters × 50 stim) paper-blocking, 다음 단계.</a:t>
+            </a:r>
+          </a:p>
+          <a:p>
+            <a:pPr algn="l">
+              <a:lnSpc>
+                <a:spcPct val="115000"/>
+              </a:lnSpc>
+            </a:pPr>
+            <a:r>
+              <a:rPr sz="1300">
+                <a:solidFill>
+                  <a:srgbClr val="333333"/>
+                </a:solidFill>
+                <a:latin typeface="Malgun Gothic"/>
+              </a:rPr>
+              <a:t>• **ST5 prompt-steering (Gavrikov 2024)**: 명시적 "abstract / physical" prompt steering 은 **paper scope 에서 retire** — prompt-variation axis 는 §4.3 KO/JA + label-free + open vs FC 로 cover.</a:t>
             </a:r>
           </a:p>
         </p:txBody>
@@ -10702,13 +10294,13 @@
               </a:lnSpc>
             </a:pPr>
             <a:r>
-              <a:rPr sz="1600">
+              <a:rPr sz="1400">
                 <a:solidFill>
                   <a:srgbClr val="333333"/>
                 </a:solidFill>
                 <a:latin typeface="Malgun Gothic"/>
               </a:rPr>
-              <a:t>• **[기여 3] Pixel encodability — saturation 특이적**. Qwen ε=0.05 픽셀 perturbation 으로 5/5 PMR flip + 매칭 random 0/15. **§4.6 cross-model null**: 픽셀-인코드 가능성은 Qwen 의 saturated SigLIP 의 속성. M9 PMR-ceiling / §4.7 결정-안정성 ceiling 과 평행한 **세 번째 saturation 시그니처**.</a:t>
+              <a:t>• **[기여 3] Pixel encodability — architecture-conditional**. 5-model n=10 layer sweep + Idefics2 9-layer disambiguation: **3 of 5 testable architectures** 가 픽셀-공간 gradient ascent 로 PMR flip 가능 (Qwen broad / LLaVA-Next L20+L25 / LLaVA-1.5 L25 weak). Idefics2 는 L5-L31 9 레이어 모두 0 → **wrong-relative-depth falsified, perceiver-resampler 후보** (projector isolation 은 controlled swap 필요, out of scope). InternVL3 protocol-saturated. Random 1/250 in aggregate. M9 PMR-ceiling / §4.7 결정-안정성 ceiling 과 평행한 **세 번째 architecture-level signature**, **projector design 을 추가 disambiguating axis** 로 노출.</a:t>
             </a:r>
           </a:p>
         </p:txBody>
@@ -11369,13 +10961,13 @@
               </a:lnSpc>
             </a:pPr>
             <a:r>
-              <a:rPr sz="1500">
+              <a:rPr sz="1600">
                 <a:solidFill>
                   <a:srgbClr val="333333"/>
                 </a:solidFill>
                 <a:latin typeface="Malgun Gothic"/>
               </a:rPr>
-              <a:t>• **Pixel encodability — encoder-saturation 특이적**: Qwen 에서 픽셀-공간 gradient ascent (ε=0.05) 로 5/5 PMR flip. 매칭 magnitude random direction 은 0/15. **그러나 cross-model null**: 4 비-Qwen 모델에 transfer 안 되고, LLaVA-1.5 자체 v_L10 으로도 0/5 flip (projection 은 Qwen 매칭). 픽셀-인코드 가능성은 saturated architecture 의 속성.</a:t>
+              <a:t>• **Pixel encodability — architecture-conditional**: 픽셀-공간 gradient ascent 가 **5 모델 중 3 모델 testable** 에서 PMR flip 가능 (Qwen / LLaVA-Next / LLaVA-1.5). **Idefics2 9 레이어 (L5-L31) 모두 0 shortcuts → wrong-relative-depth falsified, perceiver-resampler 후보**. InternVL3 protocol-saturated. 상세 설명은 Slide 19-20 참조.</a:t>
             </a:r>
           </a:p>
         </p:txBody>

--- a/docs/review_ppt/physical_mode_paper_ko.pptx
+++ b/docs/review_ppt/physical_mode_paper_ko.pptx
@@ -31,6 +31,10 @@
     <p:sldId id="279" r:id="rId30"/>
     <p:sldId id="280" r:id="rId31"/>
     <p:sldId id="281" r:id="rId32"/>
+    <p:sldId id="282" r:id="rId33"/>
+    <p:sldId id="283" r:id="rId34"/>
+    <p:sldId id="284" r:id="rId35"/>
+    <p:sldId id="285" r:id="rId36"/>
   </p:sldIdLst>
   <p:sldSz cx="12191695" cy="6858000" type="screen4x3"/>
   <p:notesSz cx="6858000" cy="9144000"/>
@@ -4029,7 +4033,7 @@
                 </a:solidFill>
                 <a:latin typeface="Malgun Gothic"/>
               </a:rPr>
-              <a:t>10 / 26</a:t>
+              <a:t>10 / 30</a:t>
             </a:r>
           </a:p>
         </p:txBody>
@@ -4314,7 +4318,7 @@
                 </a:solidFill>
                 <a:latin typeface="Malgun Gothic"/>
               </a:rPr>
-              <a:t>11 / 26</a:t>
+              <a:t>11 / 30</a:t>
             </a:r>
           </a:p>
         </p:txBody>
@@ -4645,7 +4649,7 @@
                 </a:solidFill>
                 <a:latin typeface="Malgun Gothic"/>
               </a:rPr>
-              <a:t>12 / 26</a:t>
+              <a:t>12 / 30</a:t>
             </a:r>
           </a:p>
         </p:txBody>
@@ -4741,7 +4745,7 @@
                 </a:solidFill>
                 <a:latin typeface="Malgun Gothic"/>
               </a:rPr>
-              <a:t>인과 개입 — VTI steering + §4.6 픽셀 ascent</a:t>
+              <a:t>인과 개입 — 3 가지 보완적 method (LM-side / pixel-side / encoder-side)</a:t>
             </a:r>
           </a:p>
         </p:txBody>
@@ -4754,8 +4758,8 @@
         </p:nvSpPr>
         <p:spPr>
           <a:xfrm>
-            <a:off x="457200" y="960120"/>
-            <a:ext cx="11247120" cy="457200"/>
+            <a:off x="457200" y="914400"/>
+            <a:ext cx="11247120" cy="365760"/>
           </a:xfrm>
           <a:prstGeom prst="rect">
             <a:avLst/>
@@ -4770,13 +4774,13 @@
           <a:p>
             <a:pPr algn="l"/>
             <a:r>
-              <a:rPr sz="1800" b="1">
+              <a:rPr sz="1500" b="1">
                 <a:solidFill>
                   <a:srgbClr val="2E4A7F"/>
                 </a:solidFill>
                 <a:latin typeface="Malgun Gothic"/>
               </a:rPr>
-              <a:t>M5a — runtime VTI steering (forward hook)</a:t>
+              <a:t>M5a — LM-side runtime VTI steering (forward hook)</a:t>
             </a:r>
           </a:p>
         </p:txBody>
@@ -4789,8 +4793,8 @@
         </p:nvSpPr>
         <p:spPr>
           <a:xfrm>
-            <a:off x="457200" y="1417320"/>
-            <a:ext cx="11247120" cy="1828800"/>
+            <a:off x="457200" y="1325880"/>
+            <a:ext cx="11247120" cy="1280160"/>
           </a:xfrm>
           <a:prstGeom prst="rect">
             <a:avLst/>
@@ -4809,7 +4813,7 @@
               </a:lnSpc>
             </a:pPr>
             <a:r>
-              <a:rPr sz="1300">
+              <a:rPr sz="1100">
                 <a:solidFill>
                   <a:srgbClr val="333333"/>
                 </a:solidFill>
@@ -4825,13 +4829,13 @@
               </a:lnSpc>
             </a:pPr>
             <a:r>
-              <a:rPr sz="1300">
+              <a:rPr sz="1100">
                 <a:solidFill>
                   <a:srgbClr val="333333"/>
                 </a:solidFill>
                 <a:latin typeface="Malgun Gothic"/>
               </a:rPr>
-              <a:t>• **개입**: model.model.language_model.layers[L] 의 forward 출력 hidden_states 에 `α · v_unit_L` 더함 (모든 token position 균일).</a:t>
+              <a:t>• **개입**: `model.language_model.layers[L]` (또는 `text_model.layers[L]` for Idefics2) 의 forward 출력 hidden_states 에 `α · v_unit_L` 더함.</a:t>
             </a:r>
           </a:p>
           <a:p>
@@ -4841,7 +4845,7 @@
               </a:lnSpc>
             </a:pPr>
             <a:r>
-              <a:rPr sz="1300">
+              <a:rPr sz="1100">
                 <a:solidFill>
                   <a:srgbClr val="333333"/>
                 </a:solidFill>
@@ -4860,8 +4864,8 @@
         </p:nvSpPr>
         <p:spPr>
           <a:xfrm>
-            <a:off x="457200" y="3840480"/>
-            <a:ext cx="11247120" cy="457200"/>
+            <a:off x="457200" y="2560320"/>
+            <a:ext cx="11247120" cy="365760"/>
           </a:xfrm>
           <a:prstGeom prst="rect">
             <a:avLst/>
@@ -4876,13 +4880,13 @@
           <a:p>
             <a:pPr algn="l"/>
             <a:r>
-              <a:rPr sz="1800" b="1">
+              <a:rPr sz="1500" b="1">
                 <a:solidFill>
                   <a:srgbClr val="2E4A7F"/>
                 </a:solidFill>
                 <a:latin typeface="Malgun Gothic"/>
               </a:rPr>
-              <a:t>§4.6 — pixel-space gradient ascent</a:t>
+              <a:t>§4.6 — pixel-space gradient ascent (inverse direction)</a:t>
             </a:r>
           </a:p>
         </p:txBody>
@@ -4895,8 +4899,8 @@
         </p:nvSpPr>
         <p:spPr>
           <a:xfrm>
-            <a:off x="457200" y="4297680"/>
-            <a:ext cx="11247120" cy="2286000"/>
+            <a:off x="457200" y="2926080"/>
+            <a:ext cx="11247120" cy="1280160"/>
           </a:xfrm>
           <a:prstGeom prst="rect">
             <a:avLst/>
@@ -4915,13 +4919,13 @@
               </a:lnSpc>
             </a:pPr>
             <a:r>
-              <a:rPr sz="1300">
+              <a:rPr sz="1100">
                 <a:solidFill>
                   <a:srgbClr val="333333"/>
                 </a:solidFill>
                 <a:latin typeface="Malgun Gothic"/>
               </a:rPr>
-              <a:t>• **최적화 변수**: post-processor `pixel_values` tensor (Qwen: T_patches × 1176; LLaVA-1.5: 1×3×336×336).</a:t>
+              <a:t>• **최적화 변수**: post-processor `pixel_values` tensor (Qwen: T_patches × 1176; LLaVA: 1×3×336×336; Idefics2: 5-tile; InternVL3: 1×3×448×448).</a:t>
             </a:r>
           </a:p>
           <a:p>
@@ -4931,7 +4935,7 @@
               </a:lnSpc>
             </a:pPr>
             <a:r>
-              <a:rPr sz="1300">
+              <a:rPr sz="1100">
                 <a:solidFill>
                   <a:srgbClr val="333333"/>
                 </a:solidFill>
@@ -4947,13 +4951,13 @@
               </a:lnSpc>
             </a:pPr>
             <a:r>
-              <a:rPr sz="1300">
+              <a:rPr sz="1100">
                 <a:solidFill>
                   <a:srgbClr val="333333"/>
                 </a:solidFill>
                 <a:latin typeface="Malgun Gothic"/>
               </a:rPr>
-              <a:t>• **제약**: L_∞-bounded (`δ.clamp_(-eps, eps)`) ε ∈ {0.05, 0.1, 0.2} or unconstrained. Random unit-direction control 매칭 ε=0.1.</a:t>
+              <a:t>• **제약**: L_∞-bounded ε ∈ {0.05, 0.1, 0.2} or unconstrained. Random unit-direction control 매칭 ε=0.1.</a:t>
             </a:r>
           </a:p>
         </p:txBody>
@@ -4966,8 +4970,8 @@
         </p:nvSpPr>
         <p:spPr>
           <a:xfrm>
-            <a:off x="274320" y="6492240"/>
-            <a:ext cx="7315200" cy="274320"/>
+            <a:off x="457200" y="5029200"/>
+            <a:ext cx="11247120" cy="365760"/>
           </a:xfrm>
           <a:prstGeom prst="rect">
             <a:avLst/>
@@ -4982,13 +4986,13 @@
           <a:p>
             <a:pPr algn="l"/>
             <a:r>
-              <a:rPr sz="900" b="0">
-                <a:solidFill>
-                  <a:srgbClr val="CCCCCC"/>
-                </a:solidFill>
-                <a:latin typeface="Malgun Gothic"/>
-              </a:rPr>
-              <a:t>VLM 의 추상-물리 shortcut — 5-model 실험과 픽셀-인코드 가능성</a:t>
+              <a:rPr sz="1500" b="1">
+                <a:solidFill>
+                  <a:srgbClr val="2E4A7F"/>
+                </a:solidFill>
+                <a:latin typeface="Malgun Gothic"/>
+              </a:rPr>
+              <a:t>M5b — encoder-side SAE feature ablation (Bricken et al. 2023 trick)</a:t>
             </a:r>
           </a:p>
         </p:txBody>
@@ -5001,8 +5005,79 @@
         </p:nvSpPr>
         <p:spPr>
           <a:xfrm>
-            <a:off x="10972800" y="6492240"/>
-            <a:ext cx="914400" cy="274320"/>
+            <a:off x="457200" y="5394960"/>
+            <a:ext cx="11247120" cy="1371600"/>
+          </a:xfrm>
+          <a:prstGeom prst="rect">
+            <a:avLst/>
+          </a:prstGeom>
+          <a:noFill/>
+        </p:spPr>
+        <p:txBody>
+          <a:bodyPr wrap="square">
+            <a:spAutoFit/>
+          </a:bodyPr>
+          <a:lstStyle/>
+          <a:p>
+            <a:pPr algn="l">
+              <a:lnSpc>
+                <a:spcPct val="115000"/>
+              </a:lnSpc>
+            </a:pPr>
+            <a:r>
+              <a:rPr sz="1100">
+                <a:solidFill>
+                  <a:srgbClr val="333333"/>
+                </a:solidFill>
+                <a:latin typeface="Malgun Gothic"/>
+              </a:rPr>
+              <a:t>• **SAE 학습**: 4× overcomplete (n_features = 4 × d_in), λ=1.0 L1, 5K Adam steps, input z-score, tied weights. **Feature ranking by Cohen's d** (= delta / pooled_std, high-baseline outlier 필터링).</a:t>
+            </a:r>
+          </a:p>
+          <a:p>
+            <a:pPr algn="l">
+              <a:lnSpc>
+                <a:spcPct val="115000"/>
+              </a:lnSpc>
+            </a:pPr>
+            <a:r>
+              <a:rPr sz="1100">
+                <a:solidFill>
+                  <a:srgbClr val="333333"/>
+                </a:solidFill>
+                <a:latin typeface="Malgun Gothic"/>
+              </a:rPr>
+              <a:t>• **Hook layer 모델별** (LM 이 *실제* 소비하는 layer): Qwen L31 / LLaVA L22 (`vision_feature_layer=-2`) / Idefics2 L26 (last) / InternVL3 L23 (`-1`). **개입**: top-k features 의 *raw-scale contribution* 을 빼기 — 다른 features + reconstruction residual 은 bit-identical 유지 (Bricken trick).</a:t>
+            </a:r>
+          </a:p>
+          <a:p>
+            <a:pPr algn="l">
+              <a:lnSpc>
+                <a:spcPct val="115000"/>
+              </a:lnSpc>
+            </a:pPr>
+            <a:r>
+              <a:rPr sz="1100">
+                <a:solidFill>
+                  <a:srgbClr val="333333"/>
+                </a:solidFill>
+                <a:latin typeface="Malgun Gothic"/>
+              </a:rPr>
+              <a:t>• **Random control (3 sets)**: high-mass non-top-k pool 에서 추출, [0.7×, 2×] top-k mass window 매칭 — direction-specificity 검증.</a:t>
+            </a:r>
+          </a:p>
+        </p:txBody>
+      </p:sp>
+      <p:sp>
+        <p:nvSpPr>
+          <p:cNvPr id="10" name="TextBox 9"/>
+          <p:cNvSpPr txBox="1"/>
+          <p:nvPr/>
+        </p:nvSpPr>
+        <p:spPr>
+          <a:xfrm>
+            <a:off x="274320" y="6492240"/>
+            <a:ext cx="7315200" cy="274320"/>
           </a:xfrm>
           <a:prstGeom prst="rect">
             <a:avLst/>
@@ -5015,6 +5090,41 @@
           </a:bodyPr>
           <a:lstStyle/>
           <a:p>
+            <a:pPr algn="l"/>
+            <a:r>
+              <a:rPr sz="900" b="0">
+                <a:solidFill>
+                  <a:srgbClr val="CCCCCC"/>
+                </a:solidFill>
+                <a:latin typeface="Malgun Gothic"/>
+              </a:rPr>
+              <a:t>VLM 의 추상-물리 shortcut — 5-model 실험과 픽셀-인코드 가능성</a:t>
+            </a:r>
+          </a:p>
+        </p:txBody>
+      </p:sp>
+      <p:sp>
+        <p:nvSpPr>
+          <p:cNvPr id="11" name="TextBox 10"/>
+          <p:cNvSpPr txBox="1"/>
+          <p:nvPr/>
+        </p:nvSpPr>
+        <p:spPr>
+          <a:xfrm>
+            <a:off x="10972800" y="6492240"/>
+            <a:ext cx="914400" cy="274320"/>
+          </a:xfrm>
+          <a:prstGeom prst="rect">
+            <a:avLst/>
+          </a:prstGeom>
+          <a:noFill/>
+        </p:spPr>
+        <p:txBody>
+          <a:bodyPr wrap="square" anchor="t">
+            <a:spAutoFit/>
+          </a:bodyPr>
+          <a:lstStyle/>
+          <a:p>
             <a:pPr algn="r"/>
             <a:r>
               <a:rPr sz="900" b="0">
@@ -5023,7 +5133,7 @@
                 </a:solidFill>
                 <a:latin typeface="Malgun Gothic"/>
               </a:rPr>
-              <a:t>13 / 26</a:t>
+              <a:t>13 / 30</a:t>
             </a:r>
           </a:p>
         </p:txBody>
@@ -5674,7 +5784,7 @@
                 </a:solidFill>
                 <a:latin typeface="Malgun Gothic"/>
               </a:rPr>
-              <a:t>14 / 26</a:t>
+              <a:t>14 / 30</a:t>
             </a:r>
           </a:p>
         </p:txBody>
@@ -5986,7 +6096,7 @@
                 </a:solidFill>
                 <a:latin typeface="Malgun Gothic"/>
               </a:rPr>
-              <a:t>15 / 26</a:t>
+              <a:t>15 / 30</a:t>
             </a:r>
           </a:p>
         </p:txBody>
@@ -6298,7 +6408,7 @@
                 </a:solidFill>
                 <a:latin typeface="Malgun Gothic"/>
               </a:rPr>
-              <a:t>16 / 26</a:t>
+              <a:t>16 / 30</a:t>
             </a:r>
           </a:p>
         </p:txBody>
@@ -6658,7 +6768,7 @@
                 </a:solidFill>
                 <a:latin typeface="Malgun Gothic"/>
               </a:rPr>
-              <a:t>17 / 26</a:t>
+              <a:t>17 / 30</a:t>
             </a:r>
           </a:p>
         </p:txBody>
@@ -6754,7 +6864,1165 @@
                 </a:solidFill>
                 <a:latin typeface="Malgun Gothic"/>
               </a:rPr>
-              <a:t>결과 (5) — M5a VTI causal steering: L10 only flips</a:t>
+              <a:t>결과 (4b) — M4 LM logit-lens cross-model AUC ladder</a:t>
+            </a:r>
+          </a:p>
+        </p:txBody>
+      </p:sp>
+      <p:sp>
+        <p:nvSpPr>
+          <p:cNvPr id="4" name="TextBox 3"/>
+          <p:cNvSpPr txBox="1"/>
+          <p:nvPr/>
+        </p:nvSpPr>
+        <p:spPr>
+          <a:xfrm>
+            <a:off x="365760" y="621792"/>
+            <a:ext cx="11430000" cy="365760"/>
+          </a:xfrm>
+          <a:prstGeom prst="rect">
+            <a:avLst/>
+          </a:prstGeom>
+          <a:noFill/>
+        </p:spPr>
+        <p:txBody>
+          <a:bodyPr wrap="square" anchor="ctr">
+            <a:spAutoFit/>
+          </a:bodyPr>
+          <a:lstStyle/>
+          <a:p>
+            <a:pPr algn="l"/>
+            <a:r>
+              <a:rPr sz="1400" b="0">
+                <a:solidFill>
+                  <a:srgbClr val="666666"/>
+                </a:solidFill>
+                <a:latin typeface="Malgun Gothic"/>
+              </a:rPr>
+              <a:t>encoder probe AUC ladder 와 동일 클러스터링 — Idefics2 LM AUC 0.995 &gt; vision 0.93 (perceiver-resampler 가 정보 strip 안 함)</a:t>
+            </a:r>
+          </a:p>
+        </p:txBody>
+      </p:sp>
+      <p:pic>
+        <p:nvPicPr>
+          <p:cNvPr id="5" name="Picture 4" descr="m4_lm_probing_cross_model.png"/>
+          <p:cNvPicPr>
+            <a:picLocks noChangeAspect="1"/>
+          </p:cNvPicPr>
+          <p:nvPr/>
+        </p:nvPicPr>
+        <p:blipFill>
+          <a:blip r:embed="rId2"/>
+          <a:stretch>
+            <a:fillRect/>
+          </a:stretch>
+        </p:blipFill>
+        <p:spPr>
+          <a:xfrm>
+            <a:off x="274320" y="1188720"/>
+            <a:ext cx="7315200" cy="4572000"/>
+          </a:xfrm>
+          <a:prstGeom prst="rect">
+            <a:avLst/>
+          </a:prstGeom>
+        </p:spPr>
+      </p:pic>
+      <p:graphicFrame>
+        <p:nvGraphicFramePr>
+          <p:cNvPr id="6" name="Table 5"/>
+          <p:cNvGraphicFramePr>
+            <a:graphicFrameLocks noGrp="1"/>
+          </p:cNvGraphicFramePr>
+          <p:nvPr/>
+        </p:nvGraphicFramePr>
+        <p:xfrm>
+          <a:off x="7772400" y="1188720"/>
+          <a:ext cx="4297680" cy="2286000"/>
+        </p:xfrm>
+        <a:graphic>
+          <a:graphicData uri="http://schemas.openxmlformats.org/drawingml/2006/table">
+            <a:tbl>
+              <a:tblPr firstRow="1" bandRow="1">
+                <a:tableStyleId>{5C22544A-7EE6-4342-B048-85BDC9FD1C3A}</a:tableStyleId>
+              </a:tblPr>
+              <a:tblGrid>
+                <a:gridCol w="613954"/>
+                <a:gridCol w="613954"/>
+                <a:gridCol w="613954"/>
+                <a:gridCol w="613954"/>
+                <a:gridCol w="613954"/>
+                <a:gridCol w="613954"/>
+                <a:gridCol w="613956"/>
+              </a:tblGrid>
+              <a:tr h="381000">
+                <a:tc>
+                  <a:txBody>
+                    <a:bodyPr/>
+                    <a:lstStyle/>
+                    <a:p>
+                      <a:r>
+                        <a:rPr sz="1100" b="1">
+                          <a:solidFill>
+                            <a:srgbClr val="FFFFFF"/>
+                          </a:solidFill>
+                          <a:latin typeface="Malgun Gothic"/>
+                        </a:rPr>
+                        <a:t>Model</a:t>
+                      </a:r>
+                    </a:p>
+                  </a:txBody>
+                  <a:tcPr>
+                    <a:solidFill>
+                      <a:srgbClr val="2E4A7F"/>
+                    </a:solidFill>
+                  </a:tcPr>
+                </a:tc>
+                <a:tc>
+                  <a:txBody>
+                    <a:bodyPr/>
+                    <a:lstStyle/>
+                    <a:p>
+                      <a:r>
+                        <a:rPr sz="1100" b="1">
+                          <a:solidFill>
+                            <a:srgbClr val="FFFFFF"/>
+                          </a:solidFill>
+                          <a:latin typeface="Malgun Gothic"/>
+                        </a:rPr>
+                        <a:t>L5</a:t>
+                      </a:r>
+                    </a:p>
+                  </a:txBody>
+                  <a:tcPr>
+                    <a:solidFill>
+                      <a:srgbClr val="2E4A7F"/>
+                    </a:solidFill>
+                  </a:tcPr>
+                </a:tc>
+                <a:tc>
+                  <a:txBody>
+                    <a:bodyPr/>
+                    <a:lstStyle/>
+                    <a:p>
+                      <a:r>
+                        <a:rPr sz="1100" b="1">
+                          <a:solidFill>
+                            <a:srgbClr val="FFFFFF"/>
+                          </a:solidFill>
+                          <a:latin typeface="Malgun Gothic"/>
+                        </a:rPr>
+                        <a:t>L10</a:t>
+                      </a:r>
+                    </a:p>
+                  </a:txBody>
+                  <a:tcPr>
+                    <a:solidFill>
+                      <a:srgbClr val="2E4A7F"/>
+                    </a:solidFill>
+                  </a:tcPr>
+                </a:tc>
+                <a:tc>
+                  <a:txBody>
+                    <a:bodyPr/>
+                    <a:lstStyle/>
+                    <a:p>
+                      <a:r>
+                        <a:rPr sz="1100" b="1">
+                          <a:solidFill>
+                            <a:srgbClr val="FFFFFF"/>
+                          </a:solidFill>
+                          <a:latin typeface="Malgun Gothic"/>
+                        </a:rPr>
+                        <a:t>L15</a:t>
+                      </a:r>
+                    </a:p>
+                  </a:txBody>
+                  <a:tcPr>
+                    <a:solidFill>
+                      <a:srgbClr val="2E4A7F"/>
+                    </a:solidFill>
+                  </a:tcPr>
+                </a:tc>
+                <a:tc>
+                  <a:txBody>
+                    <a:bodyPr/>
+                    <a:lstStyle/>
+                    <a:p>
+                      <a:r>
+                        <a:rPr sz="1100" b="1">
+                          <a:solidFill>
+                            <a:srgbClr val="FFFFFF"/>
+                          </a:solidFill>
+                          <a:latin typeface="Malgun Gothic"/>
+                        </a:rPr>
+                        <a:t>L20</a:t>
+                      </a:r>
+                    </a:p>
+                  </a:txBody>
+                  <a:tcPr>
+                    <a:solidFill>
+                      <a:srgbClr val="2E4A7F"/>
+                    </a:solidFill>
+                  </a:tcPr>
+                </a:tc>
+                <a:tc>
+                  <a:txBody>
+                    <a:bodyPr/>
+                    <a:lstStyle/>
+                    <a:p>
+                      <a:r>
+                        <a:rPr sz="1100" b="1">
+                          <a:solidFill>
+                            <a:srgbClr val="FFFFFF"/>
+                          </a:solidFill>
+                          <a:latin typeface="Malgun Gothic"/>
+                        </a:rPr>
+                        <a:t>L25</a:t>
+                      </a:r>
+                    </a:p>
+                  </a:txBody>
+                  <a:tcPr>
+                    <a:solidFill>
+                      <a:srgbClr val="2E4A7F"/>
+                    </a:solidFill>
+                  </a:tcPr>
+                </a:tc>
+                <a:tc>
+                  <a:txBody>
+                    <a:bodyPr/>
+                    <a:lstStyle/>
+                    <a:p>
+                      <a:r>
+                        <a:rPr sz="1100" b="1">
+                          <a:solidFill>
+                            <a:srgbClr val="FFFFFF"/>
+                          </a:solidFill>
+                          <a:latin typeface="Malgun Gothic"/>
+                        </a:rPr>
+                        <a:t>M3 vis</a:t>
+                      </a:r>
+                    </a:p>
+                  </a:txBody>
+                  <a:tcPr>
+                    <a:solidFill>
+                      <a:srgbClr val="2E4A7F"/>
+                    </a:solidFill>
+                  </a:tcPr>
+                </a:tc>
+              </a:tr>
+              <a:tr h="381000">
+                <a:tc>
+                  <a:txBody>
+                    <a:bodyPr/>
+                    <a:lstStyle/>
+                    <a:p>
+                      <a:r>
+                        <a:rPr sz="1100">
+                          <a:latin typeface="Malgun Gothic"/>
+                        </a:rPr>
+                        <a:t>Idefics2-8B</a:t>
+                      </a:r>
+                    </a:p>
+                  </a:txBody>
+                  <a:tcPr>
+                    <a:solidFill>
+                      <a:srgbClr val="FFFFFF"/>
+                    </a:solidFill>
+                  </a:tcPr>
+                </a:tc>
+                <a:tc>
+                  <a:txBody>
+                    <a:bodyPr/>
+                    <a:lstStyle/>
+                    <a:p>
+                      <a:r>
+                        <a:rPr sz="1100">
+                          <a:latin typeface="Malgun Gothic"/>
+                        </a:rPr>
+                        <a:t>0.995</a:t>
+                      </a:r>
+                    </a:p>
+                  </a:txBody>
+                  <a:tcPr>
+                    <a:solidFill>
+                      <a:srgbClr val="FFFFFF"/>
+                    </a:solidFill>
+                  </a:tcPr>
+                </a:tc>
+                <a:tc>
+                  <a:txBody>
+                    <a:bodyPr/>
+                    <a:lstStyle/>
+                    <a:p>
+                      <a:r>
+                        <a:rPr sz="1100">
+                          <a:latin typeface="Malgun Gothic"/>
+                        </a:rPr>
+                        <a:t>0.995</a:t>
+                      </a:r>
+                    </a:p>
+                  </a:txBody>
+                  <a:tcPr>
+                    <a:solidFill>
+                      <a:srgbClr val="FFFFFF"/>
+                    </a:solidFill>
+                  </a:tcPr>
+                </a:tc>
+                <a:tc>
+                  <a:txBody>
+                    <a:bodyPr/>
+                    <a:lstStyle/>
+                    <a:p>
+                      <a:r>
+                        <a:rPr sz="1100">
+                          <a:latin typeface="Malgun Gothic"/>
+                        </a:rPr>
+                        <a:t>0.995</a:t>
+                      </a:r>
+                    </a:p>
+                  </a:txBody>
+                  <a:tcPr>
+                    <a:solidFill>
+                      <a:srgbClr val="FFFFFF"/>
+                    </a:solidFill>
+                  </a:tcPr>
+                </a:tc>
+                <a:tc>
+                  <a:txBody>
+                    <a:bodyPr/>
+                    <a:lstStyle/>
+                    <a:p>
+                      <a:r>
+                        <a:rPr sz="1100">
+                          <a:latin typeface="Malgun Gothic"/>
+                        </a:rPr>
+                        <a:t>0.995</a:t>
+                      </a:r>
+                    </a:p>
+                  </a:txBody>
+                  <a:tcPr>
+                    <a:solidFill>
+                      <a:srgbClr val="FFFFFF"/>
+                    </a:solidFill>
+                  </a:tcPr>
+                </a:tc>
+                <a:tc>
+                  <a:txBody>
+                    <a:bodyPr/>
+                    <a:lstStyle/>
+                    <a:p>
+                      <a:r>
+                        <a:rPr sz="1100">
+                          <a:latin typeface="Malgun Gothic"/>
+                        </a:rPr>
+                        <a:t>0.995</a:t>
+                      </a:r>
+                    </a:p>
+                  </a:txBody>
+                  <a:tcPr>
+                    <a:solidFill>
+                      <a:srgbClr val="FFFFFF"/>
+                    </a:solidFill>
+                  </a:tcPr>
+                </a:tc>
+                <a:tc>
+                  <a:txBody>
+                    <a:bodyPr/>
+                    <a:lstStyle/>
+                    <a:p>
+                      <a:r>
+                        <a:rPr sz="1100">
+                          <a:latin typeface="Malgun Gothic"/>
+                        </a:rPr>
+                        <a:t>0.93</a:t>
+                      </a:r>
+                    </a:p>
+                  </a:txBody>
+                  <a:tcPr>
+                    <a:solidFill>
+                      <a:srgbClr val="FFFFFF"/>
+                    </a:solidFill>
+                  </a:tcPr>
+                </a:tc>
+              </a:tr>
+              <a:tr h="381000">
+                <a:tc>
+                  <a:txBody>
+                    <a:bodyPr/>
+                    <a:lstStyle/>
+                    <a:p>
+                      <a:r>
+                        <a:rPr sz="1100">
+                          <a:latin typeface="Malgun Gothic"/>
+                        </a:rPr>
+                        <a:t>Qwen2.5-VL</a:t>
+                      </a:r>
+                    </a:p>
+                  </a:txBody>
+                  <a:tcPr>
+                    <a:solidFill>
+                      <a:srgbClr val="F6F8FC"/>
+                    </a:solidFill>
+                  </a:tcPr>
+                </a:tc>
+                <a:tc>
+                  <a:txBody>
+                    <a:bodyPr/>
+                    <a:lstStyle/>
+                    <a:p>
+                      <a:r>
+                        <a:rPr sz="1100">
+                          <a:latin typeface="Malgun Gothic"/>
+                        </a:rPr>
+                        <a:t>0.965</a:t>
+                      </a:r>
+                    </a:p>
+                  </a:txBody>
+                  <a:tcPr>
+                    <a:solidFill>
+                      <a:srgbClr val="F6F8FC"/>
+                    </a:solidFill>
+                  </a:tcPr>
+                </a:tc>
+                <a:tc>
+                  <a:txBody>
+                    <a:bodyPr/>
+                    <a:lstStyle/>
+                    <a:p>
+                      <a:r>
+                        <a:rPr sz="1100">
+                          <a:latin typeface="Malgun Gothic"/>
+                        </a:rPr>
+                        <a:t>0.965</a:t>
+                      </a:r>
+                    </a:p>
+                  </a:txBody>
+                  <a:tcPr>
+                    <a:solidFill>
+                      <a:srgbClr val="F6F8FC"/>
+                    </a:solidFill>
+                  </a:tcPr>
+                </a:tc>
+                <a:tc>
+                  <a:txBody>
+                    <a:bodyPr/>
+                    <a:lstStyle/>
+                    <a:p>
+                      <a:r>
+                        <a:rPr sz="1100">
+                          <a:latin typeface="Malgun Gothic"/>
+                        </a:rPr>
+                        <a:t>0.962</a:t>
+                      </a:r>
+                    </a:p>
+                  </a:txBody>
+                  <a:tcPr>
+                    <a:solidFill>
+                      <a:srgbClr val="F6F8FC"/>
+                    </a:solidFill>
+                  </a:tcPr>
+                </a:tc>
+                <a:tc>
+                  <a:txBody>
+                    <a:bodyPr/>
+                    <a:lstStyle/>
+                    <a:p>
+                      <a:r>
+                        <a:rPr sz="1100">
+                          <a:latin typeface="Malgun Gothic"/>
+                        </a:rPr>
+                        <a:t>0.959</a:t>
+                      </a:r>
+                    </a:p>
+                  </a:txBody>
+                  <a:tcPr>
+                    <a:solidFill>
+                      <a:srgbClr val="F6F8FC"/>
+                    </a:solidFill>
+                  </a:tcPr>
+                </a:tc>
+                <a:tc>
+                  <a:txBody>
+                    <a:bodyPr/>
+                    <a:lstStyle/>
+                    <a:p>
+                      <a:r>
+                        <a:rPr sz="1100">
+                          <a:latin typeface="Malgun Gothic"/>
+                        </a:rPr>
+                        <a:t>0.957</a:t>
+                      </a:r>
+                    </a:p>
+                  </a:txBody>
+                  <a:tcPr>
+                    <a:solidFill>
+                      <a:srgbClr val="F6F8FC"/>
+                    </a:solidFill>
+                  </a:tcPr>
+                </a:tc>
+                <a:tc>
+                  <a:txBody>
+                    <a:bodyPr/>
+                    <a:lstStyle/>
+                    <a:p>
+                      <a:r>
+                        <a:rPr sz="1100">
+                          <a:latin typeface="Malgun Gothic"/>
+                        </a:rPr>
+                        <a:t>0.99</a:t>
+                      </a:r>
+                    </a:p>
+                  </a:txBody>
+                  <a:tcPr>
+                    <a:solidFill>
+                      <a:srgbClr val="F6F8FC"/>
+                    </a:solidFill>
+                  </a:tcPr>
+                </a:tc>
+              </a:tr>
+              <a:tr h="381000">
+                <a:tc>
+                  <a:txBody>
+                    <a:bodyPr/>
+                    <a:lstStyle/>
+                    <a:p>
+                      <a:r>
+                        <a:rPr sz="1100">
+                          <a:latin typeface="Malgun Gothic"/>
+                        </a:rPr>
+                        <a:t>LLaVA-Next</a:t>
+                      </a:r>
+                    </a:p>
+                  </a:txBody>
+                  <a:tcPr>
+                    <a:solidFill>
+                      <a:srgbClr val="FFFFFF"/>
+                    </a:solidFill>
+                  </a:tcPr>
+                </a:tc>
+                <a:tc>
+                  <a:txBody>
+                    <a:bodyPr/>
+                    <a:lstStyle/>
+                    <a:p>
+                      <a:r>
+                        <a:rPr sz="1100">
+                          <a:latin typeface="Malgun Gothic"/>
+                        </a:rPr>
+                        <a:t>0.732</a:t>
+                      </a:r>
+                    </a:p>
+                  </a:txBody>
+                  <a:tcPr>
+                    <a:solidFill>
+                      <a:srgbClr val="FFFFFF"/>
+                    </a:solidFill>
+                  </a:tcPr>
+                </a:tc>
+                <a:tc>
+                  <a:txBody>
+                    <a:bodyPr/>
+                    <a:lstStyle/>
+                    <a:p>
+                      <a:r>
+                        <a:rPr sz="1100">
+                          <a:latin typeface="Malgun Gothic"/>
+                        </a:rPr>
+                        <a:t>0.762</a:t>
+                      </a:r>
+                    </a:p>
+                  </a:txBody>
+                  <a:tcPr>
+                    <a:solidFill>
+                      <a:srgbClr val="FFFFFF"/>
+                    </a:solidFill>
+                  </a:tcPr>
+                </a:tc>
+                <a:tc>
+                  <a:txBody>
+                    <a:bodyPr/>
+                    <a:lstStyle/>
+                    <a:p>
+                      <a:r>
+                        <a:rPr sz="1100">
+                          <a:latin typeface="Malgun Gothic"/>
+                        </a:rPr>
+                        <a:t>0.751</a:t>
+                      </a:r>
+                    </a:p>
+                  </a:txBody>
+                  <a:tcPr>
+                    <a:solidFill>
+                      <a:srgbClr val="FFFFFF"/>
+                    </a:solidFill>
+                  </a:tcPr>
+                </a:tc>
+                <a:tc>
+                  <a:txBody>
+                    <a:bodyPr/>
+                    <a:lstStyle/>
+                    <a:p>
+                      <a:r>
+                        <a:rPr sz="1100">
+                          <a:latin typeface="Malgun Gothic"/>
+                        </a:rPr>
+                        <a:t>0.786</a:t>
+                      </a:r>
+                    </a:p>
+                  </a:txBody>
+                  <a:tcPr>
+                    <a:solidFill>
+                      <a:srgbClr val="FFFFFF"/>
+                    </a:solidFill>
+                  </a:tcPr>
+                </a:tc>
+                <a:tc>
+                  <a:txBody>
+                    <a:bodyPr/>
+                    <a:lstStyle/>
+                    <a:p>
+                      <a:r>
+                        <a:rPr sz="1100">
+                          <a:latin typeface="Malgun Gothic"/>
+                        </a:rPr>
+                        <a:t>0.791</a:t>
+                      </a:r>
+                    </a:p>
+                  </a:txBody>
+                  <a:tcPr>
+                    <a:solidFill>
+                      <a:srgbClr val="FFFFFF"/>
+                    </a:solidFill>
+                  </a:tcPr>
+                </a:tc>
+                <a:tc>
+                  <a:txBody>
+                    <a:bodyPr/>
+                    <a:lstStyle/>
+                    <a:p>
+                      <a:r>
+                        <a:rPr sz="1100">
+                          <a:latin typeface="Malgun Gothic"/>
+                        </a:rPr>
+                        <a:t>0.81</a:t>
+                      </a:r>
+                    </a:p>
+                  </a:txBody>
+                  <a:tcPr>
+                    <a:solidFill>
+                      <a:srgbClr val="FFFFFF"/>
+                    </a:solidFill>
+                  </a:tcPr>
+                </a:tc>
+              </a:tr>
+              <a:tr h="381000">
+                <a:tc>
+                  <a:txBody>
+                    <a:bodyPr/>
+                    <a:lstStyle/>
+                    <a:p>
+                      <a:r>
+                        <a:rPr sz="1100">
+                          <a:latin typeface="Malgun Gothic"/>
+                        </a:rPr>
+                        <a:t>LLaVA-1.5</a:t>
+                      </a:r>
+                    </a:p>
+                  </a:txBody>
+                  <a:tcPr>
+                    <a:solidFill>
+                      <a:srgbClr val="F6F8FC"/>
+                    </a:solidFill>
+                  </a:tcPr>
+                </a:tc>
+                <a:tc>
+                  <a:txBody>
+                    <a:bodyPr/>
+                    <a:lstStyle/>
+                    <a:p>
+                      <a:r>
+                        <a:rPr sz="1100">
+                          <a:latin typeface="Malgun Gothic"/>
+                        </a:rPr>
+                        <a:t>0.758</a:t>
+                      </a:r>
+                    </a:p>
+                  </a:txBody>
+                  <a:tcPr>
+                    <a:solidFill>
+                      <a:srgbClr val="F6F8FC"/>
+                    </a:solidFill>
+                  </a:tcPr>
+                </a:tc>
+                <a:tc>
+                  <a:txBody>
+                    <a:bodyPr/>
+                    <a:lstStyle/>
+                    <a:p>
+                      <a:r>
+                        <a:rPr sz="1100">
+                          <a:latin typeface="Malgun Gothic"/>
+                        </a:rPr>
+                        <a:t>0.760</a:t>
+                      </a:r>
+                    </a:p>
+                  </a:txBody>
+                  <a:tcPr>
+                    <a:solidFill>
+                      <a:srgbClr val="F6F8FC"/>
+                    </a:solidFill>
+                  </a:tcPr>
+                </a:tc>
+                <a:tc>
+                  <a:txBody>
+                    <a:bodyPr/>
+                    <a:lstStyle/>
+                    <a:p>
+                      <a:r>
+                        <a:rPr sz="1100">
+                          <a:latin typeface="Malgun Gothic"/>
+                        </a:rPr>
+                        <a:t>0.762</a:t>
+                      </a:r>
+                    </a:p>
+                  </a:txBody>
+                  <a:tcPr>
+                    <a:solidFill>
+                      <a:srgbClr val="F6F8FC"/>
+                    </a:solidFill>
+                  </a:tcPr>
+                </a:tc>
+                <a:tc>
+                  <a:txBody>
+                    <a:bodyPr/>
+                    <a:lstStyle/>
+                    <a:p>
+                      <a:r>
+                        <a:rPr sz="1100">
+                          <a:latin typeface="Malgun Gothic"/>
+                        </a:rPr>
+                        <a:t>0.763</a:t>
+                      </a:r>
+                    </a:p>
+                  </a:txBody>
+                  <a:tcPr>
+                    <a:solidFill>
+                      <a:srgbClr val="F6F8FC"/>
+                    </a:solidFill>
+                  </a:tcPr>
+                </a:tc>
+                <a:tc>
+                  <a:txBody>
+                    <a:bodyPr/>
+                    <a:lstStyle/>
+                    <a:p>
+                      <a:r>
+                        <a:rPr sz="1100">
+                          <a:latin typeface="Malgun Gothic"/>
+                        </a:rPr>
+                        <a:t>0.768</a:t>
+                      </a:r>
+                    </a:p>
+                  </a:txBody>
+                  <a:tcPr>
+                    <a:solidFill>
+                      <a:srgbClr val="F6F8FC"/>
+                    </a:solidFill>
+                  </a:tcPr>
+                </a:tc>
+                <a:tc>
+                  <a:txBody>
+                    <a:bodyPr/>
+                    <a:lstStyle/>
+                    <a:p>
+                      <a:r>
+                        <a:rPr sz="1100">
+                          <a:latin typeface="Malgun Gothic"/>
+                        </a:rPr>
+                        <a:t>0.73</a:t>
+                      </a:r>
+                    </a:p>
+                  </a:txBody>
+                  <a:tcPr>
+                    <a:solidFill>
+                      <a:srgbClr val="F6F8FC"/>
+                    </a:solidFill>
+                  </a:tcPr>
+                </a:tc>
+              </a:tr>
+              <a:tr h="381000">
+                <a:tc>
+                  <a:txBody>
+                    <a:bodyPr/>
+                    <a:lstStyle/>
+                    <a:p>
+                      <a:r>
+                        <a:rPr sz="1100">
+                          <a:latin typeface="Malgun Gothic"/>
+                        </a:rPr>
+                        <a:t>InternVL3</a:t>
+                      </a:r>
+                    </a:p>
+                  </a:txBody>
+                  <a:tcPr>
+                    <a:solidFill>
+                      <a:srgbClr val="FFFFFF"/>
+                    </a:solidFill>
+                  </a:tcPr>
+                </a:tc>
+                <a:tc>
+                  <a:txBody>
+                    <a:bodyPr/>
+                    <a:lstStyle/>
+                    <a:p>
+                      <a:r>
+                        <a:rPr sz="1100">
+                          <a:latin typeface="Malgun Gothic"/>
+                        </a:rPr>
+                        <a:t>n/a</a:t>
+                      </a:r>
+                    </a:p>
+                  </a:txBody>
+                  <a:tcPr>
+                    <a:solidFill>
+                      <a:srgbClr val="FFFFFF"/>
+                    </a:solidFill>
+                  </a:tcPr>
+                </a:tc>
+                <a:tc>
+                  <a:txBody>
+                    <a:bodyPr/>
+                    <a:lstStyle/>
+                    <a:p>
+                      <a:r>
+                        <a:rPr sz="1100">
+                          <a:latin typeface="Malgun Gothic"/>
+                        </a:rPr>
+                        <a:t>n/a</a:t>
+                      </a:r>
+                    </a:p>
+                  </a:txBody>
+                  <a:tcPr>
+                    <a:solidFill>
+                      <a:srgbClr val="FFFFFF"/>
+                    </a:solidFill>
+                  </a:tcPr>
+                </a:tc>
+                <a:tc>
+                  <a:txBody>
+                    <a:bodyPr/>
+                    <a:lstStyle/>
+                    <a:p>
+                      <a:r>
+                        <a:rPr sz="1100">
+                          <a:latin typeface="Malgun Gothic"/>
+                        </a:rPr>
+                        <a:t>n/a</a:t>
+                      </a:r>
+                    </a:p>
+                  </a:txBody>
+                  <a:tcPr>
+                    <a:solidFill>
+                      <a:srgbClr val="FFFFFF"/>
+                    </a:solidFill>
+                  </a:tcPr>
+                </a:tc>
+                <a:tc>
+                  <a:txBody>
+                    <a:bodyPr/>
+                    <a:lstStyle/>
+                    <a:p>
+                      <a:r>
+                        <a:rPr sz="1100">
+                          <a:latin typeface="Malgun Gothic"/>
+                        </a:rPr>
+                        <a:t>n/a</a:t>
+                      </a:r>
+                    </a:p>
+                  </a:txBody>
+                  <a:tcPr>
+                    <a:solidFill>
+                      <a:srgbClr val="FFFFFF"/>
+                    </a:solidFill>
+                  </a:tcPr>
+                </a:tc>
+                <a:tc>
+                  <a:txBody>
+                    <a:bodyPr/>
+                    <a:lstStyle/>
+                    <a:p>
+                      <a:r>
+                        <a:rPr sz="1100">
+                          <a:latin typeface="Malgun Gothic"/>
+                        </a:rPr>
+                        <a:t>n/a</a:t>
+                      </a:r>
+                    </a:p>
+                  </a:txBody>
+                  <a:tcPr>
+                    <a:solidFill>
+                      <a:srgbClr val="FFFFFF"/>
+                    </a:solidFill>
+                  </a:tcPr>
+                </a:tc>
+                <a:tc>
+                  <a:txBody>
+                    <a:bodyPr/>
+                    <a:lstStyle/>
+                    <a:p>
+                      <a:r>
+                        <a:rPr sz="1100">
+                          <a:latin typeface="Malgun Gothic"/>
+                        </a:rPr>
+                        <a:t>0.89</a:t>
+                      </a:r>
+                    </a:p>
+                  </a:txBody>
+                  <a:tcPr>
+                    <a:solidFill>
+                      <a:srgbClr val="FFFFFF"/>
+                    </a:solidFill>
+                  </a:tcPr>
+                </a:tc>
+              </a:tr>
+            </a:tbl>
+          </a:graphicData>
+        </a:graphic>
+      </p:graphicFrame>
+      <p:sp>
+        <p:nvSpPr>
+          <p:cNvPr id="7" name="TextBox 6"/>
+          <p:cNvSpPr txBox="1"/>
+          <p:nvPr/>
+        </p:nvSpPr>
+        <p:spPr>
+          <a:xfrm>
+            <a:off x="274320" y="5212080"/>
+            <a:ext cx="11612880" cy="1371600"/>
+          </a:xfrm>
+          <a:prstGeom prst="rect">
+            <a:avLst/>
+          </a:prstGeom>
+          <a:noFill/>
+        </p:spPr>
+        <p:txBody>
+          <a:bodyPr wrap="square">
+            <a:spAutoFit/>
+          </a:bodyPr>
+          <a:lstStyle/>
+          <a:p>
+            <a:pPr algn="l">
+              <a:lnSpc>
+                <a:spcPct val="115000"/>
+              </a:lnSpc>
+            </a:pPr>
+            <a:r>
+              <a:rPr sz="1200">
+                <a:solidFill>
+                  <a:srgbClr val="333333"/>
+                </a:solidFill>
+                <a:latin typeface="Malgun Gothic"/>
+              </a:rPr>
+              <a:t>• **LM AUC ladder = encoder AUC ladder** — H-encoder-saturation 이 downstream LM 으로 propagate (2nd downstream signature).</a:t>
+            </a:r>
+          </a:p>
+          <a:p>
+            <a:pPr algn="l">
+              <a:lnSpc>
+                <a:spcPct val="115000"/>
+              </a:lnSpc>
+            </a:pPr>
+            <a:r>
+              <a:rPr sz="1200">
+                <a:solidFill>
+                  <a:srgbClr val="333333"/>
+                </a:solidFill>
+                <a:latin typeface="Malgun Gothic"/>
+              </a:rPr>
+              <a:t>• **Idefics2 LM (0.995) &gt; vision (0.93)**: perceiver-resampler 가 정보 strip 안 함, 오히려 *physics-mode 신호 집중*. §4.6 Idefics2 0/9 픽셀-공간 0 shortcut 과의 dissociation → "정보 LM 도달 ≠ 픽셀-공간 routability".</a:t>
+            </a:r>
+          </a:p>
+          <a:p>
+            <a:pPr algn="l">
+              <a:lnSpc>
+                <a:spcPct val="115000"/>
+              </a:lnSpc>
+            </a:pPr>
+            <a:r>
+              <a:rPr sz="1200">
+                <a:solidFill>
+                  <a:srgbClr val="333333"/>
+                </a:solidFill>
+                <a:latin typeface="Malgun Gothic"/>
+              </a:rPr>
+              <a:t>• InternVL3 untestable (n_neg=1 → probe degenerate).</a:t>
+            </a:r>
+          </a:p>
+        </p:txBody>
+      </p:sp>
+      <p:sp>
+        <p:nvSpPr>
+          <p:cNvPr id="8" name="TextBox 7"/>
+          <p:cNvSpPr txBox="1"/>
+          <p:nvPr/>
+        </p:nvSpPr>
+        <p:spPr>
+          <a:xfrm>
+            <a:off x="274320" y="6492240"/>
+            <a:ext cx="7315200" cy="274320"/>
+          </a:xfrm>
+          <a:prstGeom prst="rect">
+            <a:avLst/>
+          </a:prstGeom>
+          <a:noFill/>
+        </p:spPr>
+        <p:txBody>
+          <a:bodyPr wrap="square" anchor="t">
+            <a:spAutoFit/>
+          </a:bodyPr>
+          <a:lstStyle/>
+          <a:p>
+            <a:pPr algn="l"/>
+            <a:r>
+              <a:rPr sz="900" b="0">
+                <a:solidFill>
+                  <a:srgbClr val="CCCCCC"/>
+                </a:solidFill>
+                <a:latin typeface="Malgun Gothic"/>
+              </a:rPr>
+              <a:t>VLM 의 추상-물리 shortcut — 5-model 실험과 픽셀-인코드 가능성</a:t>
+            </a:r>
+          </a:p>
+        </p:txBody>
+      </p:sp>
+      <p:sp>
+        <p:nvSpPr>
+          <p:cNvPr id="9" name="TextBox 8"/>
+          <p:cNvSpPr txBox="1"/>
+          <p:nvPr/>
+        </p:nvSpPr>
+        <p:spPr>
+          <a:xfrm>
+            <a:off x="10972800" y="6492240"/>
+            <a:ext cx="914400" cy="274320"/>
+          </a:xfrm>
+          <a:prstGeom prst="rect">
+            <a:avLst/>
+          </a:prstGeom>
+          <a:noFill/>
+        </p:spPr>
+        <p:txBody>
+          <a:bodyPr wrap="square" anchor="t">
+            <a:spAutoFit/>
+          </a:bodyPr>
+          <a:lstStyle/>
+          <a:p>
+            <a:pPr algn="r"/>
+            <a:r>
+              <a:rPr sz="900" b="0">
+                <a:solidFill>
+                  <a:srgbClr val="CCCCCC"/>
+                </a:solidFill>
+                <a:latin typeface="Malgun Gothic"/>
+              </a:rPr>
+              <a:t>18 / 30</a:t>
+            </a:r>
+          </a:p>
+        </p:txBody>
+      </p:sp>
+    </p:spTree>
+  </p:cSld>
+  <p:clrMapOvr>
+    <a:masterClrMapping/>
+  </p:clrMapOvr>
+</p:sld>
+</file>
+
+<file path=ppt/slides/slide19.xml><?xml version="1.0" encoding="utf-8"?>
+<p:sld xmlns:a="http://schemas.openxmlformats.org/drawingml/2006/main" xmlns:p="http://schemas.openxmlformats.org/presentationml/2006/main" xmlns:r="http://schemas.openxmlformats.org/officeDocument/2006/relationships">
+  <p:cSld>
+    <p:spTree>
+      <p:nvGrpSpPr>
+        <p:cNvPr id="1" name=""/>
+        <p:cNvGrpSpPr/>
+        <p:nvPr/>
+      </p:nvGrpSpPr>
+      <p:grpSpPr/>
+      <p:sp>
+        <p:nvSpPr>
+          <p:cNvPr id="2" name="Rectangle 1"/>
+          <p:cNvSpPr/>
+          <p:nvPr/>
+        </p:nvSpPr>
+        <p:spPr>
+          <a:xfrm>
+            <a:off x="0" y="0"/>
+            <a:ext cx="164592" cy="914400"/>
+          </a:xfrm>
+          <a:prstGeom prst="rect">
+            <a:avLst/>
+          </a:prstGeom>
+          <a:solidFill>
+            <a:srgbClr val="2E4A7F"/>
+          </a:solidFill>
+          <a:ln>
+            <a:noFill/>
+          </a:ln>
+        </p:spPr>
+        <p:style>
+          <a:lnRef idx="1">
+            <a:schemeClr val="accent1"/>
+          </a:lnRef>
+          <a:fillRef idx="3">
+            <a:schemeClr val="accent1"/>
+          </a:fillRef>
+          <a:effectRef idx="2">
+            <a:schemeClr val="accent1"/>
+          </a:effectRef>
+          <a:fontRef idx="minor">
+            <a:schemeClr val="lt1"/>
+          </a:fontRef>
+        </p:style>
+        <p:txBody>
+          <a:bodyPr rtlCol="0" anchor="ctr"/>
+          <a:lstStyle/>
+          <a:p>
+            <a:pPr algn="ctr"/>
+          </a:p>
+        </p:txBody>
+      </p:sp>
+      <p:sp>
+        <p:nvSpPr>
+          <p:cNvPr id="3" name="TextBox 2"/>
+          <p:cNvSpPr txBox="1"/>
+          <p:nvPr/>
+        </p:nvSpPr>
+        <p:spPr>
+          <a:xfrm>
+            <a:off x="365760" y="164592"/>
+            <a:ext cx="11430000" cy="548640"/>
+          </a:xfrm>
+          <a:prstGeom prst="rect">
+            <a:avLst/>
+          </a:prstGeom>
+          <a:noFill/>
+        </p:spPr>
+        <p:txBody>
+          <a:bodyPr wrap="square" anchor="ctr">
+            <a:spAutoFit/>
+          </a:bodyPr>
+          <a:lstStyle/>
+          <a:p>
+            <a:pPr algn="l"/>
+            <a:r>
+              <a:rPr sz="2600" b="1">
+                <a:solidFill>
+                  <a:srgbClr val="2E4A7F"/>
+                </a:solidFill>
+                <a:latin typeface="Malgun Gothic"/>
+              </a:rPr>
+              <a:t>결과 (5) — M5a VTI causal steering (Qwen): L10 only flips</a:t>
             </a:r>
           </a:p>
         </p:txBody>
@@ -7652,306 +8920,7 @@
                 </a:solidFill>
                 <a:latin typeface="Malgun Gothic"/>
               </a:rPr>
-              <a:t>18 / 26</a:t>
-            </a:r>
-          </a:p>
-        </p:txBody>
-      </p:sp>
-    </p:spTree>
-  </p:cSld>
-  <p:clrMapOvr>
-    <a:masterClrMapping/>
-  </p:clrMapOvr>
-</p:sld>
-</file>
-
-<file path=ppt/slides/slide19.xml><?xml version="1.0" encoding="utf-8"?>
-<p:sld xmlns:a="http://schemas.openxmlformats.org/drawingml/2006/main" xmlns:p="http://schemas.openxmlformats.org/presentationml/2006/main" xmlns:r="http://schemas.openxmlformats.org/officeDocument/2006/relationships">
-  <p:cSld>
-    <p:spTree>
-      <p:nvGrpSpPr>
-        <p:cNvPr id="1" name=""/>
-        <p:cNvGrpSpPr/>
-        <p:nvPr/>
-      </p:nvGrpSpPr>
-      <p:grpSpPr/>
-      <p:sp>
-        <p:nvSpPr>
-          <p:cNvPr id="2" name="Rectangle 1"/>
-          <p:cNvSpPr/>
-          <p:nvPr/>
-        </p:nvSpPr>
-        <p:spPr>
-          <a:xfrm>
-            <a:off x="0" y="0"/>
-            <a:ext cx="164592" cy="914400"/>
-          </a:xfrm>
-          <a:prstGeom prst="rect">
-            <a:avLst/>
-          </a:prstGeom>
-          <a:solidFill>
-            <a:srgbClr val="2E4A7F"/>
-          </a:solidFill>
-          <a:ln>
-            <a:noFill/>
-          </a:ln>
-        </p:spPr>
-        <p:style>
-          <a:lnRef idx="1">
-            <a:schemeClr val="accent1"/>
-          </a:lnRef>
-          <a:fillRef idx="3">
-            <a:schemeClr val="accent1"/>
-          </a:fillRef>
-          <a:effectRef idx="2">
-            <a:schemeClr val="accent1"/>
-          </a:effectRef>
-          <a:fontRef idx="minor">
-            <a:schemeClr val="lt1"/>
-          </a:fontRef>
-        </p:style>
-        <p:txBody>
-          <a:bodyPr rtlCol="0" anchor="ctr"/>
-          <a:lstStyle/>
-          <a:p>
-            <a:pPr algn="ctr"/>
-          </a:p>
-        </p:txBody>
-      </p:sp>
-      <p:sp>
-        <p:nvSpPr>
-          <p:cNvPr id="3" name="TextBox 2"/>
-          <p:cNvSpPr txBox="1"/>
-          <p:nvPr/>
-        </p:nvSpPr>
-        <p:spPr>
-          <a:xfrm>
-            <a:off x="365760" y="164592"/>
-            <a:ext cx="11430000" cy="548640"/>
-          </a:xfrm>
-          <a:prstGeom prst="rect">
-            <a:avLst/>
-          </a:prstGeom>
-          <a:noFill/>
-        </p:spPr>
-        <p:txBody>
-          <a:bodyPr wrap="square" anchor="ctr">
-            <a:spAutoFit/>
-          </a:bodyPr>
-          <a:lstStyle/>
-          <a:p>
-            <a:pPr algn="l"/>
-            <a:r>
-              <a:rPr sz="2600" b="1">
-                <a:solidFill>
-                  <a:srgbClr val="2E4A7F"/>
-                </a:solidFill>
-                <a:latin typeface="Malgun Gothic"/>
-              </a:rPr>
-              <a:t>결과 (6) — §4.6 픽셀-공간 gradient ascent (Qwen)</a:t>
-            </a:r>
-          </a:p>
-        </p:txBody>
-      </p:sp>
-      <p:sp>
-        <p:nvSpPr>
-          <p:cNvPr id="4" name="TextBox 3"/>
-          <p:cNvSpPr txBox="1"/>
-          <p:nvPr/>
-        </p:nvSpPr>
-        <p:spPr>
-          <a:xfrm>
-            <a:off x="365760" y="621792"/>
-            <a:ext cx="11430000" cy="365760"/>
-          </a:xfrm>
-          <a:prstGeom prst="rect">
-            <a:avLst/>
-          </a:prstGeom>
-          <a:noFill/>
-        </p:spPr>
-        <p:txBody>
-          <a:bodyPr wrap="square" anchor="ctr">
-            <a:spAutoFit/>
-          </a:bodyPr>
-          <a:lstStyle/>
-          <a:p>
-            <a:pPr algn="l"/>
-            <a:r>
-              <a:rPr sz="1400" b="0">
-                <a:solidFill>
-                  <a:srgbClr val="666666"/>
-                </a:solidFill>
-                <a:latin typeface="Malgun Gothic"/>
-              </a:rPr>
-              <a:t>ε=0.05 에서 5/5 v_L10 flip; 매칭 random 0/15 — 방향 특이성</a:t>
-            </a:r>
-          </a:p>
-        </p:txBody>
-      </p:sp>
-      <p:pic>
-        <p:nvPicPr>
-          <p:cNvPr id="5" name="Picture 4" descr="sec4_6_counterfactual_stim_panels.png"/>
-          <p:cNvPicPr>
-            <a:picLocks noChangeAspect="1"/>
-          </p:cNvPicPr>
-          <p:nvPr/>
-        </p:nvPicPr>
-        <p:blipFill>
-          <a:blip r:embed="rId2"/>
-          <a:stretch>
-            <a:fillRect/>
-          </a:stretch>
-        </p:blipFill>
-        <p:spPr>
-          <a:xfrm>
-            <a:off x="457200" y="1188720"/>
-            <a:ext cx="10972800" cy="4306355"/>
-          </a:xfrm>
-          <a:prstGeom prst="rect">
-            <a:avLst/>
-          </a:prstGeom>
-        </p:spPr>
-      </p:pic>
-      <p:sp>
-        <p:nvSpPr>
-          <p:cNvPr id="6" name="TextBox 5"/>
-          <p:cNvSpPr txBox="1"/>
-          <p:nvPr/>
-        </p:nvSpPr>
-        <p:spPr>
-          <a:xfrm>
-            <a:off x="457200" y="5029200"/>
-            <a:ext cx="10972800" cy="365760"/>
-          </a:xfrm>
-          <a:prstGeom prst="rect">
-            <a:avLst/>
-          </a:prstGeom>
-          <a:noFill/>
-        </p:spPr>
-        <p:txBody>
-          <a:bodyPr wrap="none">
-            <a:spAutoFit/>
-          </a:bodyPr>
-          <a:lstStyle/>
-          <a:p>
-            <a:pPr algn="ctr"/>
-            <a:r>
-              <a:rPr sz="1100" i="1">
-                <a:solidFill>
-                  <a:srgbClr val="666666"/>
-                </a:solidFill>
-                <a:latin typeface="Malgun Gothic"/>
-              </a:rPr>
-              <a:t>baseline → ε=0.05 → ε=0.1 → unconstrained. 작은 ε 에서 abstract 원의 형태는 보존; 픽셀 노이즈만 추가됨에도 모델은 "공이 떨어진다" 라고 응답함.</a:t>
-            </a:r>
-          </a:p>
-        </p:txBody>
-      </p:sp>
-      <p:sp>
-        <p:nvSpPr>
-          <p:cNvPr id="7" name="TextBox 6"/>
-          <p:cNvSpPr txBox="1"/>
-          <p:nvPr/>
-        </p:nvSpPr>
-        <p:spPr>
-          <a:xfrm>
-            <a:off x="457200" y="5486400"/>
-            <a:ext cx="11247120" cy="914400"/>
-          </a:xfrm>
-          <a:prstGeom prst="rect">
-            <a:avLst/>
-          </a:prstGeom>
-          <a:noFill/>
-        </p:spPr>
-        <p:txBody>
-          <a:bodyPr wrap="square">
-            <a:spAutoFit/>
-          </a:bodyPr>
-          <a:lstStyle/>
-          <a:p>
-            <a:pPr algn="l">
-              <a:lnSpc>
-                <a:spcPct val="115000"/>
-              </a:lnSpc>
-            </a:pPr>
-            <a:r>
-              <a:rPr sz="1300">
-                <a:solidFill>
-                  <a:srgbClr val="333333"/>
-                </a:solidFill>
-                <a:latin typeface="Malgun Gothic"/>
-              </a:rPr>
-              <a:t>• 응답: "The circle will continue to fall downward due to gravity." vs random control: "The circle will remain stationary as there is no indication of movement." → 방향 특이성, magnitude 가 아님.</a:t>
-            </a:r>
-          </a:p>
-        </p:txBody>
-      </p:sp>
-      <p:sp>
-        <p:nvSpPr>
-          <p:cNvPr id="8" name="TextBox 7"/>
-          <p:cNvSpPr txBox="1"/>
-          <p:nvPr/>
-        </p:nvSpPr>
-        <p:spPr>
-          <a:xfrm>
-            <a:off x="274320" y="6492240"/>
-            <a:ext cx="7315200" cy="274320"/>
-          </a:xfrm>
-          <a:prstGeom prst="rect">
-            <a:avLst/>
-          </a:prstGeom>
-          <a:noFill/>
-        </p:spPr>
-        <p:txBody>
-          <a:bodyPr wrap="square" anchor="t">
-            <a:spAutoFit/>
-          </a:bodyPr>
-          <a:lstStyle/>
-          <a:p>
-            <a:pPr algn="l"/>
-            <a:r>
-              <a:rPr sz="900" b="0">
-                <a:solidFill>
-                  <a:srgbClr val="CCCCCC"/>
-                </a:solidFill>
-                <a:latin typeface="Malgun Gothic"/>
-              </a:rPr>
-              <a:t>VLM 의 추상-물리 shortcut — 5-model 실험과 픽셀-인코드 가능성</a:t>
-            </a:r>
-          </a:p>
-        </p:txBody>
-      </p:sp>
-      <p:sp>
-        <p:nvSpPr>
-          <p:cNvPr id="9" name="TextBox 8"/>
-          <p:cNvSpPr txBox="1"/>
-          <p:nvPr/>
-        </p:nvSpPr>
-        <p:spPr>
-          <a:xfrm>
-            <a:off x="10972800" y="6492240"/>
-            <a:ext cx="914400" cy="274320"/>
-          </a:xfrm>
-          <a:prstGeom prst="rect">
-            <a:avLst/>
-          </a:prstGeom>
-          <a:noFill/>
-        </p:spPr>
-        <p:txBody>
-          <a:bodyPr wrap="square" anchor="t">
-            <a:spAutoFit/>
-          </a:bodyPr>
-          <a:lstStyle/>
-          <a:p>
-            <a:pPr algn="r"/>
-            <a:r>
-              <a:rPr sz="900" b="0">
-                <a:solidFill>
-                  <a:srgbClr val="CCCCCC"/>
-                </a:solidFill>
-                <a:latin typeface="Malgun Gothic"/>
-              </a:rPr>
-              <a:t>19 / 26</a:t>
+              <a:t>19 / 30</a:t>
             </a:r>
           </a:p>
         </p:txBody>
@@ -8314,7 +9283,7 @@
                 </a:solidFill>
                 <a:latin typeface="Malgun Gothic"/>
               </a:rPr>
-              <a:t>2 / 26</a:t>
+              <a:t>2 / 30</a:t>
             </a:r>
           </a:p>
         </p:txBody>
@@ -8410,7 +9379,7 @@
                 </a:solidFill>
                 <a:latin typeface="Malgun Gothic"/>
               </a:rPr>
-              <a:t>결과 (7) — §4.6 cross-model layer sweep (n=10) + Idefics2 9-layer disambiguation</a:t>
+              <a:t>결과 (5b) — M5a runtime steering cross-model: 3 of 4 flip</a:t>
             </a:r>
           </a:p>
         </p:txBody>
@@ -8445,35 +9414,734 @@
                 </a:solidFill>
                 <a:latin typeface="Malgun Gothic"/>
               </a:rPr>
-              <a:t>3 of 5 testable architectures supports pixel-encodability; Idefics2 falsifies (L5-L31), perceiver-resampler 후보</a:t>
-            </a:r>
-          </a:p>
-        </p:txBody>
-      </p:sp>
-      <p:pic>
-        <p:nvPicPr>
-          <p:cNvPr id="5" name="Picture 4" descr="sec4_6_cross_model_layer_sweep.png"/>
-          <p:cNvPicPr>
-            <a:picLocks noChangeAspect="1"/>
-          </p:cNvPicPr>
-          <p:nvPr/>
-        </p:nvPicPr>
-        <p:blipFill>
-          <a:blip r:embed="rId2"/>
-          <a:stretch>
-            <a:fillRect/>
-          </a:stretch>
-        </p:blipFill>
-        <p:spPr>
-          <a:xfrm>
-            <a:off x="274320" y="1143000"/>
-            <a:ext cx="7772400" cy="5238474"/>
-          </a:xfrm>
-          <a:prstGeom prst="rect">
-            <a:avLst/>
-          </a:prstGeom>
-        </p:spPr>
-      </p:pic>
+              <a:t>모델별 v_L injection 으로 line × circle baseline=0 → 10/10 PMR flip; LLaVA-1.5 NULL</a:t>
+            </a:r>
+          </a:p>
+        </p:txBody>
+      </p:sp>
+      <p:graphicFrame>
+        <p:nvGraphicFramePr>
+          <p:cNvPr id="5" name="Table 4"/>
+          <p:cNvGraphicFramePr>
+            <a:graphicFrameLocks noGrp="1"/>
+          </p:cNvGraphicFramePr>
+          <p:nvPr/>
+        </p:nvGraphicFramePr>
+        <p:xfrm>
+          <a:off x="274320" y="1188720"/>
+          <a:ext cx="11612880" cy="2560320"/>
+        </p:xfrm>
+        <a:graphic>
+          <a:graphicData uri="http://schemas.openxmlformats.org/drawingml/2006/table">
+            <a:tbl>
+              <a:tblPr firstRow="1" bandRow="1">
+                <a:tableStyleId>{5C22544A-7EE6-4342-B048-85BDC9FD1C3A}</a:tableStyleId>
+              </a:tblPr>
+              <a:tblGrid>
+                <a:gridCol w="2322576"/>
+                <a:gridCol w="2322576"/>
+                <a:gridCol w="2322576"/>
+                <a:gridCol w="2322576"/>
+                <a:gridCol w="2322576"/>
+              </a:tblGrid>
+              <a:tr h="365760">
+                <a:tc>
+                  <a:txBody>
+                    <a:bodyPr/>
+                    <a:lstStyle/>
+                    <a:p>
+                      <a:r>
+                        <a:rPr sz="1100" b="1">
+                          <a:solidFill>
+                            <a:srgbClr val="FFFFFF"/>
+                          </a:solidFill>
+                          <a:latin typeface="Malgun Gothic"/>
+                        </a:rPr>
+                        <a:t>Model</a:t>
+                      </a:r>
+                    </a:p>
+                  </a:txBody>
+                  <a:tcPr>
+                    <a:solidFill>
+                      <a:srgbClr val="2E4A7F"/>
+                    </a:solidFill>
+                  </a:tcPr>
+                </a:tc>
+                <a:tc>
+                  <a:txBody>
+                    <a:bodyPr/>
+                    <a:lstStyle/>
+                    <a:p>
+                      <a:r>
+                        <a:rPr sz="1100" b="1">
+                          <a:solidFill>
+                            <a:srgbClr val="FFFFFF"/>
+                          </a:solidFill>
+                          <a:latin typeface="Malgun Gothic"/>
+                        </a:rPr>
+                        <a:t>Layer</a:t>
+                      </a:r>
+                    </a:p>
+                  </a:txBody>
+                  <a:tcPr>
+                    <a:solidFill>
+                      <a:srgbClr val="2E4A7F"/>
+                    </a:solidFill>
+                  </a:tcPr>
+                </a:tc>
+                <a:tc>
+                  <a:txBody>
+                    <a:bodyPr/>
+                    <a:lstStyle/>
+                    <a:p>
+                      <a:r>
+                        <a:rPr sz="1100" b="1">
+                          <a:solidFill>
+                            <a:srgbClr val="FFFFFF"/>
+                          </a:solidFill>
+                          <a:latin typeface="Malgun Gothic"/>
+                        </a:rPr>
+                        <a:t>α sweet</a:t>
+                      </a:r>
+                    </a:p>
+                  </a:txBody>
+                  <a:tcPr>
+                    <a:solidFill>
+                      <a:srgbClr val="2E4A7F"/>
+                    </a:solidFill>
+                  </a:tcPr>
+                </a:tc>
+                <a:tc>
+                  <a:txBody>
+                    <a:bodyPr/>
+                    <a:lstStyle/>
+                    <a:p>
+                      <a:r>
+                        <a:rPr sz="1100" b="1">
+                          <a:solidFill>
+                            <a:srgbClr val="FFFFFF"/>
+                          </a:solidFill>
+                          <a:latin typeface="Malgun Gothic"/>
+                        </a:rPr>
+                        <a:t>PMR flip</a:t>
+                      </a:r>
+                    </a:p>
+                  </a:txBody>
+                  <a:tcPr>
+                    <a:solidFill>
+                      <a:srgbClr val="2E4A7F"/>
+                    </a:solidFill>
+                  </a:tcPr>
+                </a:tc>
+                <a:tc>
+                  <a:txBody>
+                    <a:bodyPr/>
+                    <a:lstStyle/>
+                    <a:p>
+                      <a:r>
+                        <a:rPr sz="1100" b="1">
+                          <a:solidFill>
+                            <a:srgbClr val="FFFFFF"/>
+                          </a:solidFill>
+                          <a:latin typeface="Malgun Gothic"/>
+                        </a:rPr>
+                        <a:t>응답</a:t>
+                      </a:r>
+                    </a:p>
+                  </a:txBody>
+                  <a:tcPr>
+                    <a:solidFill>
+                      <a:srgbClr val="2E4A7F"/>
+                    </a:solidFill>
+                  </a:tcPr>
+                </a:tc>
+              </a:tr>
+              <a:tr h="365760">
+                <a:tc>
+                  <a:txBody>
+                    <a:bodyPr/>
+                    <a:lstStyle/>
+                    <a:p>
+                      <a:r>
+                        <a:rPr sz="1100">
+                          <a:latin typeface="Malgun Gothic"/>
+                        </a:rPr>
+                        <a:t>Qwen2.5-VL</a:t>
+                      </a:r>
+                    </a:p>
+                  </a:txBody>
+                  <a:tcPr>
+                    <a:solidFill>
+                      <a:srgbClr val="FFFFFF"/>
+                    </a:solidFill>
+                  </a:tcPr>
+                </a:tc>
+                <a:tc>
+                  <a:txBody>
+                    <a:bodyPr/>
+                    <a:lstStyle/>
+                    <a:p>
+                      <a:r>
+                        <a:rPr sz="1100">
+                          <a:latin typeface="Malgun Gothic"/>
+                        </a:rPr>
+                        <a:t>L10</a:t>
+                      </a:r>
+                    </a:p>
+                  </a:txBody>
+                  <a:tcPr>
+                    <a:solidFill>
+                      <a:srgbClr val="FFFFFF"/>
+                    </a:solidFill>
+                  </a:tcPr>
+                </a:tc>
+                <a:tc>
+                  <a:txBody>
+                    <a:bodyPr/>
+                    <a:lstStyle/>
+                    <a:p>
+                      <a:r>
+                        <a:rPr sz="1100">
+                          <a:latin typeface="Malgun Gothic"/>
+                        </a:rPr>
+                        <a:t>40</a:t>
+                      </a:r>
+                    </a:p>
+                  </a:txBody>
+                  <a:tcPr>
+                    <a:solidFill>
+                      <a:srgbClr val="FFFFFF"/>
+                    </a:solidFill>
+                  </a:tcPr>
+                </a:tc>
+                <a:tc>
+                  <a:txBody>
+                    <a:bodyPr/>
+                    <a:lstStyle/>
+                    <a:p>
+                      <a:r>
+                        <a:rPr sz="1100">
+                          <a:latin typeface="Malgun Gothic"/>
+                        </a:rPr>
+                        <a:t>10/10</a:t>
+                      </a:r>
+                    </a:p>
+                  </a:txBody>
+                  <a:tcPr>
+                    <a:solidFill>
+                      <a:srgbClr val="FFFFFF"/>
+                    </a:solidFill>
+                  </a:tcPr>
+                </a:tc>
+                <a:tc>
+                  <a:txBody>
+                    <a:bodyPr/>
+                    <a:lstStyle/>
+                    <a:p>
+                      <a:r>
+                        <a:rPr sz="1100">
+                          <a:latin typeface="Malgun Gothic"/>
+                        </a:rPr>
+                        <a:t>"ball is falling down due to gravity"</a:t>
+                      </a:r>
+                    </a:p>
+                  </a:txBody>
+                  <a:tcPr>
+                    <a:solidFill>
+                      <a:srgbClr val="FFFFFF"/>
+                    </a:solidFill>
+                  </a:tcPr>
+                </a:tc>
+              </a:tr>
+              <a:tr h="365760">
+                <a:tc>
+                  <a:txBody>
+                    <a:bodyPr/>
+                    <a:lstStyle/>
+                    <a:p>
+                      <a:r>
+                        <a:rPr sz="1100">
+                          <a:latin typeface="Malgun Gothic"/>
+                        </a:rPr>
+                        <a:t>LLaVA-Next-Mistral</a:t>
+                      </a:r>
+                    </a:p>
+                  </a:txBody>
+                  <a:tcPr>
+                    <a:solidFill>
+                      <a:srgbClr val="F6F8FC"/>
+                    </a:solidFill>
+                  </a:tcPr>
+                </a:tc>
+                <a:tc>
+                  <a:txBody>
+                    <a:bodyPr/>
+                    <a:lstStyle/>
+                    <a:p>
+                      <a:r>
+                        <a:rPr sz="1100">
+                          <a:latin typeface="Malgun Gothic"/>
+                        </a:rPr>
+                        <a:t>L20</a:t>
+                      </a:r>
+                    </a:p>
+                  </a:txBody>
+                  <a:tcPr>
+                    <a:solidFill>
+                      <a:srgbClr val="F6F8FC"/>
+                    </a:solidFill>
+                  </a:tcPr>
+                </a:tc>
+                <a:tc>
+                  <a:txBody>
+                    <a:bodyPr/>
+                    <a:lstStyle/>
+                    <a:p>
+                      <a:r>
+                        <a:rPr sz="1100">
+                          <a:latin typeface="Malgun Gothic"/>
+                        </a:rPr>
+                        <a:t>10</a:t>
+                      </a:r>
+                    </a:p>
+                  </a:txBody>
+                  <a:tcPr>
+                    <a:solidFill>
+                      <a:srgbClr val="F6F8FC"/>
+                    </a:solidFill>
+                  </a:tcPr>
+                </a:tc>
+                <a:tc>
+                  <a:txBody>
+                    <a:bodyPr/>
+                    <a:lstStyle/>
+                    <a:p>
+                      <a:r>
+                        <a:rPr sz="1100">
+                          <a:latin typeface="Malgun Gothic"/>
+                        </a:rPr>
+                        <a:t>10/10</a:t>
+                      </a:r>
+                    </a:p>
+                  </a:txBody>
+                  <a:tcPr>
+                    <a:solidFill>
+                      <a:srgbClr val="F6F8FC"/>
+                    </a:solidFill>
+                  </a:tcPr>
+                </a:tc>
+                <a:tc>
+                  <a:txBody>
+                    <a:bodyPr/>
+                    <a:lstStyle/>
+                    <a:p>
+                      <a:r>
+                        <a:rPr sz="1100">
+                          <a:latin typeface="Malgun Gothic"/>
+                        </a:rPr>
+                        <a:t>"ball will roll down the ramp"</a:t>
+                      </a:r>
+                    </a:p>
+                  </a:txBody>
+                  <a:tcPr>
+                    <a:solidFill>
+                      <a:srgbClr val="F6F8FC"/>
+                    </a:solidFill>
+                  </a:tcPr>
+                </a:tc>
+              </a:tr>
+              <a:tr h="365760">
+                <a:tc>
+                  <a:txBody>
+                    <a:bodyPr/>
+                    <a:lstStyle/>
+                    <a:p>
+                      <a:r>
+                        <a:rPr sz="1100">
+                          <a:latin typeface="Malgun Gothic"/>
+                        </a:rPr>
+                        <a:t>LLaVA-Next-Mistral</a:t>
+                      </a:r>
+                    </a:p>
+                  </a:txBody>
+                  <a:tcPr>
+                    <a:solidFill>
+                      <a:srgbClr val="FFFFFF"/>
+                    </a:solidFill>
+                  </a:tcPr>
+                </a:tc>
+                <a:tc>
+                  <a:txBody>
+                    <a:bodyPr/>
+                    <a:lstStyle/>
+                    <a:p>
+                      <a:r>
+                        <a:rPr sz="1100">
+                          <a:latin typeface="Malgun Gothic"/>
+                        </a:rPr>
+                        <a:t>L25</a:t>
+                      </a:r>
+                    </a:p>
+                  </a:txBody>
+                  <a:tcPr>
+                    <a:solidFill>
+                      <a:srgbClr val="FFFFFF"/>
+                    </a:solidFill>
+                  </a:tcPr>
+                </a:tc>
+                <a:tc>
+                  <a:txBody>
+                    <a:bodyPr/>
+                    <a:lstStyle/>
+                    <a:p>
+                      <a:r>
+                        <a:rPr sz="1100">
+                          <a:latin typeface="Malgun Gothic"/>
+                        </a:rPr>
+                        <a:t>15-20</a:t>
+                      </a:r>
+                    </a:p>
+                  </a:txBody>
+                  <a:tcPr>
+                    <a:solidFill>
+                      <a:srgbClr val="FFFFFF"/>
+                    </a:solidFill>
+                  </a:tcPr>
+                </a:tc>
+                <a:tc>
+                  <a:txBody>
+                    <a:bodyPr/>
+                    <a:lstStyle/>
+                    <a:p>
+                      <a:r>
+                        <a:rPr sz="1100">
+                          <a:latin typeface="Malgun Gothic"/>
+                        </a:rPr>
+                        <a:t>10/10</a:t>
+                      </a:r>
+                    </a:p>
+                  </a:txBody>
+                  <a:tcPr>
+                    <a:solidFill>
+                      <a:srgbClr val="FFFFFF"/>
+                    </a:solidFill>
+                  </a:tcPr>
+                </a:tc>
+                <a:tc>
+                  <a:txBody>
+                    <a:bodyPr/>
+                    <a:lstStyle/>
+                    <a:p>
+                      <a:r>
+                        <a:rPr sz="1100">
+                          <a:latin typeface="Malgun Gothic"/>
+                        </a:rPr>
+                        <a:t>"ball will bounce up"</a:t>
+                      </a:r>
+                    </a:p>
+                  </a:txBody>
+                  <a:tcPr>
+                    <a:solidFill>
+                      <a:srgbClr val="FFFFFF"/>
+                    </a:solidFill>
+                  </a:tcPr>
+                </a:tc>
+              </a:tr>
+              <a:tr h="365760">
+                <a:tc>
+                  <a:txBody>
+                    <a:bodyPr/>
+                    <a:lstStyle/>
+                    <a:p>
+                      <a:r>
+                        <a:rPr sz="1100">
+                          <a:latin typeface="Malgun Gothic"/>
+                        </a:rPr>
+                        <a:t>**Idefics2-8B**</a:t>
+                      </a:r>
+                    </a:p>
+                  </a:txBody>
+                  <a:tcPr>
+                    <a:solidFill>
+                      <a:srgbClr val="F6F8FC"/>
+                    </a:solidFill>
+                  </a:tcPr>
+                </a:tc>
+                <a:tc>
+                  <a:txBody>
+                    <a:bodyPr/>
+                    <a:lstStyle/>
+                    <a:p>
+                      <a:r>
+                        <a:rPr sz="1100">
+                          <a:latin typeface="Malgun Gothic"/>
+                        </a:rPr>
+                        <a:t>**L25**</a:t>
+                      </a:r>
+                    </a:p>
+                  </a:txBody>
+                  <a:tcPr>
+                    <a:solidFill>
+                      <a:srgbClr val="F6F8FC"/>
+                    </a:solidFill>
+                  </a:tcPr>
+                </a:tc>
+                <a:tc>
+                  <a:txBody>
+                    <a:bodyPr/>
+                    <a:lstStyle/>
+                    <a:p>
+                      <a:r>
+                        <a:rPr sz="1100">
+                          <a:latin typeface="Malgun Gothic"/>
+                        </a:rPr>
+                        <a:t>**20**</a:t>
+                      </a:r>
+                    </a:p>
+                  </a:txBody>
+                  <a:tcPr>
+                    <a:solidFill>
+                      <a:srgbClr val="F6F8FC"/>
+                    </a:solidFill>
+                  </a:tcPr>
+                </a:tc>
+                <a:tc>
+                  <a:txBody>
+                    <a:bodyPr/>
+                    <a:lstStyle/>
+                    <a:p>
+                      <a:r>
+                        <a:rPr sz="1100">
+                          <a:latin typeface="Malgun Gothic"/>
+                        </a:rPr>
+                        <a:t>**10/10**</a:t>
+                      </a:r>
+                    </a:p>
+                  </a:txBody>
+                  <a:tcPr>
+                    <a:solidFill>
+                      <a:srgbClr val="F6F8FC"/>
+                    </a:solidFill>
+                  </a:tcPr>
+                </a:tc>
+                <a:tc>
+                  <a:txBody>
+                    <a:bodyPr/>
+                    <a:lstStyle/>
+                    <a:p>
+                      <a:r>
+                        <a:rPr sz="1100">
+                          <a:latin typeface="Malgun Gothic"/>
+                        </a:rPr>
+                        <a:t>"tip of arrow will hit center of circle"</a:t>
+                      </a:r>
+                    </a:p>
+                  </a:txBody>
+                  <a:tcPr>
+                    <a:solidFill>
+                      <a:srgbClr val="F6F8FC"/>
+                    </a:solidFill>
+                  </a:tcPr>
+                </a:tc>
+              </a:tr>
+              <a:tr h="365760">
+                <a:tc>
+                  <a:txBody>
+                    <a:bodyPr/>
+                    <a:lstStyle/>
+                    <a:p>
+                      <a:r>
+                        <a:rPr sz="1100">
+                          <a:latin typeface="Malgun Gothic"/>
+                        </a:rPr>
+                        <a:t>LLaVA-1.5-7B</a:t>
+                      </a:r>
+                    </a:p>
+                  </a:txBody>
+                  <a:tcPr>
+                    <a:solidFill>
+                      <a:srgbClr val="FFFFFF"/>
+                    </a:solidFill>
+                  </a:tcPr>
+                </a:tc>
+                <a:tc>
+                  <a:txBody>
+                    <a:bodyPr/>
+                    <a:lstStyle/>
+                    <a:p>
+                      <a:r>
+                        <a:rPr sz="1100">
+                          <a:latin typeface="Malgun Gothic"/>
+                        </a:rPr>
+                        <a:t>L25</a:t>
+                      </a:r>
+                    </a:p>
+                  </a:txBody>
+                  <a:tcPr>
+                    <a:solidFill>
+                      <a:srgbClr val="FFFFFF"/>
+                    </a:solidFill>
+                  </a:tcPr>
+                </a:tc>
+                <a:tc>
+                  <a:txBody>
+                    <a:bodyPr/>
+                    <a:lstStyle/>
+                    <a:p>
+                      <a:r>
+                        <a:rPr sz="1100">
+                          <a:latin typeface="Malgun Gothic"/>
+                        </a:rPr>
+                        <a:t>0-60</a:t>
+                      </a:r>
+                    </a:p>
+                  </a:txBody>
+                  <a:tcPr>
+                    <a:solidFill>
+                      <a:srgbClr val="FFFFFF"/>
+                    </a:solidFill>
+                  </a:tcPr>
+                </a:tc>
+                <a:tc>
+                  <a:txBody>
+                    <a:bodyPr/>
+                    <a:lstStyle/>
+                    <a:p>
+                      <a:r>
+                        <a:rPr sz="1100">
+                          <a:latin typeface="Malgun Gothic"/>
+                        </a:rPr>
+                        <a:t>**0/10**</a:t>
+                      </a:r>
+                    </a:p>
+                  </a:txBody>
+                  <a:tcPr>
+                    <a:solidFill>
+                      <a:srgbClr val="FFFFFF"/>
+                    </a:solidFill>
+                  </a:tcPr>
+                </a:tc>
+                <a:tc>
+                  <a:txBody>
+                    <a:bodyPr/>
+                    <a:lstStyle/>
+                    <a:p>
+                      <a:r>
+                        <a:rPr sz="1100">
+                          <a:latin typeface="Malgun Gothic"/>
+                        </a:rPr>
+                        <a:t>(NULL — motion stem 안 잡힘)</a:t>
+                      </a:r>
+                    </a:p>
+                  </a:txBody>
+                  <a:tcPr>
+                    <a:solidFill>
+                      <a:srgbClr val="FFFFFF"/>
+                    </a:solidFill>
+                  </a:tcPr>
+                </a:tc>
+              </a:tr>
+              <a:tr h="365760">
+                <a:tc>
+                  <a:txBody>
+                    <a:bodyPr/>
+                    <a:lstStyle/>
+                    <a:p>
+                      <a:r>
+                        <a:rPr sz="1100">
+                          <a:latin typeface="Malgun Gothic"/>
+                        </a:rPr>
+                        <a:t>InternVL3-8B</a:t>
+                      </a:r>
+                    </a:p>
+                  </a:txBody>
+                  <a:tcPr>
+                    <a:solidFill>
+                      <a:srgbClr val="F6F8FC"/>
+                    </a:solidFill>
+                  </a:tcPr>
+                </a:tc>
+                <a:tc>
+                  <a:txBody>
+                    <a:bodyPr/>
+                    <a:lstStyle/>
+                    <a:p>
+                      <a:r>
+                        <a:rPr sz="1100">
+                          <a:latin typeface="Malgun Gothic"/>
+                        </a:rPr>
+                        <a:t>—</a:t>
+                      </a:r>
+                    </a:p>
+                  </a:txBody>
+                  <a:tcPr>
+                    <a:solidFill>
+                      <a:srgbClr val="F6F8FC"/>
+                    </a:solidFill>
+                  </a:tcPr>
+                </a:tc>
+                <a:tc>
+                  <a:txBody>
+                    <a:bodyPr/>
+                    <a:lstStyle/>
+                    <a:p>
+                      <a:r>
+                        <a:rPr sz="1100">
+                          <a:latin typeface="Malgun Gothic"/>
+                        </a:rPr>
+                        <a:t>—</a:t>
+                      </a:r>
+                    </a:p>
+                  </a:txBody>
+                  <a:tcPr>
+                    <a:solidFill>
+                      <a:srgbClr val="F6F8FC"/>
+                    </a:solidFill>
+                  </a:tcPr>
+                </a:tc>
+                <a:tc>
+                  <a:txBody>
+                    <a:bodyPr/>
+                    <a:lstStyle/>
+                    <a:p>
+                      <a:r>
+                        <a:rPr sz="1100">
+                          <a:latin typeface="Malgun Gothic"/>
+                        </a:rPr>
+                        <a:t>untestable</a:t>
+                      </a:r>
+                    </a:p>
+                  </a:txBody>
+                  <a:tcPr>
+                    <a:solidFill>
+                      <a:srgbClr val="F6F8FC"/>
+                    </a:solidFill>
+                  </a:tcPr>
+                </a:tc>
+                <a:tc>
+                  <a:txBody>
+                    <a:bodyPr/>
+                    <a:lstStyle/>
+                    <a:p>
+                      <a:r>
+                        <a:rPr sz="1100">
+                          <a:latin typeface="Malgun Gothic"/>
+                        </a:rPr>
+                        <a:t>baseline=1 (saturated)</a:t>
+                      </a:r>
+                    </a:p>
+                  </a:txBody>
+                  <a:tcPr>
+                    <a:solidFill>
+                      <a:srgbClr val="F6F8FC"/>
+                    </a:solidFill>
+                  </a:tcPr>
+                </a:tc>
+              </a:tr>
+            </a:tbl>
+          </a:graphicData>
+        </a:graphic>
+      </p:graphicFrame>
       <p:sp>
         <p:nvSpPr>
           <p:cNvPr id="6" name="TextBox 5"/>
@@ -8482,43 +10150,8 @@
         </p:nvSpPr>
         <p:spPr>
           <a:xfrm>
-            <a:off x="274320" y="5120640"/>
-            <a:ext cx="7772400" cy="365760"/>
-          </a:xfrm>
-          <a:prstGeom prst="rect">
-            <a:avLst/>
-          </a:prstGeom>
-          <a:noFill/>
-        </p:spPr>
-        <p:txBody>
-          <a:bodyPr wrap="none">
-            <a:spAutoFit/>
-          </a:bodyPr>
-          <a:lstStyle/>
-          <a:p>
-            <a:pPr algn="ctr"/>
-            <a:r>
-              <a:rPr sz="1100" i="1">
-                <a:solidFill>
-                  <a:srgbClr val="666666"/>
-                </a:solidFill>
-                <a:latin typeface="Malgun Gothic"/>
-              </a:rPr>
-              <a:t>5 모델 × LM 레이어 별 PMR flip rate (n=10, ε=0.1, Wilson 95% CI). Idefics2 panel 은 9 레이어 (L5-L31, 16-97% relative depth) 표시.</a:t>
-            </a:r>
-          </a:p>
-        </p:txBody>
-      </p:sp>
-      <p:sp>
-        <p:nvSpPr>
-          <p:cNvPr id="7" name="TextBox 6"/>
-          <p:cNvSpPr txBox="1"/>
-          <p:nvPr/>
-        </p:nvSpPr>
-        <p:spPr>
-          <a:xfrm>
-            <a:off x="8229600" y="1188720"/>
-            <a:ext cx="3657600" cy="5029200"/>
+            <a:off x="274320" y="4206240"/>
+            <a:ext cx="11612880" cy="2286000"/>
           </a:xfrm>
           <a:prstGeom prst="rect">
             <a:avLst/>
@@ -8537,13 +10170,13 @@
               </a:lnSpc>
             </a:pPr>
             <a:r>
-              <a:rPr sz="1100">
+              <a:rPr sz="1200">
                 <a:solidFill>
                   <a:srgbClr val="333333"/>
                 </a:solidFill>
                 <a:latin typeface="Malgun Gothic"/>
               </a:rPr>
-              <a:t>• **Qwen** (SigLIP+Qwen2): broad shortcuts at L5/10/15/20/25 (Wilson 하한 0.49–0.72).</a:t>
+              <a:t>• **Idefics2 의 paper-changing 결과**: M4 LM AUC 0.995 (정보 LM 도달) + M5a 10/10 (forward 작동) + §4.6 0/9 (inverse 픽셀-공간 차단) 의 triangulation → **perceiver-resampler 는 inverse pathway 만 차단**.</a:t>
             </a:r>
           </a:p>
           <a:p>
@@ -8553,13 +10186,13 @@
               </a:lnSpc>
             </a:pPr>
             <a:r>
-              <a:rPr sz="1100">
+              <a:rPr sz="1200">
                 <a:solidFill>
                   <a:srgbClr val="333333"/>
                 </a:solidFill>
                 <a:latin typeface="Malgun Gothic"/>
               </a:rPr>
-              <a:t>• **LLaVA-Next** (CLIP+AnyRes+Mistral): L20+L25 모두 10/10.</a:t>
+              <a:t>• LLaVA-1.5 NULL: 응답 의미 변화 ("filled with color" → "on the floor") 하지만 motion stem (falls/rolls/bounces) 안 잡힘 → encoder bottleneck 시그니처. §4.6 LLaVA-1.5 weak shortcut (4/10) 와 일관.</a:t>
             </a:r>
           </a:p>
           <a:p>
@@ -8569,13 +10202,13 @@
               </a:lnSpc>
             </a:pPr>
             <a:r>
-              <a:rPr sz="1100">
+              <a:rPr sz="1200">
                 <a:solidFill>
                   <a:srgbClr val="333333"/>
                 </a:solidFill>
                 <a:latin typeface="Malgun Gothic"/>
               </a:rPr>
-              <a:t>• **LLaVA-1.5** (CLIP+Vicuna): L25 only, 4/10 (n=10 에서 약화).</a:t>
+              <a:t>• Sweet-spot α 의 *regime-attractor*: Idefics2 L25 α=20 의 10 stim 모두 동일 응답 → physics-mode 의 *deterministic attractor* (M5a-ext regime-axis finding 과 일관).</a:t>
             </a:r>
           </a:p>
           <a:p>
@@ -8585,107 +10218,20 @@
               </a:lnSpc>
             </a:pPr>
             <a:r>
-              <a:rPr sz="1100">
+              <a:rPr sz="1200">
                 <a:solidFill>
                   <a:srgbClr val="333333"/>
                 </a:solidFill>
                 <a:latin typeface="Malgun Gothic"/>
               </a:rPr>
-              <a:t>• **Idefics2** (SigLIP-SO400M + perceiver-resampler + Mistral): **9 레이어 모두 0/10** (1 isolated noise hit at L28 on different stim than L25). v_L projection 은 정상 ascending (-11→+28 at L26-30, -72→+163 at L31). **Wrong-relative-depth falsified**.</a:t>
-            </a:r>
-          </a:p>
-          <a:p>
-            <a:pPr algn="l">
-              <a:lnSpc>
-                <a:spcPct val="115000"/>
-              </a:lnSpc>
-            </a:pPr>
-            <a:r>
-              <a:rPr sz="1100">
-                <a:solidFill>
-                  <a:srgbClr val="333333"/>
-                </a:solidFill>
-                <a:latin typeface="Malgun Gothic"/>
-              </a:rPr>
-              <a:t>• **InternVL3**: protocol-saturated (baseline_pmr=1.0).</a:t>
-            </a:r>
-          </a:p>
-          <a:p>
-            <a:pPr algn="l">
-              <a:lnSpc>
-                <a:spcPct val="115000"/>
-              </a:lnSpc>
-            </a:pPr>
-            <a:r>
-              <a:rPr sz="1100">
-                <a:solidFill>
-                  <a:srgbClr val="333333"/>
-                </a:solidFill>
-                <a:latin typeface="Malgun Gothic"/>
-              </a:rPr>
-              <a:t>• **Random controls**: 1/250 trials in aggregate.</a:t>
-            </a:r>
-          </a:p>
-        </p:txBody>
-      </p:sp>
-      <p:sp>
-        <p:nvSpPr>
-          <p:cNvPr id="8" name="TextBox 7"/>
-          <p:cNvSpPr txBox="1"/>
-          <p:nvPr/>
-        </p:nvSpPr>
-        <p:spPr>
-          <a:xfrm>
-            <a:off x="274320" y="5669280"/>
-            <a:ext cx="11612880" cy="1371600"/>
-          </a:xfrm>
-          <a:prstGeom prst="rect">
-            <a:avLst/>
-          </a:prstGeom>
-          <a:noFill/>
-        </p:spPr>
-        <p:txBody>
-          <a:bodyPr wrap="square">
-            <a:spAutoFit/>
-          </a:bodyPr>
-          <a:lstStyle/>
-          <a:p>
-            <a:pPr algn="l">
-              <a:lnSpc>
-                <a:spcPct val="115000"/>
-              </a:lnSpc>
-            </a:pPr>
-            <a:r>
-              <a:rPr sz="1200">
-                <a:solidFill>
-                  <a:srgbClr val="333333"/>
-                </a:solidFill>
-                <a:latin typeface="Malgun Gothic"/>
-              </a:rPr>
-              <a:t>• **해석**: pixel-encodability 는 architecture-conditional. **Encoder saturation 만으로는 부족** — Idefics2 (SigLIP-SO400M, AUC 0.93) 는 Qwen/LLaVA-Next 보다 saturated 된 인코더지만 0 shortcuts.</a:t>
-            </a:r>
-          </a:p>
-          <a:p>
-            <a:pPr algn="l">
-              <a:lnSpc>
-                <a:spcPct val="115000"/>
-              </a:lnSpc>
-            </a:pPr>
-            <a:r>
-              <a:rPr sz="1200">
-                <a:solidFill>
-                  <a:srgbClr val="333333"/>
-                </a:solidFill>
-                <a:latin typeface="Malgun Gothic"/>
-              </a:rPr>
-              <a:t>• **Perceiver-resampler 후보**: Idefics2 만 perceiver projector (다른 모델은 MLP). 5-model design 은 isolate 못함 (encoder + projector + AnyRes 동시 다름) — controlled projector-swap 필요.</a:t>
-            </a:r>
-          </a:p>
-        </p:txBody>
-      </p:sp>
-      <p:sp>
-        <p:nvSpPr>
-          <p:cNvPr id="9" name="TextBox 8"/>
+              <a:t>• **Causal localization 이 Qwen-only 에서 cross-model 로 확장** — paper Contribution 2 강화.</a:t>
+            </a:r>
+          </a:p>
+        </p:txBody>
+      </p:sp>
+      <p:sp>
+        <p:nvSpPr>
+          <p:cNvPr id="7" name="TextBox 6"/>
           <p:cNvSpPr txBox="1"/>
           <p:nvPr/>
         </p:nvSpPr>
@@ -8720,7 +10266,7 @@
       </p:sp>
       <p:sp>
         <p:nvSpPr>
-          <p:cNvPr id="10" name="TextBox 9"/>
+          <p:cNvPr id="8" name="TextBox 7"/>
           <p:cNvSpPr txBox="1"/>
           <p:nvPr/>
         </p:nvSpPr>
@@ -8748,7 +10294,7 @@
                 </a:solidFill>
                 <a:latin typeface="Malgun Gothic"/>
               </a:rPr>
-              <a:t>20 / 26</a:t>
+              <a:t>20 / 30</a:t>
             </a:r>
           </a:p>
         </p:txBody>
@@ -8844,7 +10390,7 @@
                 </a:solidFill>
                 <a:latin typeface="Malgun Gothic"/>
               </a:rPr>
-              <a:t>결과 (8) — 외부 타당성 (M8a / M8d / M8c)</a:t>
+              <a:t>결과 (5c) — M5b SAE intervention cross-model (round 2): 3 of 5 break, 2 LLaVA NULL</a:t>
             </a:r>
           </a:p>
         </p:txBody>
@@ -8879,14 +10425,14 @@
                 </a:solidFill>
                 <a:latin typeface="Malgun Gothic"/>
               </a:rPr>
-              <a:t>비-원 도형 / 비-공 카테고리 / 실사진</a:t>
+              <a:t>모델별 actually-consumed layer (LLaVA L22 / Idefics2 L26 / InternVL3 L23 / Qwen L31) — encoder-side feature localization architecture-conditional</a:t>
             </a:r>
           </a:p>
         </p:txBody>
       </p:sp>
       <p:pic>
         <p:nvPicPr>
-          <p:cNvPr id="5" name="Picture 4" descr="m8a_shape_grid.png"/>
+          <p:cNvPr id="5" name="Picture 4" descr="m5b_sae_intervention_cross_model.png"/>
           <p:cNvPicPr>
             <a:picLocks noChangeAspect="1"/>
           </p:cNvPicPr>
@@ -8900,177 +10446,886 @@
         </p:blipFill>
         <p:spPr>
           <a:xfrm>
-            <a:off x="365760" y="1188720"/>
-            <a:ext cx="3840480" cy="4773272"/>
+            <a:off x="274320" y="1188720"/>
+            <a:ext cx="6858000" cy="4286250"/>
           </a:xfrm>
           <a:prstGeom prst="rect">
             <a:avLst/>
           </a:prstGeom>
         </p:spPr>
       </p:pic>
-      <p:sp>
-        <p:nvSpPr>
-          <p:cNvPr id="6" name="TextBox 5"/>
+      <p:graphicFrame>
+        <p:nvGraphicFramePr>
+          <p:cNvPr id="6" name="Table 5"/>
+          <p:cNvGraphicFramePr>
+            <a:graphicFrameLocks noGrp="1"/>
+          </p:cNvGraphicFramePr>
+          <p:nvPr/>
+        </p:nvGraphicFramePr>
+        <p:xfrm>
+          <a:off x="7315200" y="1188720"/>
+          <a:ext cx="4754880" cy="2286000"/>
+        </p:xfrm>
+        <a:graphic>
+          <a:graphicData uri="http://schemas.openxmlformats.org/drawingml/2006/table">
+            <a:tbl>
+              <a:tblPr firstRow="1" bandRow="1">
+                <a:tableStyleId>{5C22544A-7EE6-4342-B048-85BDC9FD1C3A}</a:tableStyleId>
+              </a:tblPr>
+              <a:tblGrid>
+                <a:gridCol w="679268"/>
+                <a:gridCol w="679268"/>
+                <a:gridCol w="679268"/>
+                <a:gridCol w="679268"/>
+                <a:gridCol w="679268"/>
+                <a:gridCol w="679268"/>
+                <a:gridCol w="679272"/>
+              </a:tblGrid>
+              <a:tr h="381000">
+                <a:tc>
+                  <a:txBody>
+                    <a:bodyPr/>
+                    <a:lstStyle/>
+                    <a:p>
+                      <a:r>
+                        <a:rPr sz="1000" b="1">
+                          <a:solidFill>
+                            <a:srgbClr val="FFFFFF"/>
+                          </a:solidFill>
+                          <a:latin typeface="Malgun Gothic"/>
+                        </a:rPr>
+                        <a:t>Model</a:t>
+                      </a:r>
+                    </a:p>
+                  </a:txBody>
+                  <a:tcPr>
+                    <a:solidFill>
+                      <a:srgbClr val="2E4A7F"/>
+                    </a:solidFill>
+                  </a:tcPr>
+                </a:tc>
+                <a:tc>
+                  <a:txBody>
+                    <a:bodyPr/>
+                    <a:lstStyle/>
+                    <a:p>
+                      <a:r>
+                        <a:rPr sz="1000" b="1">
+                          <a:solidFill>
+                            <a:srgbClr val="FFFFFF"/>
+                          </a:solidFill>
+                          <a:latin typeface="Malgun Gothic"/>
+                        </a:rPr>
+                        <a:t>Layer</a:t>
+                      </a:r>
+                    </a:p>
+                  </a:txBody>
+                  <a:tcPr>
+                    <a:solidFill>
+                      <a:srgbClr val="2E4A7F"/>
+                    </a:solidFill>
+                  </a:tcPr>
+                </a:tc>
+                <a:tc>
+                  <a:txBody>
+                    <a:bodyPr/>
+                    <a:lstStyle/>
+                    <a:p>
+                      <a:r>
+                        <a:rPr sz="1000" b="1">
+                          <a:solidFill>
+                            <a:srgbClr val="FFFFFF"/>
+                          </a:solidFill>
+                          <a:latin typeface="Malgun Gothic"/>
+                        </a:rPr>
+                        <a:t>k=20</a:t>
+                      </a:r>
+                    </a:p>
+                  </a:txBody>
+                  <a:tcPr>
+                    <a:solidFill>
+                      <a:srgbClr val="2E4A7F"/>
+                    </a:solidFill>
+                  </a:tcPr>
+                </a:tc>
+                <a:tc>
+                  <a:txBody>
+                    <a:bodyPr/>
+                    <a:lstStyle/>
+                    <a:p>
+                      <a:r>
+                        <a:rPr sz="1000" b="1">
+                          <a:solidFill>
+                            <a:srgbClr val="FFFFFF"/>
+                          </a:solidFill>
+                          <a:latin typeface="Malgun Gothic"/>
+                        </a:rPr>
+                        <a:t>k=40</a:t>
+                      </a:r>
+                    </a:p>
+                  </a:txBody>
+                  <a:tcPr>
+                    <a:solidFill>
+                      <a:srgbClr val="2E4A7F"/>
+                    </a:solidFill>
+                  </a:tcPr>
+                </a:tc>
+                <a:tc>
+                  <a:txBody>
+                    <a:bodyPr/>
+                    <a:lstStyle/>
+                    <a:p>
+                      <a:r>
+                        <a:rPr sz="1000" b="1">
+                          <a:solidFill>
+                            <a:srgbClr val="FFFFFF"/>
+                          </a:solidFill>
+                          <a:latin typeface="Malgun Gothic"/>
+                        </a:rPr>
+                        <a:t>k=80</a:t>
+                      </a:r>
+                    </a:p>
+                  </a:txBody>
+                  <a:tcPr>
+                    <a:solidFill>
+                      <a:srgbClr val="2E4A7F"/>
+                    </a:solidFill>
+                  </a:tcPr>
+                </a:tc>
+                <a:tc>
+                  <a:txBody>
+                    <a:bodyPr/>
+                    <a:lstStyle/>
+                    <a:p>
+                      <a:r>
+                        <a:rPr sz="1000" b="1">
+                          <a:solidFill>
+                            <a:srgbClr val="FFFFFF"/>
+                          </a:solidFill>
+                          <a:latin typeface="Malgun Gothic"/>
+                        </a:rPr>
+                        <a:t>k=160</a:t>
+                      </a:r>
+                    </a:p>
+                  </a:txBody>
+                  <a:tcPr>
+                    <a:solidFill>
+                      <a:srgbClr val="2E4A7F"/>
+                    </a:solidFill>
+                  </a:tcPr>
+                </a:tc>
+                <a:tc>
+                  <a:txBody>
+                    <a:bodyPr/>
+                    <a:lstStyle/>
+                    <a:p>
+                      <a:r>
+                        <a:rPr sz="1000" b="1">
+                          <a:solidFill>
+                            <a:srgbClr val="FFFFFF"/>
+                          </a:solidFill>
+                          <a:latin typeface="Malgun Gothic"/>
+                        </a:rPr>
+                        <a:t>rand</a:t>
+                      </a:r>
+                    </a:p>
+                  </a:txBody>
+                  <a:tcPr>
+                    <a:solidFill>
+                      <a:srgbClr val="2E4A7F"/>
+                    </a:solidFill>
+                  </a:tcPr>
+                </a:tc>
+              </a:tr>
+              <a:tr h="381000">
+                <a:tc>
+                  <a:txBody>
+                    <a:bodyPr/>
+                    <a:lstStyle/>
+                    <a:p>
+                      <a:r>
+                        <a:rPr sz="1000">
+                          <a:latin typeface="Malgun Gothic"/>
+                        </a:rPr>
+                        <a:t>**Qwen2.5-VL**</a:t>
+                      </a:r>
+                    </a:p>
+                  </a:txBody>
+                  <a:tcPr>
+                    <a:solidFill>
+                      <a:srgbClr val="FFFFFF"/>
+                    </a:solidFill>
+                  </a:tcPr>
+                </a:tc>
+                <a:tc>
+                  <a:txBody>
+                    <a:bodyPr/>
+                    <a:lstStyle/>
+                    <a:p>
+                      <a:r>
+                        <a:rPr sz="1000">
+                          <a:latin typeface="Malgun Gothic"/>
+                        </a:rPr>
+                        <a:t>31</a:t>
+                      </a:r>
+                    </a:p>
+                  </a:txBody>
+                  <a:tcPr>
+                    <a:solidFill>
+                      <a:srgbClr val="FFFFFF"/>
+                    </a:solidFill>
+                  </a:tcPr>
+                </a:tc>
+                <a:tc>
+                  <a:txBody>
+                    <a:bodyPr/>
+                    <a:lstStyle/>
+                    <a:p>
+                      <a:r>
+                        <a:rPr sz="1000">
+                          <a:latin typeface="Malgun Gothic"/>
+                        </a:rPr>
+                        <a:t>1.00</a:t>
+                      </a:r>
+                    </a:p>
+                  </a:txBody>
+                  <a:tcPr>
+                    <a:solidFill>
+                      <a:srgbClr val="FFFFFF"/>
+                    </a:solidFill>
+                  </a:tcPr>
+                </a:tc>
+                <a:tc>
+                  <a:txBody>
+                    <a:bodyPr/>
+                    <a:lstStyle/>
+                    <a:p>
+                      <a:r>
+                        <a:rPr sz="1000">
+                          <a:latin typeface="Malgun Gothic"/>
+                        </a:rPr>
+                        <a:t>**0.00**</a:t>
+                      </a:r>
+                    </a:p>
+                  </a:txBody>
+                  <a:tcPr>
+                    <a:solidFill>
+                      <a:srgbClr val="FFFFFF"/>
+                    </a:solidFill>
+                  </a:tcPr>
+                </a:tc>
+                <a:tc>
+                  <a:txBody>
+                    <a:bodyPr/>
+                    <a:lstStyle/>
+                    <a:p>
+                      <a:r>
+                        <a:rPr sz="1000">
+                          <a:latin typeface="Malgun Gothic"/>
+                        </a:rPr>
+                        <a:t>**0.00**</a:t>
+                      </a:r>
+                    </a:p>
+                  </a:txBody>
+                  <a:tcPr>
+                    <a:solidFill>
+                      <a:srgbClr val="FFFFFF"/>
+                    </a:solidFill>
+                  </a:tcPr>
+                </a:tc>
+                <a:tc>
+                  <a:txBody>
+                    <a:bodyPr/>
+                    <a:lstStyle/>
+                    <a:p>
+                      <a:r>
+                        <a:rPr sz="1000">
+                          <a:latin typeface="Malgun Gothic"/>
+                        </a:rPr>
+                        <a:t>**0.00**</a:t>
+                      </a:r>
+                    </a:p>
+                  </a:txBody>
+                  <a:tcPr>
+                    <a:solidFill>
+                      <a:srgbClr val="FFFFFF"/>
+                    </a:solidFill>
+                  </a:tcPr>
+                </a:tc>
+                <a:tc>
+                  <a:txBody>
+                    <a:bodyPr/>
+                    <a:lstStyle/>
+                    <a:p>
+                      <a:r>
+                        <a:rPr sz="1000">
+                          <a:latin typeface="Malgun Gothic"/>
+                        </a:rPr>
+                        <a:t>1.00</a:t>
+                      </a:r>
+                    </a:p>
+                  </a:txBody>
+                  <a:tcPr>
+                    <a:solidFill>
+                      <a:srgbClr val="FFFFFF"/>
+                    </a:solidFill>
+                  </a:tcPr>
+                </a:tc>
+              </a:tr>
+              <a:tr h="381000">
+                <a:tc>
+                  <a:txBody>
+                    <a:bodyPr/>
+                    <a:lstStyle/>
+                    <a:p>
+                      <a:r>
+                        <a:rPr sz="1000">
+                          <a:latin typeface="Malgun Gothic"/>
+                        </a:rPr>
+                        <a:t>LLaVA-1.5</a:t>
+                      </a:r>
+                    </a:p>
+                  </a:txBody>
+                  <a:tcPr>
+                    <a:solidFill>
+                      <a:srgbClr val="F6F8FC"/>
+                    </a:solidFill>
+                  </a:tcPr>
+                </a:tc>
+                <a:tc>
+                  <a:txBody>
+                    <a:bodyPr/>
+                    <a:lstStyle/>
+                    <a:p>
+                      <a:r>
+                        <a:rPr sz="1000">
+                          <a:latin typeface="Malgun Gothic"/>
+                        </a:rPr>
+                        <a:t>22 (-2)</a:t>
+                      </a:r>
+                    </a:p>
+                  </a:txBody>
+                  <a:tcPr>
+                    <a:solidFill>
+                      <a:srgbClr val="F6F8FC"/>
+                    </a:solidFill>
+                  </a:tcPr>
+                </a:tc>
+                <a:tc>
+                  <a:txBody>
+                    <a:bodyPr/>
+                    <a:lstStyle/>
+                    <a:p>
+                      <a:r>
+                        <a:rPr sz="1000">
+                          <a:latin typeface="Malgun Gothic"/>
+                        </a:rPr>
+                        <a:t>1.00</a:t>
+                      </a:r>
+                    </a:p>
+                  </a:txBody>
+                  <a:tcPr>
+                    <a:solidFill>
+                      <a:srgbClr val="F6F8FC"/>
+                    </a:solidFill>
+                  </a:tcPr>
+                </a:tc>
+                <a:tc>
+                  <a:txBody>
+                    <a:bodyPr/>
+                    <a:lstStyle/>
+                    <a:p>
+                      <a:r>
+                        <a:rPr sz="1000">
+                          <a:latin typeface="Malgun Gothic"/>
+                        </a:rPr>
+                        <a:t>1.00</a:t>
+                      </a:r>
+                    </a:p>
+                  </a:txBody>
+                  <a:tcPr>
+                    <a:solidFill>
+                      <a:srgbClr val="F6F8FC"/>
+                    </a:solidFill>
+                  </a:tcPr>
+                </a:tc>
+                <a:tc>
+                  <a:txBody>
+                    <a:bodyPr/>
+                    <a:lstStyle/>
+                    <a:p>
+                      <a:r>
+                        <a:rPr sz="1000">
+                          <a:latin typeface="Malgun Gothic"/>
+                        </a:rPr>
+                        <a:t>1.00</a:t>
+                      </a:r>
+                    </a:p>
+                  </a:txBody>
+                  <a:tcPr>
+                    <a:solidFill>
+                      <a:srgbClr val="F6F8FC"/>
+                    </a:solidFill>
+                  </a:tcPr>
+                </a:tc>
+                <a:tc>
+                  <a:txBody>
+                    <a:bodyPr/>
+                    <a:lstStyle/>
+                    <a:p>
+                      <a:r>
+                        <a:rPr sz="1000">
+                          <a:latin typeface="Malgun Gothic"/>
+                        </a:rPr>
+                        <a:t>1.00</a:t>
+                      </a:r>
+                    </a:p>
+                  </a:txBody>
+                  <a:tcPr>
+                    <a:solidFill>
+                      <a:srgbClr val="F6F8FC"/>
+                    </a:solidFill>
+                  </a:tcPr>
+                </a:tc>
+                <a:tc>
+                  <a:txBody>
+                    <a:bodyPr/>
+                    <a:lstStyle/>
+                    <a:p>
+                      <a:r>
+                        <a:rPr sz="1000">
+                          <a:latin typeface="Malgun Gothic"/>
+                        </a:rPr>
+                        <a:t>1.00</a:t>
+                      </a:r>
+                    </a:p>
+                  </a:txBody>
+                  <a:tcPr>
+                    <a:solidFill>
+                      <a:srgbClr val="F6F8FC"/>
+                    </a:solidFill>
+                  </a:tcPr>
+                </a:tc>
+              </a:tr>
+              <a:tr h="381000">
+                <a:tc>
+                  <a:txBody>
+                    <a:bodyPr/>
+                    <a:lstStyle/>
+                    <a:p>
+                      <a:r>
+                        <a:rPr sz="1000">
+                          <a:latin typeface="Malgun Gothic"/>
+                        </a:rPr>
+                        <a:t>LLaVA-Next</a:t>
+                      </a:r>
+                    </a:p>
+                  </a:txBody>
+                  <a:tcPr>
+                    <a:solidFill>
+                      <a:srgbClr val="FFFFFF"/>
+                    </a:solidFill>
+                  </a:tcPr>
+                </a:tc>
+                <a:tc>
+                  <a:txBody>
+                    <a:bodyPr/>
+                    <a:lstStyle/>
+                    <a:p>
+                      <a:r>
+                        <a:rPr sz="1000">
+                          <a:latin typeface="Malgun Gothic"/>
+                        </a:rPr>
+                        <a:t>22 (-2)</a:t>
+                      </a:r>
+                    </a:p>
+                  </a:txBody>
+                  <a:tcPr>
+                    <a:solidFill>
+                      <a:srgbClr val="FFFFFF"/>
+                    </a:solidFill>
+                  </a:tcPr>
+                </a:tc>
+                <a:tc>
+                  <a:txBody>
+                    <a:bodyPr/>
+                    <a:lstStyle/>
+                    <a:p>
+                      <a:r>
+                        <a:rPr sz="1000">
+                          <a:latin typeface="Malgun Gothic"/>
+                        </a:rPr>
+                        <a:t>1.00</a:t>
+                      </a:r>
+                    </a:p>
+                  </a:txBody>
+                  <a:tcPr>
+                    <a:solidFill>
+                      <a:srgbClr val="FFFFFF"/>
+                    </a:solidFill>
+                  </a:tcPr>
+                </a:tc>
+                <a:tc>
+                  <a:txBody>
+                    <a:bodyPr/>
+                    <a:lstStyle/>
+                    <a:p>
+                      <a:r>
+                        <a:rPr sz="1000">
+                          <a:latin typeface="Malgun Gothic"/>
+                        </a:rPr>
+                        <a:t>1.00</a:t>
+                      </a:r>
+                    </a:p>
+                  </a:txBody>
+                  <a:tcPr>
+                    <a:solidFill>
+                      <a:srgbClr val="FFFFFF"/>
+                    </a:solidFill>
+                  </a:tcPr>
+                </a:tc>
+                <a:tc>
+                  <a:txBody>
+                    <a:bodyPr/>
+                    <a:lstStyle/>
+                    <a:p>
+                      <a:r>
+                        <a:rPr sz="1000">
+                          <a:latin typeface="Malgun Gothic"/>
+                        </a:rPr>
+                        <a:t>1.00</a:t>
+                      </a:r>
+                    </a:p>
+                  </a:txBody>
+                  <a:tcPr>
+                    <a:solidFill>
+                      <a:srgbClr val="FFFFFF"/>
+                    </a:solidFill>
+                  </a:tcPr>
+                </a:tc>
+                <a:tc>
+                  <a:txBody>
+                    <a:bodyPr/>
+                    <a:lstStyle/>
+                    <a:p>
+                      <a:r>
+                        <a:rPr sz="1000">
+                          <a:latin typeface="Malgun Gothic"/>
+                        </a:rPr>
+                        <a:t>1.00</a:t>
+                      </a:r>
+                    </a:p>
+                  </a:txBody>
+                  <a:tcPr>
+                    <a:solidFill>
+                      <a:srgbClr val="FFFFFF"/>
+                    </a:solidFill>
+                  </a:tcPr>
+                </a:tc>
+                <a:tc>
+                  <a:txBody>
+                    <a:bodyPr/>
+                    <a:lstStyle/>
+                    <a:p>
+                      <a:r>
+                        <a:rPr sz="1000">
+                          <a:latin typeface="Malgun Gothic"/>
+                        </a:rPr>
+                        <a:t>1.00</a:t>
+                      </a:r>
+                    </a:p>
+                  </a:txBody>
+                  <a:tcPr>
+                    <a:solidFill>
+                      <a:srgbClr val="FFFFFF"/>
+                    </a:solidFill>
+                  </a:tcPr>
+                </a:tc>
+              </a:tr>
+              <a:tr h="381000">
+                <a:tc>
+                  <a:txBody>
+                    <a:bodyPr/>
+                    <a:lstStyle/>
+                    <a:p>
+                      <a:r>
+                        <a:rPr sz="1000">
+                          <a:latin typeface="Malgun Gothic"/>
+                        </a:rPr>
+                        <a:t>**Idefics2-8B**</a:t>
+                      </a:r>
+                    </a:p>
+                  </a:txBody>
+                  <a:tcPr>
+                    <a:solidFill>
+                      <a:srgbClr val="F6F8FC"/>
+                    </a:solidFill>
+                  </a:tcPr>
+                </a:tc>
+                <a:tc>
+                  <a:txBody>
+                    <a:bodyPr/>
+                    <a:lstStyle/>
+                    <a:p>
+                      <a:r>
+                        <a:rPr sz="1000">
+                          <a:latin typeface="Malgun Gothic"/>
+                        </a:rPr>
+                        <a:t>26</a:t>
+                      </a:r>
+                    </a:p>
+                  </a:txBody>
+                  <a:tcPr>
+                    <a:solidFill>
+                      <a:srgbClr val="F6F8FC"/>
+                    </a:solidFill>
+                  </a:tcPr>
+                </a:tc>
+                <a:tc>
+                  <a:txBody>
+                    <a:bodyPr/>
+                    <a:lstStyle/>
+                    <a:p>
+                      <a:r>
+                        <a:rPr sz="1000">
+                          <a:latin typeface="Malgun Gothic"/>
+                        </a:rPr>
+                        <a:t>1.00</a:t>
+                      </a:r>
+                    </a:p>
+                  </a:txBody>
+                  <a:tcPr>
+                    <a:solidFill>
+                      <a:srgbClr val="F6F8FC"/>
+                    </a:solidFill>
+                  </a:tcPr>
+                </a:tc>
+                <a:tc>
+                  <a:txBody>
+                    <a:bodyPr/>
+                    <a:lstStyle/>
+                    <a:p>
+                      <a:r>
+                        <a:rPr sz="1000">
+                          <a:latin typeface="Malgun Gothic"/>
+                        </a:rPr>
+                        <a:t>1.00</a:t>
+                      </a:r>
+                    </a:p>
+                  </a:txBody>
+                  <a:tcPr>
+                    <a:solidFill>
+                      <a:srgbClr val="F6F8FC"/>
+                    </a:solidFill>
+                  </a:tcPr>
+                </a:tc>
+                <a:tc>
+                  <a:txBody>
+                    <a:bodyPr/>
+                    <a:lstStyle/>
+                    <a:p>
+                      <a:r>
+                        <a:rPr sz="1000">
+                          <a:latin typeface="Malgun Gothic"/>
+                        </a:rPr>
+                        <a:t>1.00</a:t>
+                      </a:r>
+                    </a:p>
+                  </a:txBody>
+                  <a:tcPr>
+                    <a:solidFill>
+                      <a:srgbClr val="F6F8FC"/>
+                    </a:solidFill>
+                  </a:tcPr>
+                </a:tc>
+                <a:tc>
+                  <a:txBody>
+                    <a:bodyPr/>
+                    <a:lstStyle/>
+                    <a:p>
+                      <a:r>
+                        <a:rPr sz="1000">
+                          <a:latin typeface="Malgun Gothic"/>
+                        </a:rPr>
+                        <a:t>**0.00**</a:t>
+                      </a:r>
+                    </a:p>
+                  </a:txBody>
+                  <a:tcPr>
+                    <a:solidFill>
+                      <a:srgbClr val="F6F8FC"/>
+                    </a:solidFill>
+                  </a:tcPr>
+                </a:tc>
+                <a:tc>
+                  <a:txBody>
+                    <a:bodyPr/>
+                    <a:lstStyle/>
+                    <a:p>
+                      <a:r>
+                        <a:rPr sz="1000">
+                          <a:latin typeface="Malgun Gothic"/>
+                        </a:rPr>
+                        <a:t>1.00</a:t>
+                      </a:r>
+                    </a:p>
+                  </a:txBody>
+                  <a:tcPr>
+                    <a:solidFill>
+                      <a:srgbClr val="F6F8FC"/>
+                    </a:solidFill>
+                  </a:tcPr>
+                </a:tc>
+              </a:tr>
+              <a:tr h="381000">
+                <a:tc>
+                  <a:txBody>
+                    <a:bodyPr/>
+                    <a:lstStyle/>
+                    <a:p>
+                      <a:r>
+                        <a:rPr sz="1000">
+                          <a:latin typeface="Malgun Gothic"/>
+                        </a:rPr>
+                        <a:t>**InternVL3-hf**</a:t>
+                      </a:r>
+                    </a:p>
+                  </a:txBody>
+                  <a:tcPr>
+                    <a:solidFill>
+                      <a:srgbClr val="FFFFFF"/>
+                    </a:solidFill>
+                  </a:tcPr>
+                </a:tc>
+                <a:tc>
+                  <a:txBody>
+                    <a:bodyPr/>
+                    <a:lstStyle/>
+                    <a:p>
+                      <a:r>
+                        <a:rPr sz="1000">
+                          <a:latin typeface="Malgun Gothic"/>
+                        </a:rPr>
+                        <a:t>23</a:t>
+                      </a:r>
+                    </a:p>
+                  </a:txBody>
+                  <a:tcPr>
+                    <a:solidFill>
+                      <a:srgbClr val="FFFFFF"/>
+                    </a:solidFill>
+                  </a:tcPr>
+                </a:tc>
+                <a:tc>
+                  <a:txBody>
+                    <a:bodyPr/>
+                    <a:lstStyle/>
+                    <a:p>
+                      <a:r>
+                        <a:rPr sz="1000">
+                          <a:latin typeface="Malgun Gothic"/>
+                        </a:rPr>
+                        <a:t>1.00</a:t>
+                      </a:r>
+                    </a:p>
+                  </a:txBody>
+                  <a:tcPr>
+                    <a:solidFill>
+                      <a:srgbClr val="FFFFFF"/>
+                    </a:solidFill>
+                  </a:tcPr>
+                </a:tc>
+                <a:tc>
+                  <a:txBody>
+                    <a:bodyPr/>
+                    <a:lstStyle/>
+                    <a:p>
+                      <a:r>
+                        <a:rPr sz="1000">
+                          <a:latin typeface="Malgun Gothic"/>
+                        </a:rPr>
+                        <a:t>1.00</a:t>
+                      </a:r>
+                    </a:p>
+                  </a:txBody>
+                  <a:tcPr>
+                    <a:solidFill>
+                      <a:srgbClr val="FFFFFF"/>
+                    </a:solidFill>
+                  </a:tcPr>
+                </a:tc>
+                <a:tc>
+                  <a:txBody>
+                    <a:bodyPr/>
+                    <a:lstStyle/>
+                    <a:p>
+                      <a:r>
+                        <a:rPr sz="1000">
+                          <a:latin typeface="Malgun Gothic"/>
+                        </a:rPr>
+                        <a:t>1.00</a:t>
+                      </a:r>
+                    </a:p>
+                  </a:txBody>
+                  <a:tcPr>
+                    <a:solidFill>
+                      <a:srgbClr val="FFFFFF"/>
+                    </a:solidFill>
+                  </a:tcPr>
+                </a:tc>
+                <a:tc>
+                  <a:txBody>
+                    <a:bodyPr/>
+                    <a:lstStyle/>
+                    <a:p>
+                      <a:r>
+                        <a:rPr sz="1000">
+                          <a:latin typeface="Malgun Gothic"/>
+                        </a:rPr>
+                        <a:t>**0.00**</a:t>
+                      </a:r>
+                    </a:p>
+                  </a:txBody>
+                  <a:tcPr>
+                    <a:solidFill>
+                      <a:srgbClr val="FFFFFF"/>
+                    </a:solidFill>
+                  </a:tcPr>
+                </a:tc>
+                <a:tc>
+                  <a:txBody>
+                    <a:bodyPr/>
+                    <a:lstStyle/>
+                    <a:p>
+                      <a:r>
+                        <a:rPr sz="1000">
+                          <a:latin typeface="Malgun Gothic"/>
+                        </a:rPr>
+                        <a:t>1.00</a:t>
+                      </a:r>
+                    </a:p>
+                  </a:txBody>
+                  <a:tcPr>
+                    <a:solidFill>
+                      <a:srgbClr val="FFFFFF"/>
+                    </a:solidFill>
+                  </a:tcPr>
+                </a:tc>
+              </a:tr>
+            </a:tbl>
+          </a:graphicData>
+        </a:graphic>
+      </p:graphicFrame>
+      <p:sp>
+        <p:nvSpPr>
+          <p:cNvPr id="7" name="TextBox 6"/>
           <p:cNvSpPr txBox="1"/>
           <p:nvPr/>
         </p:nvSpPr>
         <p:spPr>
           <a:xfrm>
-            <a:off x="365760" y="4023360"/>
-            <a:ext cx="3840480" cy="365760"/>
-          </a:xfrm>
-          <a:prstGeom prst="rect">
-            <a:avLst/>
-          </a:prstGeom>
-          <a:noFill/>
-        </p:spPr>
-        <p:txBody>
-          <a:bodyPr wrap="none">
-            <a:spAutoFit/>
-          </a:bodyPr>
-          <a:lstStyle/>
-          <a:p>
-            <a:pPr algn="ctr"/>
-            <a:r>
-              <a:rPr sz="1100" i="1">
-                <a:solidFill>
-                  <a:srgbClr val="666666"/>
-                </a:solidFill>
-                <a:latin typeface="Malgun Gothic"/>
-              </a:rPr>
-              <a:t>M8a 5×4: 5 도형 × 4 추상화 레벨</a:t>
-            </a:r>
-          </a:p>
-        </p:txBody>
-      </p:sp>
-      <p:pic>
-        <p:nvPicPr>
-          <p:cNvPr id="7" name="Picture 6" descr="m8d_full_scene_samples.png"/>
-          <p:cNvPicPr>
-            <a:picLocks noChangeAspect="1"/>
-          </p:cNvPicPr>
-          <p:nvPr/>
-        </p:nvPicPr>
-        <p:blipFill>
-          <a:blip r:embed="rId3"/>
-          <a:stretch>
-            <a:fillRect/>
-          </a:stretch>
-        </p:blipFill>
-        <p:spPr>
-          <a:xfrm>
-            <a:off x="4389120" y="1188720"/>
-            <a:ext cx="3840480" cy="1803817"/>
-          </a:xfrm>
-          <a:prstGeom prst="rect">
-            <a:avLst/>
-          </a:prstGeom>
-        </p:spPr>
-      </p:pic>
-      <p:sp>
-        <p:nvSpPr>
-          <p:cNvPr id="8" name="TextBox 7"/>
-          <p:cNvSpPr txBox="1"/>
-          <p:nvPr/>
-        </p:nvSpPr>
-        <p:spPr>
-          <a:xfrm>
-            <a:off x="4389120" y="4023360"/>
-            <a:ext cx="3840480" cy="365760"/>
-          </a:xfrm>
-          <a:prstGeom prst="rect">
-            <a:avLst/>
-          </a:prstGeom>
-          <a:noFill/>
-        </p:spPr>
-        <p:txBody>
-          <a:bodyPr wrap="none">
-            <a:spAutoFit/>
-          </a:bodyPr>
-          <a:lstStyle/>
-          <a:p>
-            <a:pPr algn="ctr"/>
-            <a:r>
-              <a:rPr sz="1100" i="1">
-                <a:solidFill>
-                  <a:srgbClr val="666666"/>
-                </a:solidFill>
-                <a:latin typeface="Malgun Gothic"/>
-              </a:rPr>
-              <a:t>M8d: 카테고리 × 이벤트 (car / person / bird)</a:t>
-            </a:r>
-          </a:p>
-        </p:txBody>
-      </p:sp>
-      <p:pic>
-        <p:nvPicPr>
-          <p:cNvPr id="9" name="Picture 8" descr="m8c_photo_grid.png"/>
-          <p:cNvPicPr>
-            <a:picLocks noChangeAspect="1"/>
-          </p:cNvPicPr>
-          <p:nvPr/>
-        </p:nvPicPr>
-        <p:blipFill>
-          <a:blip r:embed="rId4"/>
-          <a:stretch>
-            <a:fillRect/>
-          </a:stretch>
-        </p:blipFill>
-        <p:spPr>
-          <a:xfrm>
-            <a:off x="8412480" y="1188720"/>
-            <a:ext cx="3474720" cy="4645782"/>
-          </a:xfrm>
-          <a:prstGeom prst="rect">
-            <a:avLst/>
-          </a:prstGeom>
-        </p:spPr>
-      </p:pic>
-      <p:sp>
-        <p:nvSpPr>
-          <p:cNvPr id="10" name="TextBox 9"/>
-          <p:cNvSpPr txBox="1"/>
-          <p:nvPr/>
-        </p:nvSpPr>
-        <p:spPr>
-          <a:xfrm>
-            <a:off x="8412480" y="4023360"/>
-            <a:ext cx="3474720" cy="365760"/>
-          </a:xfrm>
-          <a:prstGeom prst="rect">
-            <a:avLst/>
-          </a:prstGeom>
-          <a:noFill/>
-        </p:spPr>
-        <p:txBody>
-          <a:bodyPr wrap="none">
-            <a:spAutoFit/>
-          </a:bodyPr>
-          <a:lstStyle/>
-          <a:p>
-            <a:pPr algn="ctr"/>
-            <a:r>
-              <a:rPr sz="1100" i="1">
-                <a:solidFill>
-                  <a:srgbClr val="666666"/>
-                </a:solidFill>
-                <a:latin typeface="Malgun Gothic"/>
-              </a:rPr>
-              <a:t>M8c: 60 실사진 × 5 카테고리</a:t>
-            </a:r>
-          </a:p>
-        </p:txBody>
-      </p:sp>
-      <p:sp>
-        <p:nvSpPr>
-          <p:cNvPr id="11" name="TextBox 10"/>
-          <p:cNvSpPr txBox="1"/>
-          <p:nvPr/>
-        </p:nvSpPr>
-        <p:spPr>
-          <a:xfrm>
-            <a:off x="457200" y="4572000"/>
-            <a:ext cx="11247120" cy="1828800"/>
+            <a:off x="274320" y="5212080"/>
+            <a:ext cx="11612880" cy="1554480"/>
           </a:xfrm>
           <a:prstGeom prst="rect">
             <a:avLst/>
@@ -9095,7 +11350,7 @@
                 </a:solidFill>
                 <a:latin typeface="Malgun Gothic"/>
               </a:rPr>
-              <a:t>• **M8a strict scoring**: Qwen 1/4 (천장), LLaVA 4/4 — 비대칭 그 자체가 saturation 가설의 cross-shape 검증.</a:t>
+              <a:t>• **Round-1 → Round-2 layer-mismatch fix**: round-1 모두 layer 23 에서 SAE 학습했지만 LLaVA `vision_feature_layer=-2` (L22 사용), Idefics2 `last_hidden_state` (L26 사용) → round-2 에서 actually-consumed layer 에서 fresh capture + retrain.</a:t>
             </a:r>
           </a:p>
           <a:p>
@@ -9111,7 +11366,7 @@
                 </a:solidFill>
                 <a:latin typeface="Malgun Gothic"/>
               </a:rPr>
-              <a:t>• **M8d**: LLaVA 3/3 H7 PASS (car/person/bird). Qwen ceiling-flat.</a:t>
+              <a:t>• **Effect concentration 이 M3 vision AUC ladder 와 정렬**: Qwen 0.99 → k=40 (0.78 % features), Idefics2 0.93 + InternVL3 0.89 → k=160 (3.5-3.9 %), LLaVA 0.7-0.8 → NULL. 인코더 *discriminability 가 높을수록 SAE features 더 concentrated*.</a:t>
             </a:r>
           </a:p>
           <a:p>
@@ -9127,14 +11382,30 @@
                 </a:solidFill>
                 <a:latin typeface="Malgun Gothic"/>
               </a:rPr>
-              <a:t>• **M8c**: 사진은 인코더 격차를 *압축* (모든 모델 PMR [0.18, 0.67] 수렴) — saturation 의 co-factor 는 "input-context simplicity" 도 포함.</a:t>
-            </a:r>
-          </a:p>
-        </p:txBody>
-      </p:sp>
-      <p:sp>
-        <p:nvSpPr>
-          <p:cNvPr id="12" name="TextBox 11"/>
+              <a:t>• **LLaVA-1.5 high-k extension** (k=200/300/500/800) 모두 1.0 — NULL 은 sample-size/threshold artifact 가 아님 (4096 features 의 19.5% 까지 ablate 해도 break 없음).</a:t>
+            </a:r>
+          </a:p>
+          <a:p>
+            <a:pPr algn="l">
+              <a:lnSpc>
+                <a:spcPct val="115000"/>
+              </a:lnSpc>
+            </a:pPr>
+            <a:r>
+              <a:rPr sz="1200">
+                <a:solidFill>
+                  <a:srgbClr val="333333"/>
+                </a:solidFill>
+                <a:latin typeface="Malgun Gothic"/>
+              </a:rPr>
+              <a:t>• **LLaVA-Next M5a positive + M5b NULL dissociation**: CLIP cluster 의 commitment 가 *LM-side direction 으로만 라우팅*; non-CLIP 은 *encoder + LM 둘 다*. → *5 가지 downstream signature* 가 5-fold redundant 하게 같은 architecture clustering 표현.</a:t>
+            </a:r>
+          </a:p>
+        </p:txBody>
+      </p:sp>
+      <p:sp>
+        <p:nvSpPr>
+          <p:cNvPr id="8" name="TextBox 7"/>
           <p:cNvSpPr txBox="1"/>
           <p:nvPr/>
         </p:nvSpPr>
@@ -9169,7 +11440,7 @@
       </p:sp>
       <p:sp>
         <p:nvSpPr>
-          <p:cNvPr id="13" name="TextBox 12"/>
+          <p:cNvPr id="9" name="TextBox 8"/>
           <p:cNvSpPr txBox="1"/>
           <p:nvPr/>
         </p:nvSpPr>
@@ -9197,7 +11468,7 @@
                 </a:solidFill>
                 <a:latin typeface="Malgun Gothic"/>
               </a:rPr>
-              <a:t>21 / 26</a:t>
+              <a:t>21 / 30</a:t>
             </a:r>
           </a:p>
         </p:txBody>
@@ -9293,7 +11564,7 @@
                 </a:solidFill>
                 <a:latin typeface="Malgun Gothic"/>
               </a:rPr>
-              <a:t>결과 (9) — Multilingual labels (§4.3): 5 모델 × 한·일 언어</a:t>
+              <a:t>결과 (6) — §4.6 픽셀-공간 gradient ascent (Qwen)</a:t>
             </a:r>
           </a:p>
         </p:txBody>
@@ -9328,14 +11599,14 @@
                 </a:solidFill>
                 <a:latin typeface="Malgun Gothic"/>
               </a:rPr>
-              <a:t>한국어 (공/원/행성), 일본어 (ボール/円/惑星) 라벨로 H2 cross-language 테스트</a:t>
+              <a:t>ε=0.05 에서 5/5 v_L10 flip; 매칭 random 0/15 — 방향 특이성</a:t>
             </a:r>
           </a:p>
         </p:txBody>
       </p:sp>
       <p:pic>
         <p:nvPicPr>
-          <p:cNvPr id="5" name="Picture 4" descr="sec4_3_korean_vs_english_cross_model.png"/>
+          <p:cNvPr id="5" name="Picture 4" descr="sec4_6_counterfactual_stim_panels.png"/>
           <p:cNvPicPr>
             <a:picLocks noChangeAspect="1"/>
           </p:cNvPicPr>
@@ -9350,7 +11621,7 @@
         <p:spPr>
           <a:xfrm>
             <a:off x="457200" y="1188720"/>
-            <a:ext cx="6858000" cy="1840904"/>
+            <a:ext cx="10972800" cy="4306355"/>
           </a:xfrm>
           <a:prstGeom prst="rect">
             <a:avLst/>
@@ -9365,8 +11636,43 @@
         </p:nvSpPr>
         <p:spPr>
           <a:xfrm>
-            <a:off x="7589520" y="1188720"/>
-            <a:ext cx="4297680" cy="5029200"/>
+            <a:off x="457200" y="5029200"/>
+            <a:ext cx="10972800" cy="365760"/>
+          </a:xfrm>
+          <a:prstGeom prst="rect">
+            <a:avLst/>
+          </a:prstGeom>
+          <a:noFill/>
+        </p:spPr>
+        <p:txBody>
+          <a:bodyPr wrap="none">
+            <a:spAutoFit/>
+          </a:bodyPr>
+          <a:lstStyle/>
+          <a:p>
+            <a:pPr algn="ctr"/>
+            <a:r>
+              <a:rPr sz="1100" i="1">
+                <a:solidFill>
+                  <a:srgbClr val="666666"/>
+                </a:solidFill>
+                <a:latin typeface="Malgun Gothic"/>
+              </a:rPr>
+              <a:t>baseline → ε=0.05 → ε=0.1 → unconstrained. 작은 ε 에서 abstract 원의 형태는 보존; 픽셀 노이즈만 추가됨에도 모델은 "공이 떨어진다" 라고 응답함.</a:t>
+            </a:r>
+          </a:p>
+        </p:txBody>
+      </p:sp>
+      <p:sp>
+        <p:nvSpPr>
+          <p:cNvPr id="7" name="TextBox 6"/>
+          <p:cNvSpPr txBox="1"/>
+          <p:nvPr/>
+        </p:nvSpPr>
+        <p:spPr>
+          <a:xfrm>
+            <a:off x="457200" y="5486400"/>
+            <a:ext cx="11247120" cy="914400"/>
           </a:xfrm>
           <a:prstGeom prst="rect">
             <a:avLst/>
@@ -9385,68 +11691,20 @@
               </a:lnSpc>
             </a:pPr>
             <a:r>
-              <a:rPr sz="1200">
+              <a:rPr sz="1300">
                 <a:solidFill>
                   <a:srgbClr val="333333"/>
                 </a:solidFill>
                 <a:latin typeface="Malgun Gothic"/>
               </a:rPr>
-              <a:t>• Cross-label ordering 한국어에서 4/5 모델 보존 (planet &gt; ball &gt; circle).</a:t>
-            </a:r>
-          </a:p>
-          <a:p>
-            <a:pPr algn="l">
-              <a:lnSpc>
-                <a:spcPct val="115000"/>
-              </a:lnSpc>
-            </a:pPr>
-            <a:r>
-              <a:rPr sz="1200">
-                <a:solidFill>
-                  <a:srgbClr val="333333"/>
-                </a:solidFill>
-                <a:latin typeface="Malgun Gothic"/>
-              </a:rPr>
-              <a:t>• LLaVA-1.5 가 가장 큰 swing (avg |Δ| = 0.11) — Vicuna 의 한국어 coverage 가 가장 약함.</a:t>
-            </a:r>
-          </a:p>
-          <a:p>
-            <a:pPr algn="l">
-              <a:lnSpc>
-                <a:spcPct val="115000"/>
-              </a:lnSpc>
-            </a:pPr>
-            <a:r>
-              <a:rPr sz="1200">
-                <a:solidFill>
-                  <a:srgbClr val="333333"/>
-                </a:solidFill>
-                <a:latin typeface="Malgun Gothic"/>
-              </a:rPr>
-              <a:t>• **일본어** 는 다른 mechanism 노출: Qwen genuinely engages JA (label-echo 85-91%); LLaVA-1.5 internally translates kanji to English; **Idefics2 falls back to Chinese on 惑星** (24%).</a:t>
-            </a:r>
-          </a:p>
-          <a:p>
-            <a:pPr algn="l">
-              <a:lnSpc>
-                <a:spcPct val="115000"/>
-              </a:lnSpc>
-            </a:pPr>
-            <a:r>
-              <a:rPr sz="1200">
-                <a:solidFill>
-                  <a:srgbClr val="333333"/>
-                </a:solidFill>
-                <a:latin typeface="Malgun Gothic"/>
-              </a:rPr>
-              <a:t>• Scorer 다국어 확장 (KO/JA/CN substring matching, 51→54 케이스).</a:t>
-            </a:r>
-          </a:p>
-        </p:txBody>
-      </p:sp>
-      <p:sp>
-        <p:nvSpPr>
-          <p:cNvPr id="7" name="TextBox 6"/>
+              <a:t>• 응답: "The circle will continue to fall downward due to gravity." vs random control: "The circle will remain stationary as there is no indication of movement." → 방향 특이성, magnitude 가 아님.</a:t>
+            </a:r>
+          </a:p>
+        </p:txBody>
+      </p:sp>
+      <p:sp>
+        <p:nvSpPr>
+          <p:cNvPr id="8" name="TextBox 7"/>
           <p:cNvSpPr txBox="1"/>
           <p:nvPr/>
         </p:nvSpPr>
@@ -9481,7 +11739,7 @@
       </p:sp>
       <p:sp>
         <p:nvSpPr>
-          <p:cNvPr id="8" name="TextBox 7"/>
+          <p:cNvPr id="9" name="TextBox 8"/>
           <p:cNvSpPr txBox="1"/>
           <p:nvPr/>
         </p:nvSpPr>
@@ -9509,7 +11767,7 @@
                 </a:solidFill>
                 <a:latin typeface="Malgun Gothic"/>
               </a:rPr>
-              <a:t>22 / 26</a:t>
+              <a:t>22 / 30</a:t>
             </a:r>
           </a:p>
         </p:txBody>
@@ -9605,7 +11863,7 @@
                 </a:solidFill>
                 <a:latin typeface="Malgun Gothic"/>
               </a:rPr>
-              <a:t>Discussion (1) — Architecture-level reframe</a:t>
+              <a:t>결과 (7) — §4.6 cross-model layer sweep (n=10) + Idefics2 9-layer disambiguation</a:t>
             </a:r>
           </a:p>
         </p:txBody>
@@ -9640,21 +11898,80 @@
                 </a:solidFill>
                 <a:latin typeface="Malgun Gothic"/>
               </a:rPr>
-              <a:t>3가지 saturation 시그니처가 동일 architectural 속성의 다른 측면</a:t>
-            </a:r>
-          </a:p>
-        </p:txBody>
-      </p:sp>
-      <p:sp>
-        <p:nvSpPr>
-          <p:cNvPr id="5" name="TextBox 4"/>
+              <a:t>3 of 5 testable architectures supports pixel-encodability; Idefics2 falsifies (L5-L31), perceiver-resampler 후보</a:t>
+            </a:r>
+          </a:p>
+        </p:txBody>
+      </p:sp>
+      <p:pic>
+        <p:nvPicPr>
+          <p:cNvPr id="5" name="Picture 4" descr="sec4_6_cross_model_layer_sweep.png"/>
+          <p:cNvPicPr>
+            <a:picLocks noChangeAspect="1"/>
+          </p:cNvPicPr>
+          <p:nvPr/>
+        </p:nvPicPr>
+        <p:blipFill>
+          <a:blip r:embed="rId2"/>
+          <a:stretch>
+            <a:fillRect/>
+          </a:stretch>
+        </p:blipFill>
+        <p:spPr>
+          <a:xfrm>
+            <a:off x="274320" y="1143000"/>
+            <a:ext cx="7772400" cy="5238474"/>
+          </a:xfrm>
+          <a:prstGeom prst="rect">
+            <a:avLst/>
+          </a:prstGeom>
+        </p:spPr>
+      </p:pic>
+      <p:sp>
+        <p:nvSpPr>
+          <p:cNvPr id="6" name="TextBox 5"/>
           <p:cNvSpPr txBox="1"/>
           <p:nvPr/>
         </p:nvSpPr>
         <p:spPr>
           <a:xfrm>
-            <a:off x="457200" y="1280160"/>
-            <a:ext cx="11247120" cy="5029200"/>
+            <a:off x="274320" y="5120640"/>
+            <a:ext cx="7772400" cy="365760"/>
+          </a:xfrm>
+          <a:prstGeom prst="rect">
+            <a:avLst/>
+          </a:prstGeom>
+          <a:noFill/>
+        </p:spPr>
+        <p:txBody>
+          <a:bodyPr wrap="none">
+            <a:spAutoFit/>
+          </a:bodyPr>
+          <a:lstStyle/>
+          <a:p>
+            <a:pPr algn="ctr"/>
+            <a:r>
+              <a:rPr sz="1100" i="1">
+                <a:solidFill>
+                  <a:srgbClr val="666666"/>
+                </a:solidFill>
+                <a:latin typeface="Malgun Gothic"/>
+              </a:rPr>
+              <a:t>5 모델 × LM 레이어 별 PMR flip rate (n=10, ε=0.1, Wilson 95% CI). Idefics2 panel 은 9 레이어 (L5-L31, 16-97% relative depth) 표시.</a:t>
+            </a:r>
+          </a:p>
+        </p:txBody>
+      </p:sp>
+      <p:sp>
+        <p:nvSpPr>
+          <p:cNvPr id="7" name="TextBox 6"/>
+          <p:cNvSpPr txBox="1"/>
+          <p:nvPr/>
+        </p:nvSpPr>
+        <p:spPr>
+          <a:xfrm>
+            <a:off x="8229600" y="1188720"/>
+            <a:ext cx="3657600" cy="5029200"/>
           </a:xfrm>
           <a:prstGeom prst="rect">
             <a:avLst/>
@@ -9673,13 +11990,13 @@
               </a:lnSpc>
             </a:pPr>
             <a:r>
-              <a:rPr sz="1600">
+              <a:rPr sz="1100">
                 <a:solidFill>
                   <a:srgbClr val="333333"/>
                 </a:solidFill>
                 <a:latin typeface="Malgun Gothic"/>
               </a:rPr>
-              <a:t>• **Signature 1 — PMR ceiling** (M9 paper Table 1): 행동 PMR 이 non-CLIP cluster [0.80, 0.92] 와 CLIP cluster [0.14, 0.37] 로 분리. 사진에서는 [0.18, 0.67] 로 수렴.</a:t>
+              <a:t>• **Qwen** (SigLIP+Qwen2): broad shortcuts at L5/10/15/20/25 (Wilson 하한 0.49–0.72).</a:t>
             </a:r>
           </a:p>
           <a:p>
@@ -9689,13 +12006,13 @@
               </a:lnSpc>
             </a:pPr>
             <a:r>
-              <a:rPr sz="1600">
+              <a:rPr sz="1100">
                 <a:solidFill>
                   <a:srgbClr val="333333"/>
                 </a:solidFill>
                 <a:latin typeface="Malgun Gothic"/>
               </a:rPr>
-              <a:t>• **Signature 2 — Decision-stability ceiling** (§4.7): non-CLIP 모델 (Qwen / Idefics2 / InternVL3) 이 cue 발화 시 5 seed 모두 같은 PMR call 로 수렴 (RC ≈ 1.0). CLIP-기반 모델은 강한 cue 에서도 seed-level variance 보유.</a:t>
+              <a:t>• **LLaVA-Next** (CLIP+AnyRes+Mistral): L20+L25 모두 10/10.</a:t>
             </a:r>
           </a:p>
           <a:p>
@@ -9705,13 +12022,13 @@
               </a:lnSpc>
             </a:pPr>
             <a:r>
-              <a:rPr sz="1500">
+              <a:rPr sz="1100">
                 <a:solidFill>
                   <a:srgbClr val="333333"/>
                 </a:solidFill>
                 <a:latin typeface="Malgun Gothic"/>
               </a:rPr>
-              <a:t>• **Signature 3 — Pixel encodability** (§4.6 5-model n=10 layer sweep + Idefics2 9-layer disambiguation): **3 of 5 testable** architectures 가 픽셀-공간 gradient ascent 로 PMR flip (Qwen broad, LLaVA-Next L20+L25, LLaVA-1.5 L25 weak). Idefics2 는 L5-L31 9 레이어 모두 0 — **perceiver-resampler bottleneck 후보** (projector isolation 미검증). InternVL3 protocol-saturated.</a:t>
+              <a:t>• **LLaVA-1.5** (CLIP+Vicuna): L25 only, 4/10 (n=10 에서 약화).</a:t>
             </a:r>
           </a:p>
           <a:p>
@@ -9721,20 +12038,107 @@
               </a:lnSpc>
             </a:pPr>
             <a:r>
-              <a:rPr sz="1500">
+              <a:rPr sz="1100">
                 <a:solidFill>
                   <a:srgbClr val="333333"/>
                 </a:solidFill>
                 <a:latin typeface="Malgun Gothic"/>
               </a:rPr>
-              <a:t>• 3가지 signature 가 **동일한 architecture-level saturation 속성** 의 다른 표현. "encoder representational capacity 만으로 결정" 이라는 단순 인코더 가설은 disconfirm — joint encoder + LM + **projector design** (MLP vs perceiver) 이 결정자.</a:t>
-            </a:r>
-          </a:p>
-        </p:txBody>
-      </p:sp>
-      <p:sp>
-        <p:nvSpPr>
-          <p:cNvPr id="6" name="TextBox 5"/>
+              <a:t>• **Idefics2** (SigLIP-SO400M + perceiver-resampler + Mistral): **9 레이어 모두 0/10** (1 isolated noise hit at L28 on different stim than L25). v_L projection 은 정상 ascending (-11→+28 at L26-30, -72→+163 at L31). **Wrong-relative-depth falsified**.</a:t>
+            </a:r>
+          </a:p>
+          <a:p>
+            <a:pPr algn="l">
+              <a:lnSpc>
+                <a:spcPct val="115000"/>
+              </a:lnSpc>
+            </a:pPr>
+            <a:r>
+              <a:rPr sz="1100">
+                <a:solidFill>
+                  <a:srgbClr val="333333"/>
+                </a:solidFill>
+                <a:latin typeface="Malgun Gothic"/>
+              </a:rPr>
+              <a:t>• **InternVL3**: protocol-saturated (baseline_pmr=1.0).</a:t>
+            </a:r>
+          </a:p>
+          <a:p>
+            <a:pPr algn="l">
+              <a:lnSpc>
+                <a:spcPct val="115000"/>
+              </a:lnSpc>
+            </a:pPr>
+            <a:r>
+              <a:rPr sz="1100">
+                <a:solidFill>
+                  <a:srgbClr val="333333"/>
+                </a:solidFill>
+                <a:latin typeface="Malgun Gothic"/>
+              </a:rPr>
+              <a:t>• **Random controls**: 1/250 trials in aggregate.</a:t>
+            </a:r>
+          </a:p>
+        </p:txBody>
+      </p:sp>
+      <p:sp>
+        <p:nvSpPr>
+          <p:cNvPr id="8" name="TextBox 7"/>
+          <p:cNvSpPr txBox="1"/>
+          <p:nvPr/>
+        </p:nvSpPr>
+        <p:spPr>
+          <a:xfrm>
+            <a:off x="274320" y="5669280"/>
+            <a:ext cx="11612880" cy="1371600"/>
+          </a:xfrm>
+          <a:prstGeom prst="rect">
+            <a:avLst/>
+          </a:prstGeom>
+          <a:noFill/>
+        </p:spPr>
+        <p:txBody>
+          <a:bodyPr wrap="square">
+            <a:spAutoFit/>
+          </a:bodyPr>
+          <a:lstStyle/>
+          <a:p>
+            <a:pPr algn="l">
+              <a:lnSpc>
+                <a:spcPct val="115000"/>
+              </a:lnSpc>
+            </a:pPr>
+            <a:r>
+              <a:rPr sz="1200">
+                <a:solidFill>
+                  <a:srgbClr val="333333"/>
+                </a:solidFill>
+                <a:latin typeface="Malgun Gothic"/>
+              </a:rPr>
+              <a:t>• **해석**: pixel-encodability 는 architecture-conditional. **Encoder saturation 만으로는 부족** — Idefics2 (SigLIP-SO400M, AUC 0.93) 는 Qwen/LLaVA-Next 보다 saturated 된 인코더지만 0 shortcuts.</a:t>
+            </a:r>
+          </a:p>
+          <a:p>
+            <a:pPr algn="l">
+              <a:lnSpc>
+                <a:spcPct val="115000"/>
+              </a:lnSpc>
+            </a:pPr>
+            <a:r>
+              <a:rPr sz="1200">
+                <a:solidFill>
+                  <a:srgbClr val="333333"/>
+                </a:solidFill>
+                <a:latin typeface="Malgun Gothic"/>
+              </a:rPr>
+              <a:t>• **Perceiver-resampler 후보**: Idefics2 만 perceiver projector (다른 모델은 MLP). 5-model design 은 isolate 못함 (encoder + projector + AnyRes 동시 다름) — controlled projector-swap 필요.</a:t>
+            </a:r>
+          </a:p>
+        </p:txBody>
+      </p:sp>
+      <p:sp>
+        <p:nvSpPr>
+          <p:cNvPr id="9" name="TextBox 8"/>
           <p:cNvSpPr txBox="1"/>
           <p:nvPr/>
         </p:nvSpPr>
@@ -9769,7 +12173,7 @@
       </p:sp>
       <p:sp>
         <p:nvSpPr>
-          <p:cNvPr id="7" name="TextBox 6"/>
+          <p:cNvPr id="10" name="TextBox 9"/>
           <p:cNvSpPr txBox="1"/>
           <p:nvPr/>
         </p:nvSpPr>
@@ -9797,7 +12201,7 @@
                 </a:solidFill>
                 <a:latin typeface="Malgun Gothic"/>
               </a:rPr>
-              <a:t>23 / 26</a:t>
+              <a:t>23 / 30</a:t>
             </a:r>
           </a:p>
         </p:txBody>
@@ -9893,7 +12297,7 @@
                 </a:solidFill>
                 <a:latin typeface="Malgun Gothic"/>
               </a:rPr>
-              <a:t>Discussion (2) — 한계 및 미해결 질문</a:t>
+              <a:t>결과 (8) — 외부 타당성 (M8a / M8d / M8c)</a:t>
             </a:r>
           </a:p>
         </p:txBody>
@@ -9906,8 +12310,220 @@
         </p:nvSpPr>
         <p:spPr>
           <a:xfrm>
-            <a:off x="457200" y="1051560"/>
-            <a:ext cx="11247120" cy="5029200"/>
+            <a:off x="365760" y="621792"/>
+            <a:ext cx="11430000" cy="365760"/>
+          </a:xfrm>
+          <a:prstGeom prst="rect">
+            <a:avLst/>
+          </a:prstGeom>
+          <a:noFill/>
+        </p:spPr>
+        <p:txBody>
+          <a:bodyPr wrap="square" anchor="ctr">
+            <a:spAutoFit/>
+          </a:bodyPr>
+          <a:lstStyle/>
+          <a:p>
+            <a:pPr algn="l"/>
+            <a:r>
+              <a:rPr sz="1400" b="0">
+                <a:solidFill>
+                  <a:srgbClr val="666666"/>
+                </a:solidFill>
+                <a:latin typeface="Malgun Gothic"/>
+              </a:rPr>
+              <a:t>비-원 도형 / 비-공 카테고리 / 실사진</a:t>
+            </a:r>
+          </a:p>
+        </p:txBody>
+      </p:sp>
+      <p:pic>
+        <p:nvPicPr>
+          <p:cNvPr id="5" name="Picture 4" descr="m8a_shape_grid.png"/>
+          <p:cNvPicPr>
+            <a:picLocks noChangeAspect="1"/>
+          </p:cNvPicPr>
+          <p:nvPr/>
+        </p:nvPicPr>
+        <p:blipFill>
+          <a:blip r:embed="rId2"/>
+          <a:stretch>
+            <a:fillRect/>
+          </a:stretch>
+        </p:blipFill>
+        <p:spPr>
+          <a:xfrm>
+            <a:off x="365760" y="1188720"/>
+            <a:ext cx="3840480" cy="4773272"/>
+          </a:xfrm>
+          <a:prstGeom prst="rect">
+            <a:avLst/>
+          </a:prstGeom>
+        </p:spPr>
+      </p:pic>
+      <p:sp>
+        <p:nvSpPr>
+          <p:cNvPr id="6" name="TextBox 5"/>
+          <p:cNvSpPr txBox="1"/>
+          <p:nvPr/>
+        </p:nvSpPr>
+        <p:spPr>
+          <a:xfrm>
+            <a:off x="365760" y="4023360"/>
+            <a:ext cx="3840480" cy="365760"/>
+          </a:xfrm>
+          <a:prstGeom prst="rect">
+            <a:avLst/>
+          </a:prstGeom>
+          <a:noFill/>
+        </p:spPr>
+        <p:txBody>
+          <a:bodyPr wrap="none">
+            <a:spAutoFit/>
+          </a:bodyPr>
+          <a:lstStyle/>
+          <a:p>
+            <a:pPr algn="ctr"/>
+            <a:r>
+              <a:rPr sz="1100" i="1">
+                <a:solidFill>
+                  <a:srgbClr val="666666"/>
+                </a:solidFill>
+                <a:latin typeface="Malgun Gothic"/>
+              </a:rPr>
+              <a:t>M8a 5×4: 5 도형 × 4 추상화 레벨</a:t>
+            </a:r>
+          </a:p>
+        </p:txBody>
+      </p:sp>
+      <p:pic>
+        <p:nvPicPr>
+          <p:cNvPr id="7" name="Picture 6" descr="m8d_full_scene_samples.png"/>
+          <p:cNvPicPr>
+            <a:picLocks noChangeAspect="1"/>
+          </p:cNvPicPr>
+          <p:nvPr/>
+        </p:nvPicPr>
+        <p:blipFill>
+          <a:blip r:embed="rId3"/>
+          <a:stretch>
+            <a:fillRect/>
+          </a:stretch>
+        </p:blipFill>
+        <p:spPr>
+          <a:xfrm>
+            <a:off x="4389120" y="1188720"/>
+            <a:ext cx="3840480" cy="1803817"/>
+          </a:xfrm>
+          <a:prstGeom prst="rect">
+            <a:avLst/>
+          </a:prstGeom>
+        </p:spPr>
+      </p:pic>
+      <p:sp>
+        <p:nvSpPr>
+          <p:cNvPr id="8" name="TextBox 7"/>
+          <p:cNvSpPr txBox="1"/>
+          <p:nvPr/>
+        </p:nvSpPr>
+        <p:spPr>
+          <a:xfrm>
+            <a:off x="4389120" y="4023360"/>
+            <a:ext cx="3840480" cy="365760"/>
+          </a:xfrm>
+          <a:prstGeom prst="rect">
+            <a:avLst/>
+          </a:prstGeom>
+          <a:noFill/>
+        </p:spPr>
+        <p:txBody>
+          <a:bodyPr wrap="none">
+            <a:spAutoFit/>
+          </a:bodyPr>
+          <a:lstStyle/>
+          <a:p>
+            <a:pPr algn="ctr"/>
+            <a:r>
+              <a:rPr sz="1100" i="1">
+                <a:solidFill>
+                  <a:srgbClr val="666666"/>
+                </a:solidFill>
+                <a:latin typeface="Malgun Gothic"/>
+              </a:rPr>
+              <a:t>M8d: 카테고리 × 이벤트 (car / person / bird)</a:t>
+            </a:r>
+          </a:p>
+        </p:txBody>
+      </p:sp>
+      <p:pic>
+        <p:nvPicPr>
+          <p:cNvPr id="9" name="Picture 8" descr="m8c_photo_grid.png"/>
+          <p:cNvPicPr>
+            <a:picLocks noChangeAspect="1"/>
+          </p:cNvPicPr>
+          <p:nvPr/>
+        </p:nvPicPr>
+        <p:blipFill>
+          <a:blip r:embed="rId4"/>
+          <a:stretch>
+            <a:fillRect/>
+          </a:stretch>
+        </p:blipFill>
+        <p:spPr>
+          <a:xfrm>
+            <a:off x="8412480" y="1188720"/>
+            <a:ext cx="3474720" cy="4645782"/>
+          </a:xfrm>
+          <a:prstGeom prst="rect">
+            <a:avLst/>
+          </a:prstGeom>
+        </p:spPr>
+      </p:pic>
+      <p:sp>
+        <p:nvSpPr>
+          <p:cNvPr id="10" name="TextBox 9"/>
+          <p:cNvSpPr txBox="1"/>
+          <p:nvPr/>
+        </p:nvSpPr>
+        <p:spPr>
+          <a:xfrm>
+            <a:off x="8412480" y="4023360"/>
+            <a:ext cx="3474720" cy="365760"/>
+          </a:xfrm>
+          <a:prstGeom prst="rect">
+            <a:avLst/>
+          </a:prstGeom>
+          <a:noFill/>
+        </p:spPr>
+        <p:txBody>
+          <a:bodyPr wrap="none">
+            <a:spAutoFit/>
+          </a:bodyPr>
+          <a:lstStyle/>
+          <a:p>
+            <a:pPr algn="ctr"/>
+            <a:r>
+              <a:rPr sz="1100" i="1">
+                <a:solidFill>
+                  <a:srgbClr val="666666"/>
+                </a:solidFill>
+                <a:latin typeface="Malgun Gothic"/>
+              </a:rPr>
+              <a:t>M8c: 60 실사진 × 5 카테고리</a:t>
+            </a:r>
+          </a:p>
+        </p:txBody>
+      </p:sp>
+      <p:sp>
+        <p:nvSpPr>
+          <p:cNvPr id="11" name="TextBox 10"/>
+          <p:cNvSpPr txBox="1"/>
+          <p:nvPr/>
+        </p:nvSpPr>
+        <p:spPr>
+          <a:xfrm>
+            <a:off x="457200" y="4572000"/>
+            <a:ext cx="11247120" cy="1828800"/>
           </a:xfrm>
           <a:prstGeom prst="rect">
             <a:avLst/>
@@ -9926,13 +12542,13 @@
               </a:lnSpc>
             </a:pPr>
             <a:r>
-              <a:rPr sz="1400">
+              <a:rPr sz="1200">
                 <a:solidFill>
                   <a:srgbClr val="333333"/>
                 </a:solidFill>
                 <a:latin typeface="Malgun Gothic"/>
               </a:rPr>
-              <a:t>• **Projector isolation 미검증**: §4.6 5-model design 은 Idefics2 가 MLP-projector 모델들과 encoder + projector + AnyRes 동시에 다름. Perceiver-resampler 가 leading remaining candidate 이지만 controlled projector-swap test (동일 encoder/LM 에서 perceiver↔MLP) 은 재학습 필요 — out of scope.</a:t>
+              <a:t>• **M8a strict scoring**: Qwen 1/4 (천장), LLaVA 4/4 — 비대칭 그 자체가 saturation 가설의 cross-shape 검증.</a:t>
             </a:r>
           </a:p>
           <a:p>
@@ -9942,13 +12558,13 @@
               </a:lnSpc>
             </a:pPr>
             <a:r>
-              <a:rPr sz="1400">
+              <a:rPr sz="1200">
                 <a:solidFill>
                   <a:srgbClr val="333333"/>
                 </a:solidFill>
                 <a:latin typeface="Malgun Gothic"/>
               </a:rPr>
-              <a:t>• **LM-only counterfactual 부재**: LLaVA-1.5 → LLaVA-Next 의 0.52 PMR jump 는 4축 confound (AnyRes / projector / training / LM family). 동일 인코더 LM-swap 은 future work.</a:t>
+              <a:t>• **M8d**: LLaVA 3/3 H7 PASS (car/person/bird). Qwen ceiling-flat.</a:t>
             </a:r>
           </a:p>
           <a:p>
@@ -9958,84 +12574,20 @@
               </a:lnSpc>
             </a:pPr>
             <a:r>
-              <a:rPr sz="1400">
+              <a:rPr sz="1200">
                 <a:solidFill>
                   <a:srgbClr val="333333"/>
                 </a:solidFill>
                 <a:latin typeface="Malgun Gothic"/>
               </a:rPr>
-              <a:t>• **InternVL3 untestable** under §4.6 protocol: `line_blank_none_fall_*` baseline_pmr=1.0. Alternative-baseline stim 탐색 필요.</a:t>
-            </a:r>
-          </a:p>
-          <a:p>
-            <a:pPr algn="l">
-              <a:lnSpc>
-                <a:spcPct val="115000"/>
-              </a:lnSpc>
-            </a:pPr>
-            <a:r>
-              <a:rPr sz="1300">
-                <a:solidFill>
-                  <a:srgbClr val="333333"/>
-                </a:solidFill>
-                <a:latin typeface="Malgun Gothic"/>
-              </a:rPr>
-              <a:t>• **v_L10 은 1-d class-mean 축**: SAE / multi-axis decomposition 으로 pixel-encodable 한 *다른* 방향이 있을 수 있음. **2026-04-28 Cross-model SAE 4 모델 학습 완료** (LLaVA-1.5/Next/Idefics2/InternVL3); intervention runs 가 다음 단계.</a:t>
-            </a:r>
-          </a:p>
-          <a:p>
-            <a:pPr algn="l">
-              <a:lnSpc>
-                <a:spcPct val="115000"/>
-              </a:lnSpc>
-            </a:pPr>
-            <a:r>
-              <a:rPr sz="1400">
-                <a:solidFill>
-                  <a:srgbClr val="333333"/>
-                </a:solidFill>
-                <a:latin typeface="Malgun Gothic"/>
-              </a:rPr>
-              <a:t>• **Single-task evaluation**: "next-state-prediction" 만 검증. 다른 shortcut 행동 (counting / spatial / causality) 은 미검증.</a:t>
-            </a:r>
-          </a:p>
-          <a:p>
-            <a:pPr algn="l">
-              <a:lnSpc>
-                <a:spcPct val="115000"/>
-              </a:lnSpc>
-            </a:pPr>
-            <a:r>
-              <a:rPr sz="1400">
-                <a:solidFill>
-                  <a:srgbClr val="333333"/>
-                </a:solidFill>
-                <a:latin typeface="Malgun Gothic"/>
-              </a:rPr>
-              <a:t>• **Human baseline 미수집**: M7 Prolific (20 raters × 50 stim) paper-blocking, 다음 단계.</a:t>
-            </a:r>
-          </a:p>
-          <a:p>
-            <a:pPr algn="l">
-              <a:lnSpc>
-                <a:spcPct val="115000"/>
-              </a:lnSpc>
-            </a:pPr>
-            <a:r>
-              <a:rPr sz="1300">
-                <a:solidFill>
-                  <a:srgbClr val="333333"/>
-                </a:solidFill>
-                <a:latin typeface="Malgun Gothic"/>
-              </a:rPr>
-              <a:t>• **ST5 prompt-steering (Gavrikov 2024)**: 명시적 "abstract / physical" prompt steering 은 **paper scope 에서 retire** — prompt-variation axis 는 §4.3 KO/JA + label-free + open vs FC 로 cover.</a:t>
-            </a:r>
-          </a:p>
-        </p:txBody>
-      </p:sp>
-      <p:sp>
-        <p:nvSpPr>
-          <p:cNvPr id="5" name="TextBox 4"/>
+              <a:t>• **M8c**: 사진은 인코더 격차를 *압축* (모든 모델 PMR [0.18, 0.67] 수렴) — saturation 의 co-factor 는 "input-context simplicity" 도 포함.</a:t>
+            </a:r>
+          </a:p>
+        </p:txBody>
+      </p:sp>
+      <p:sp>
+        <p:nvSpPr>
+          <p:cNvPr id="12" name="TextBox 11"/>
           <p:cNvSpPr txBox="1"/>
           <p:nvPr/>
         </p:nvSpPr>
@@ -10070,7 +12622,7 @@
       </p:sp>
       <p:sp>
         <p:nvSpPr>
-          <p:cNvPr id="6" name="TextBox 5"/>
+          <p:cNvPr id="13" name="TextBox 12"/>
           <p:cNvSpPr txBox="1"/>
           <p:nvPr/>
         </p:nvSpPr>
@@ -10098,7 +12650,7 @@
                 </a:solidFill>
                 <a:latin typeface="Malgun Gothic"/>
               </a:rPr>
-              <a:t>24 / 26</a:t>
+              <a:t>24 / 30</a:t>
             </a:r>
           </a:p>
         </p:txBody>
@@ -10194,7 +12746,7 @@
                 </a:solidFill>
                 <a:latin typeface="Malgun Gothic"/>
               </a:rPr>
-              <a:t>결론 — 3 가지 paper-grade 기여</a:t>
+              <a:t>결과 (8b) — §4.8 Qwen 7B vs 32B PMR scaling: scale doesn't fix grounding</a:t>
             </a:r>
           </a:p>
         </p:txBody>
@@ -10229,21 +12781,793 @@
                 </a:solidFill>
                 <a:latin typeface="Malgun Gothic"/>
               </a:rPr>
-              <a:t>VLM 의 추상→물리 shortcut 을 행동 / 인과 / 픽셀 3차원으로 localize</a:t>
-            </a:r>
-          </a:p>
-        </p:txBody>
-      </p:sp>
-      <p:sp>
-        <p:nvSpPr>
-          <p:cNvPr id="5" name="TextBox 4"/>
+              <a:t>동일 M2 stim, 동일 OPEN prompt — aggregate PMR 0.931 → 0.926 (effectively zero); cue=none 에서만 8.6 pp drop</a:t>
+            </a:r>
+          </a:p>
+        </p:txBody>
+      </p:sp>
+      <p:graphicFrame>
+        <p:nvGraphicFramePr>
+          <p:cNvPr id="5" name="Table 4"/>
+          <p:cNvGraphicFramePr>
+            <a:graphicFrameLocks noGrp="1"/>
+          </p:cNvGraphicFramePr>
+          <p:nvPr/>
+        </p:nvGraphicFramePr>
+        <p:xfrm>
+          <a:off x="457200" y="1188720"/>
+          <a:ext cx="5943600" cy="1828800"/>
+        </p:xfrm>
+        <a:graphic>
+          <a:graphicData uri="http://schemas.openxmlformats.org/drawingml/2006/table">
+            <a:tbl>
+              <a:tblPr firstRow="1" bandRow="1">
+                <a:tableStyleId>{5C22544A-7EE6-4342-B048-85BDC9FD1C3A}</a:tableStyleId>
+              </a:tblPr>
+              <a:tblGrid>
+                <a:gridCol w="1485900"/>
+                <a:gridCol w="1485900"/>
+                <a:gridCol w="1485900"/>
+                <a:gridCol w="1485900"/>
+              </a:tblGrid>
+              <a:tr h="457200">
+                <a:tc>
+                  <a:txBody>
+                    <a:bodyPr/>
+                    <a:lstStyle/>
+                    <a:p/>
+                  </a:txBody>
+                  <a:tcPr>
+                    <a:solidFill>
+                      <a:srgbClr val="2E4A7F"/>
+                    </a:solidFill>
+                  </a:tcPr>
+                </a:tc>
+                <a:tc>
+                  <a:txBody>
+                    <a:bodyPr/>
+                    <a:lstStyle/>
+                    <a:p>
+                      <a:r>
+                        <a:rPr sz="1200" b="1">
+                          <a:solidFill>
+                            <a:srgbClr val="FFFFFF"/>
+                          </a:solidFill>
+                          <a:latin typeface="Malgun Gothic"/>
+                        </a:rPr>
+                        <a:t>Qwen 7B</a:t>
+                      </a:r>
+                    </a:p>
+                  </a:txBody>
+                  <a:tcPr>
+                    <a:solidFill>
+                      <a:srgbClr val="2E4A7F"/>
+                    </a:solidFill>
+                  </a:tcPr>
+                </a:tc>
+                <a:tc>
+                  <a:txBody>
+                    <a:bodyPr/>
+                    <a:lstStyle/>
+                    <a:p>
+                      <a:r>
+                        <a:rPr sz="1200" b="1">
+                          <a:solidFill>
+                            <a:srgbClr val="FFFFFF"/>
+                          </a:solidFill>
+                          <a:latin typeface="Malgun Gothic"/>
+                        </a:rPr>
+                        <a:t>Qwen 32B</a:t>
+                      </a:r>
+                    </a:p>
+                  </a:txBody>
+                  <a:tcPr>
+                    <a:solidFill>
+                      <a:srgbClr val="2E4A7F"/>
+                    </a:solidFill>
+                  </a:tcPr>
+                </a:tc>
+                <a:tc>
+                  <a:txBody>
+                    <a:bodyPr/>
+                    <a:lstStyle/>
+                    <a:p>
+                      <a:r>
+                        <a:rPr sz="1200" b="1">
+                          <a:solidFill>
+                            <a:srgbClr val="FFFFFF"/>
+                          </a:solidFill>
+                          <a:latin typeface="Malgun Gothic"/>
+                        </a:rPr>
+                        <a:t>Δ</a:t>
+                      </a:r>
+                    </a:p>
+                  </a:txBody>
+                  <a:tcPr>
+                    <a:solidFill>
+                      <a:srgbClr val="2E4A7F"/>
+                    </a:solidFill>
+                  </a:tcPr>
+                </a:tc>
+              </a:tr>
+              <a:tr h="457200">
+                <a:tc>
+                  <a:txBody>
+                    <a:bodyPr/>
+                    <a:lstStyle/>
+                    <a:p>
+                      <a:r>
+                        <a:rPr sz="1200">
+                          <a:latin typeface="Malgun Gothic"/>
+                        </a:rPr>
+                        <a:t>Aggregate PMR</a:t>
+                      </a:r>
+                    </a:p>
+                  </a:txBody>
+                  <a:tcPr>
+                    <a:solidFill>
+                      <a:srgbClr val="FFFFFF"/>
+                    </a:solidFill>
+                  </a:tcPr>
+                </a:tc>
+                <a:tc>
+                  <a:txBody>
+                    <a:bodyPr/>
+                    <a:lstStyle/>
+                    <a:p>
+                      <a:r>
+                        <a:rPr sz="1200">
+                          <a:latin typeface="Malgun Gothic"/>
+                        </a:rPr>
+                        <a:t>0.931</a:t>
+                      </a:r>
+                    </a:p>
+                  </a:txBody>
+                  <a:tcPr>
+                    <a:solidFill>
+                      <a:srgbClr val="FFFFFF"/>
+                    </a:solidFill>
+                  </a:tcPr>
+                </a:tc>
+                <a:tc>
+                  <a:txBody>
+                    <a:bodyPr/>
+                    <a:lstStyle/>
+                    <a:p>
+                      <a:r>
+                        <a:rPr sz="1200">
+                          <a:latin typeface="Malgun Gothic"/>
+                        </a:rPr>
+                        <a:t>**0.926**</a:t>
+                      </a:r>
+                    </a:p>
+                  </a:txBody>
+                  <a:tcPr>
+                    <a:solidFill>
+                      <a:srgbClr val="FFFFFF"/>
+                    </a:solidFill>
+                  </a:tcPr>
+                </a:tc>
+                <a:tc>
+                  <a:txBody>
+                    <a:bodyPr/>
+                    <a:lstStyle/>
+                    <a:p>
+                      <a:r>
+                        <a:rPr sz="1200">
+                          <a:latin typeface="Malgun Gothic"/>
+                        </a:rPr>
+                        <a:t>−0.005</a:t>
+                      </a:r>
+                    </a:p>
+                  </a:txBody>
+                  <a:tcPr>
+                    <a:solidFill>
+                      <a:srgbClr val="FFFFFF"/>
+                    </a:solidFill>
+                  </a:tcPr>
+                </a:tc>
+              </a:tr>
+              <a:tr h="457200">
+                <a:tc>
+                  <a:txBody>
+                    <a:bodyPr/>
+                    <a:lstStyle/>
+                    <a:p>
+                      <a:r>
+                        <a:rPr sz="1200">
+                          <a:latin typeface="Malgun Gothic"/>
+                        </a:rPr>
+                        <a:t>abstract_reject</a:t>
+                      </a:r>
+                    </a:p>
+                  </a:txBody>
+                  <a:tcPr>
+                    <a:solidFill>
+                      <a:srgbClr val="F6F8FC"/>
+                    </a:solidFill>
+                  </a:tcPr>
+                </a:tc>
+                <a:tc>
+                  <a:txBody>
+                    <a:bodyPr/>
+                    <a:lstStyle/>
+                    <a:p>
+                      <a:r>
+                        <a:rPr sz="1200">
+                          <a:latin typeface="Malgun Gothic"/>
+                        </a:rPr>
+                        <a:t>0.002</a:t>
+                      </a:r>
+                    </a:p>
+                  </a:txBody>
+                  <a:tcPr>
+                    <a:solidFill>
+                      <a:srgbClr val="F6F8FC"/>
+                    </a:solidFill>
+                  </a:tcPr>
+                </a:tc>
+                <a:tc>
+                  <a:txBody>
+                    <a:bodyPr/>
+                    <a:lstStyle/>
+                    <a:p>
+                      <a:r>
+                        <a:rPr sz="1200">
+                          <a:latin typeface="Malgun Gothic"/>
+                        </a:rPr>
+                        <a:t>**0.065**</a:t>
+                      </a:r>
+                    </a:p>
+                  </a:txBody>
+                  <a:tcPr>
+                    <a:solidFill>
+                      <a:srgbClr val="F6F8FC"/>
+                    </a:solidFill>
+                  </a:tcPr>
+                </a:tc>
+                <a:tc>
+                  <a:txBody>
+                    <a:bodyPr/>
+                    <a:lstStyle/>
+                    <a:p>
+                      <a:r>
+                        <a:rPr sz="1200">
+                          <a:latin typeface="Malgun Gothic"/>
+                        </a:rPr>
+                        <a:t>**35×**</a:t>
+                      </a:r>
+                    </a:p>
+                  </a:txBody>
+                  <a:tcPr>
+                    <a:solidFill>
+                      <a:srgbClr val="F6F8FC"/>
+                    </a:solidFill>
+                  </a:tcPr>
+                </a:tc>
+              </a:tr>
+              <a:tr h="457200">
+                <a:tc>
+                  <a:txBody>
+                    <a:bodyPr/>
+                    <a:lstStyle/>
+                    <a:p>
+                      <a:r>
+                        <a:rPr sz="1200">
+                          <a:latin typeface="Malgun Gothic"/>
+                        </a:rPr>
+                        <a:t>H2 label gap (ball−circle)</a:t>
+                      </a:r>
+                    </a:p>
+                  </a:txBody>
+                  <a:tcPr>
+                    <a:solidFill>
+                      <a:srgbClr val="FFFFFF"/>
+                    </a:solidFill>
+                  </a:tcPr>
+                </a:tc>
+                <a:tc>
+                  <a:txBody>
+                    <a:bodyPr/>
+                    <a:lstStyle/>
+                    <a:p>
+                      <a:r>
+                        <a:rPr sz="1200">
+                          <a:latin typeface="Malgun Gothic"/>
+                        </a:rPr>
+                        <a:t>+0.071</a:t>
+                      </a:r>
+                    </a:p>
+                  </a:txBody>
+                  <a:tcPr>
+                    <a:solidFill>
+                      <a:srgbClr val="FFFFFF"/>
+                    </a:solidFill>
+                  </a:tcPr>
+                </a:tc>
+                <a:tc>
+                  <a:txBody>
+                    <a:bodyPr/>
+                    <a:lstStyle/>
+                    <a:p>
+                      <a:r>
+                        <a:rPr sz="1200">
+                          <a:latin typeface="Malgun Gothic"/>
+                        </a:rPr>
+                        <a:t>+0.010</a:t>
+                      </a:r>
+                    </a:p>
+                  </a:txBody>
+                  <a:tcPr>
+                    <a:solidFill>
+                      <a:srgbClr val="FFFFFF"/>
+                    </a:solidFill>
+                  </a:tcPr>
+                </a:tc>
+                <a:tc>
+                  <a:txBody>
+                    <a:bodyPr/>
+                    <a:lstStyle/>
+                    <a:p>
+                      <a:r>
+                        <a:rPr sz="1200">
+                          <a:latin typeface="Malgun Gothic"/>
+                        </a:rPr>
+                        <a:t>−0.061</a:t>
+                      </a:r>
+                    </a:p>
+                  </a:txBody>
+                  <a:tcPr>
+                    <a:solidFill>
+                      <a:srgbClr val="FFFFFF"/>
+                    </a:solidFill>
+                  </a:tcPr>
+                </a:tc>
+              </a:tr>
+            </a:tbl>
+          </a:graphicData>
+        </a:graphic>
+      </p:graphicFrame>
+      <p:graphicFrame>
+        <p:nvGraphicFramePr>
+          <p:cNvPr id="6" name="Table 5"/>
+          <p:cNvGraphicFramePr>
+            <a:graphicFrameLocks noGrp="1"/>
+          </p:cNvGraphicFramePr>
+          <p:nvPr/>
+        </p:nvGraphicFramePr>
+        <p:xfrm>
+          <a:off x="6858000" y="1188720"/>
+          <a:ext cx="5029200" cy="1828800"/>
+        </p:xfrm>
+        <a:graphic>
+          <a:graphicData uri="http://schemas.openxmlformats.org/drawingml/2006/table">
+            <a:tbl>
+              <a:tblPr firstRow="1" bandRow="1">
+                <a:tableStyleId>{5C22544A-7EE6-4342-B048-85BDC9FD1C3A}</a:tableStyleId>
+              </a:tblPr>
+              <a:tblGrid>
+                <a:gridCol w="1257300"/>
+                <a:gridCol w="1257300"/>
+                <a:gridCol w="1257300"/>
+                <a:gridCol w="1257300"/>
+              </a:tblGrid>
+              <a:tr h="365760">
+                <a:tc>
+                  <a:txBody>
+                    <a:bodyPr/>
+                    <a:lstStyle/>
+                    <a:p>
+                      <a:r>
+                        <a:rPr sz="1200" b="1">
+                          <a:solidFill>
+                            <a:srgbClr val="FFFFFF"/>
+                          </a:solidFill>
+                          <a:latin typeface="Malgun Gothic"/>
+                        </a:rPr>
+                        <a:t>cue_level</a:t>
+                      </a:r>
+                    </a:p>
+                  </a:txBody>
+                  <a:tcPr>
+                    <a:solidFill>
+                      <a:srgbClr val="2E4A7F"/>
+                    </a:solidFill>
+                  </a:tcPr>
+                </a:tc>
+                <a:tc>
+                  <a:txBody>
+                    <a:bodyPr/>
+                    <a:lstStyle/>
+                    <a:p>
+                      <a:r>
+                        <a:rPr sz="1200" b="1">
+                          <a:solidFill>
+                            <a:srgbClr val="FFFFFF"/>
+                          </a:solidFill>
+                          <a:latin typeface="Malgun Gothic"/>
+                        </a:rPr>
+                        <a:t>7B PMR</a:t>
+                      </a:r>
+                    </a:p>
+                  </a:txBody>
+                  <a:tcPr>
+                    <a:solidFill>
+                      <a:srgbClr val="2E4A7F"/>
+                    </a:solidFill>
+                  </a:tcPr>
+                </a:tc>
+                <a:tc>
+                  <a:txBody>
+                    <a:bodyPr/>
+                    <a:lstStyle/>
+                    <a:p>
+                      <a:r>
+                        <a:rPr sz="1200" b="1">
+                          <a:solidFill>
+                            <a:srgbClr val="FFFFFF"/>
+                          </a:solidFill>
+                          <a:latin typeface="Malgun Gothic"/>
+                        </a:rPr>
+                        <a:t>32B PMR</a:t>
+                      </a:r>
+                    </a:p>
+                  </a:txBody>
+                  <a:tcPr>
+                    <a:solidFill>
+                      <a:srgbClr val="2E4A7F"/>
+                    </a:solidFill>
+                  </a:tcPr>
+                </a:tc>
+                <a:tc>
+                  <a:txBody>
+                    <a:bodyPr/>
+                    <a:lstStyle/>
+                    <a:p>
+                      <a:r>
+                        <a:rPr sz="1200" b="1">
+                          <a:solidFill>
+                            <a:srgbClr val="FFFFFF"/>
+                          </a:solidFill>
+                          <a:latin typeface="Malgun Gothic"/>
+                        </a:rPr>
+                        <a:t>Δ</a:t>
+                      </a:r>
+                    </a:p>
+                  </a:txBody>
+                  <a:tcPr>
+                    <a:solidFill>
+                      <a:srgbClr val="2E4A7F"/>
+                    </a:solidFill>
+                  </a:tcPr>
+                </a:tc>
+              </a:tr>
+              <a:tr h="365760">
+                <a:tc>
+                  <a:txBody>
+                    <a:bodyPr/>
+                    <a:lstStyle/>
+                    <a:p>
+                      <a:r>
+                        <a:rPr sz="1200">
+                          <a:latin typeface="Malgun Gothic"/>
+                        </a:rPr>
+                        <a:t>both</a:t>
+                      </a:r>
+                    </a:p>
+                  </a:txBody>
+                  <a:tcPr>
+                    <a:solidFill>
+                      <a:srgbClr val="FFFFFF"/>
+                    </a:solidFill>
+                  </a:tcPr>
+                </a:tc>
+                <a:tc>
+                  <a:txBody>
+                    <a:bodyPr/>
+                    <a:lstStyle/>
+                    <a:p>
+                      <a:r>
+                        <a:rPr sz="1200">
+                          <a:latin typeface="Malgun Gothic"/>
+                        </a:rPr>
+                        <a:t>0.978</a:t>
+                      </a:r>
+                    </a:p>
+                  </a:txBody>
+                  <a:tcPr>
+                    <a:solidFill>
+                      <a:srgbClr val="FFFFFF"/>
+                    </a:solidFill>
+                  </a:tcPr>
+                </a:tc>
+                <a:tc>
+                  <a:txBody>
+                    <a:bodyPr/>
+                    <a:lstStyle/>
+                    <a:p>
+                      <a:r>
+                        <a:rPr sz="1200">
+                          <a:latin typeface="Malgun Gothic"/>
+                        </a:rPr>
+                        <a:t>0.972</a:t>
+                      </a:r>
+                    </a:p>
+                  </a:txBody>
+                  <a:tcPr>
+                    <a:solidFill>
+                      <a:srgbClr val="FFFFFF"/>
+                    </a:solidFill>
+                  </a:tcPr>
+                </a:tc>
+                <a:tc>
+                  <a:txBody>
+                    <a:bodyPr/>
+                    <a:lstStyle/>
+                    <a:p>
+                      <a:r>
+                        <a:rPr sz="1200">
+                          <a:latin typeface="Malgun Gothic"/>
+                        </a:rPr>
+                        <a:t>−0.006</a:t>
+                      </a:r>
+                    </a:p>
+                  </a:txBody>
+                  <a:tcPr>
+                    <a:solidFill>
+                      <a:srgbClr val="FFFFFF"/>
+                    </a:solidFill>
+                  </a:tcPr>
+                </a:tc>
+              </a:tr>
+              <a:tr h="365760">
+                <a:tc>
+                  <a:txBody>
+                    <a:bodyPr/>
+                    <a:lstStyle/>
+                    <a:p>
+                      <a:r>
+                        <a:rPr sz="1200">
+                          <a:latin typeface="Malgun Gothic"/>
+                        </a:rPr>
+                        <a:t>cast_shadow</a:t>
+                      </a:r>
+                    </a:p>
+                  </a:txBody>
+                  <a:tcPr>
+                    <a:solidFill>
+                      <a:srgbClr val="F6F8FC"/>
+                    </a:solidFill>
+                  </a:tcPr>
+                </a:tc>
+                <a:tc>
+                  <a:txBody>
+                    <a:bodyPr/>
+                    <a:lstStyle/>
+                    <a:p>
+                      <a:r>
+                        <a:rPr sz="1200">
+                          <a:latin typeface="Malgun Gothic"/>
+                        </a:rPr>
+                        <a:t>0.957</a:t>
+                      </a:r>
+                    </a:p>
+                  </a:txBody>
+                  <a:tcPr>
+                    <a:solidFill>
+                      <a:srgbClr val="F6F8FC"/>
+                    </a:solidFill>
+                  </a:tcPr>
+                </a:tc>
+                <a:tc>
+                  <a:txBody>
+                    <a:bodyPr/>
+                    <a:lstStyle/>
+                    <a:p>
+                      <a:r>
+                        <a:rPr sz="1200">
+                          <a:latin typeface="Malgun Gothic"/>
+                        </a:rPr>
+                        <a:t>0.945</a:t>
+                      </a:r>
+                    </a:p>
+                  </a:txBody>
+                  <a:tcPr>
+                    <a:solidFill>
+                      <a:srgbClr val="F6F8FC"/>
+                    </a:solidFill>
+                  </a:tcPr>
+                </a:tc>
+                <a:tc>
+                  <a:txBody>
+                    <a:bodyPr/>
+                    <a:lstStyle/>
+                    <a:p>
+                      <a:r>
+                        <a:rPr sz="1200">
+                          <a:latin typeface="Malgun Gothic"/>
+                        </a:rPr>
+                        <a:t>−0.012</a:t>
+                      </a:r>
+                    </a:p>
+                  </a:txBody>
+                  <a:tcPr>
+                    <a:solidFill>
+                      <a:srgbClr val="F6F8FC"/>
+                    </a:solidFill>
+                  </a:tcPr>
+                </a:tc>
+              </a:tr>
+              <a:tr h="365760">
+                <a:tc>
+                  <a:txBody>
+                    <a:bodyPr/>
+                    <a:lstStyle/>
+                    <a:p>
+                      <a:r>
+                        <a:rPr sz="1200">
+                          <a:latin typeface="Malgun Gothic"/>
+                        </a:rPr>
+                        <a:t>motion_arrow</a:t>
+                      </a:r>
+                    </a:p>
+                  </a:txBody>
+                  <a:tcPr>
+                    <a:solidFill>
+                      <a:srgbClr val="FFFFFF"/>
+                    </a:solidFill>
+                  </a:tcPr>
+                </a:tc>
+                <a:tc>
+                  <a:txBody>
+                    <a:bodyPr/>
+                    <a:lstStyle/>
+                    <a:p>
+                      <a:r>
+                        <a:rPr sz="1200">
+                          <a:latin typeface="Malgun Gothic"/>
+                        </a:rPr>
+                        <a:t>0.992</a:t>
+                      </a:r>
+                    </a:p>
+                  </a:txBody>
+                  <a:tcPr>
+                    <a:solidFill>
+                      <a:srgbClr val="FFFFFF"/>
+                    </a:solidFill>
+                  </a:tcPr>
+                </a:tc>
+                <a:tc>
+                  <a:txBody>
+                    <a:bodyPr/>
+                    <a:lstStyle/>
+                    <a:p>
+                      <a:r>
+                        <a:rPr sz="1200">
+                          <a:latin typeface="Malgun Gothic"/>
+                        </a:rPr>
+                        <a:t>0.987</a:t>
+                      </a:r>
+                    </a:p>
+                  </a:txBody>
+                  <a:tcPr>
+                    <a:solidFill>
+                      <a:srgbClr val="FFFFFF"/>
+                    </a:solidFill>
+                  </a:tcPr>
+                </a:tc>
+                <a:tc>
+                  <a:txBody>
+                    <a:bodyPr/>
+                    <a:lstStyle/>
+                    <a:p>
+                      <a:r>
+                        <a:rPr sz="1200">
+                          <a:latin typeface="Malgun Gothic"/>
+                        </a:rPr>
+                        <a:t>−0.005</a:t>
+                      </a:r>
+                    </a:p>
+                  </a:txBody>
+                  <a:tcPr>
+                    <a:solidFill>
+                      <a:srgbClr val="FFFFFF"/>
+                    </a:solidFill>
+                  </a:tcPr>
+                </a:tc>
+              </a:tr>
+              <a:tr h="365760">
+                <a:tc>
+                  <a:txBody>
+                    <a:bodyPr/>
+                    <a:lstStyle/>
+                    <a:p>
+                      <a:r>
+                        <a:rPr sz="1200">
+                          <a:latin typeface="Malgun Gothic"/>
+                        </a:rPr>
+                        <a:t>**none (weakest cue)**</a:t>
+                      </a:r>
+                    </a:p>
+                  </a:txBody>
+                  <a:tcPr>
+                    <a:solidFill>
+                      <a:srgbClr val="F6F8FC"/>
+                    </a:solidFill>
+                  </a:tcPr>
+                </a:tc>
+                <a:tc>
+                  <a:txBody>
+                    <a:bodyPr/>
+                    <a:lstStyle/>
+                    <a:p>
+                      <a:r>
+                        <a:rPr sz="1200">
+                          <a:latin typeface="Malgun Gothic"/>
+                        </a:rPr>
+                        <a:t>**0.797**</a:t>
+                      </a:r>
+                    </a:p>
+                  </a:txBody>
+                  <a:tcPr>
+                    <a:solidFill>
+                      <a:srgbClr val="F6F8FC"/>
+                    </a:solidFill>
+                  </a:tcPr>
+                </a:tc>
+                <a:tc>
+                  <a:txBody>
+                    <a:bodyPr/>
+                    <a:lstStyle/>
+                    <a:p>
+                      <a:r>
+                        <a:rPr sz="1200">
+                          <a:latin typeface="Malgun Gothic"/>
+                        </a:rPr>
+                        <a:t>**0.711**</a:t>
+                      </a:r>
+                    </a:p>
+                  </a:txBody>
+                  <a:tcPr>
+                    <a:solidFill>
+                      <a:srgbClr val="F6F8FC"/>
+                    </a:solidFill>
+                  </a:tcPr>
+                </a:tc>
+                <a:tc>
+                  <a:txBody>
+                    <a:bodyPr/>
+                    <a:lstStyle/>
+                    <a:p>
+                      <a:r>
+                        <a:rPr sz="1200">
+                          <a:latin typeface="Malgun Gothic"/>
+                        </a:rPr>
+                        <a:t>**−0.086**</a:t>
+                      </a:r>
+                    </a:p>
+                  </a:txBody>
+                  <a:tcPr>
+                    <a:solidFill>
+                      <a:srgbClr val="F6F8FC"/>
+                    </a:solidFill>
+                  </a:tcPr>
+                </a:tc>
+              </a:tr>
+            </a:tbl>
+          </a:graphicData>
+        </a:graphic>
+      </p:graphicFrame>
+      <p:sp>
+        <p:nvSpPr>
+          <p:cNvPr id="7" name="TextBox 6"/>
           <p:cNvSpPr txBox="1"/>
           <p:nvPr/>
         </p:nvSpPr>
         <p:spPr>
           <a:xfrm>
-            <a:off x="457200" y="1280160"/>
-            <a:ext cx="11247120" cy="5029200"/>
+            <a:off x="457200" y="3931920"/>
+            <a:ext cx="11430000" cy="2286000"/>
           </a:xfrm>
           <a:prstGeom prst="rect">
             <a:avLst/>
@@ -10262,13 +13586,13 @@
               </a:lnSpc>
             </a:pPr>
             <a:r>
-              <a:rPr sz="1600">
+              <a:rPr sz="1200">
                 <a:solidFill>
                   <a:srgbClr val="333333"/>
                 </a:solidFill>
                 <a:latin typeface="Malgun Gothic"/>
               </a:rPr>
-              <a:t>• **[기여 1] Architecture-level reframe**. 5 모델 × 3 stim source × bootstrap CI 로, 행동 PMR ceiling 이 encoder representational capacity *만으로* 결정되지 않음을 disconfirm. 2-CLIP-point insight (LLaVA-1.5 vs LLaVA-Next) 가 가장 깨끗한 disconfirmer.</a:t>
+              <a:t>• **"Scale doesn't help PMR aggregate"**: 5× parameters 가 전체 PMR 천장을 못 깨뜨림 (MechBench-style finding).</a:t>
             </a:r>
           </a:p>
           <a:p>
@@ -10278,13 +13602,13 @@
               </a:lnSpc>
             </a:pPr>
             <a:r>
-              <a:rPr sz="1600">
+              <a:rPr sz="1200">
                 <a:solidFill>
                   <a:srgbClr val="333333"/>
                 </a:solidFill>
                 <a:latin typeface="Malgun Gothic"/>
               </a:rPr>
-              <a:t>• **[기여 2] 인과 localization**. Qwen2.5-VL 의 LM L10 단일 선형 방향 v_L10 이 forward-hook 으로 행동을 인과적으로 뒤집음 (10/10 α=40). M5a-ext: v_L10 은 regime axis (+ kinetic / − static), binary toggle 아님.</a:t>
+              <a:t>• **약-cue 에서만 작은 개선**: cue=none 에서 −8.6 pp + abstract_reject 11× 증가 → 32B 는 *cue 약할 때 더 abstract-mode 로 인식*. visual-prior under-weighting 가 saturation 의 *부분적* 메커니즘.</a:t>
             </a:r>
           </a:p>
           <a:p>
@@ -10294,20 +13618,36 @@
               </a:lnSpc>
             </a:pPr>
             <a:r>
-              <a:rPr sz="1400">
+              <a:rPr sz="1200">
                 <a:solidFill>
                   <a:srgbClr val="333333"/>
                 </a:solidFill>
                 <a:latin typeface="Malgun Gothic"/>
               </a:rPr>
-              <a:t>• **[기여 3] Pixel encodability — architecture-conditional**. 5-model n=10 layer sweep + Idefics2 9-layer disambiguation: **3 of 5 testable architectures** 가 픽셀-공간 gradient ascent 로 PMR flip 가능 (Qwen broad / LLaVA-Next L20+L25 / LLaVA-1.5 L25 weak). Idefics2 는 L5-L31 9 레이어 모두 0 → **wrong-relative-depth falsified, perceiver-resampler 후보** (projector isolation 은 controlled swap 필요, out of scope). InternVL3 protocol-saturated. Random 1/250 in aggregate. M9 PMR-ceiling / §4.7 결정-안정성 ceiling 과 평행한 **세 번째 architecture-level signature**, **projector design 을 추가 disambiguating axis** 로 노출.</a:t>
-            </a:r>
-          </a:p>
-        </p:txBody>
-      </p:sp>
-      <p:sp>
-        <p:nvSpPr>
-          <p:cNvPr id="6" name="TextBox 5"/>
+              <a:t>• **H2 label gap 약화 — 절반**: +0.071 → +0.010 (dissolved 는 아님). Scaling 이 label-prior 의존을 줄이지만 완전히 제거 못함.</a:t>
+            </a:r>
+          </a:p>
+          <a:p>
+            <a:pPr algn="l">
+              <a:lnSpc>
+                <a:spcPct val="115000"/>
+              </a:lnSpc>
+            </a:pPr>
+            <a:r>
+              <a:rPr sz="1200">
+                <a:solidFill>
+                  <a:srgbClr val="333333"/>
+                </a:solidFill>
+                <a:latin typeface="Malgun Gothic"/>
+              </a:rPr>
+              <a:t>• **Scaling 이 architecture cluster 를 안 바꿈**: 32B 는 7B 와 같은 SigLIP+Qwen2 family — encoder-saturation 의 architecture 결정성 유지. 72B (~144 GB bf16, dual-GPU 필요) 는 confirmatory 역할로 v1 paper out of scope.</a:t>
+            </a:r>
+          </a:p>
+        </p:txBody>
+      </p:sp>
+      <p:sp>
+        <p:nvSpPr>
+          <p:cNvPr id="8" name="TextBox 7"/>
           <p:cNvSpPr txBox="1"/>
           <p:nvPr/>
         </p:nvSpPr>
@@ -10342,7 +13682,7 @@
       </p:sp>
       <p:sp>
         <p:nvSpPr>
-          <p:cNvPr id="7" name="TextBox 6"/>
+          <p:cNvPr id="9" name="TextBox 8"/>
           <p:cNvSpPr txBox="1"/>
           <p:nvPr/>
         </p:nvSpPr>
@@ -10370,7 +13710,7 @@
                 </a:solidFill>
                 <a:latin typeface="Malgun Gothic"/>
               </a:rPr>
-              <a:t>25 / 26</a:t>
+              <a:t>25 / 30</a:t>
             </a:r>
           </a:p>
         </p:txBody>
@@ -10395,14 +13735,57 @@
       <p:grpSpPr/>
       <p:sp>
         <p:nvSpPr>
-          <p:cNvPr id="2" name="TextBox 1"/>
+          <p:cNvPr id="2" name="Rectangle 1"/>
+          <p:cNvSpPr/>
+          <p:nvPr/>
+        </p:nvSpPr>
+        <p:spPr>
+          <a:xfrm>
+            <a:off x="0" y="0"/>
+            <a:ext cx="164592" cy="914400"/>
+          </a:xfrm>
+          <a:prstGeom prst="rect">
+            <a:avLst/>
+          </a:prstGeom>
+          <a:solidFill>
+            <a:srgbClr val="2E4A7F"/>
+          </a:solidFill>
+          <a:ln>
+            <a:noFill/>
+          </a:ln>
+        </p:spPr>
+        <p:style>
+          <a:lnRef idx="1">
+            <a:schemeClr val="accent1"/>
+          </a:lnRef>
+          <a:fillRef idx="3">
+            <a:schemeClr val="accent1"/>
+          </a:fillRef>
+          <a:effectRef idx="2">
+            <a:schemeClr val="accent1"/>
+          </a:effectRef>
+          <a:fontRef idx="minor">
+            <a:schemeClr val="lt1"/>
+          </a:fontRef>
+        </p:style>
+        <p:txBody>
+          <a:bodyPr rtlCol="0" anchor="ctr"/>
+          <a:lstStyle/>
+          <a:p>
+            <a:pPr algn="ctr"/>
+          </a:p>
+        </p:txBody>
+      </p:sp>
+      <p:sp>
+        <p:nvSpPr>
+          <p:cNvPr id="3" name="TextBox 2"/>
           <p:cNvSpPr txBox="1"/>
           <p:nvPr/>
         </p:nvSpPr>
         <p:spPr>
           <a:xfrm>
-            <a:off x="457200" y="2286000"/>
-            <a:ext cx="11247120" cy="1097280"/>
+            <a:off x="365760" y="164592"/>
+            <a:ext cx="11430000" cy="548640"/>
           </a:xfrm>
           <a:prstGeom prst="rect">
             <a:avLst/>
@@ -10415,29 +13798,29 @@
           </a:bodyPr>
           <a:lstStyle/>
           <a:p>
-            <a:pPr algn="ctr"/>
-            <a:r>
-              <a:rPr sz="6000" b="1">
+            <a:pPr algn="l"/>
+            <a:r>
+              <a:rPr sz="2600" b="1">
                 <a:solidFill>
                   <a:srgbClr val="2E4A7F"/>
                 </a:solidFill>
                 <a:latin typeface="Malgun Gothic"/>
               </a:rPr>
-              <a:t>감사합니다</a:t>
-            </a:r>
-          </a:p>
-        </p:txBody>
-      </p:sp>
-      <p:sp>
-        <p:nvSpPr>
-          <p:cNvPr id="3" name="TextBox 2"/>
+              <a:t>결과 (9) — Multilingual labels (§4.3): 5 모델 × 한·일 언어</a:t>
+            </a:r>
+          </a:p>
+        </p:txBody>
+      </p:sp>
+      <p:sp>
+        <p:nvSpPr>
+          <p:cNvPr id="4" name="TextBox 3"/>
           <p:cNvSpPr txBox="1"/>
           <p:nvPr/>
         </p:nvSpPr>
         <p:spPr>
           <a:xfrm>
-            <a:off x="457200" y="3657600"/>
-            <a:ext cx="11247120" cy="731520"/>
+            <a:off x="365760" y="621792"/>
+            <a:ext cx="11430000" cy="365760"/>
           </a:xfrm>
           <a:prstGeom prst="rect">
             <a:avLst/>
@@ -10450,29 +13833,140 @@
           </a:bodyPr>
           <a:lstStyle/>
           <a:p>
-            <a:pPr algn="ctr"/>
-            <a:r>
-              <a:rPr sz="2200" b="0">
+            <a:pPr algn="l"/>
+            <a:r>
+              <a:rPr sz="1400" b="0">
+                <a:solidFill>
+                  <a:srgbClr val="666666"/>
+                </a:solidFill>
+                <a:latin typeface="Malgun Gothic"/>
+              </a:rPr>
+              <a:t>한국어 (공/원/행성), 일본어 (ボール/円/惑星) 라벨로 H2 cross-language 테스트</a:t>
+            </a:r>
+          </a:p>
+        </p:txBody>
+      </p:sp>
+      <p:pic>
+        <p:nvPicPr>
+          <p:cNvPr id="5" name="Picture 4" descr="sec4_3_korean_vs_english_cross_model.png"/>
+          <p:cNvPicPr>
+            <a:picLocks noChangeAspect="1"/>
+          </p:cNvPicPr>
+          <p:nvPr/>
+        </p:nvPicPr>
+        <p:blipFill>
+          <a:blip r:embed="rId2"/>
+          <a:stretch>
+            <a:fillRect/>
+          </a:stretch>
+        </p:blipFill>
+        <p:spPr>
+          <a:xfrm>
+            <a:off x="457200" y="1188720"/>
+            <a:ext cx="6858000" cy="1840904"/>
+          </a:xfrm>
+          <a:prstGeom prst="rect">
+            <a:avLst/>
+          </a:prstGeom>
+        </p:spPr>
+      </p:pic>
+      <p:sp>
+        <p:nvSpPr>
+          <p:cNvPr id="6" name="TextBox 5"/>
+          <p:cNvSpPr txBox="1"/>
+          <p:nvPr/>
+        </p:nvSpPr>
+        <p:spPr>
+          <a:xfrm>
+            <a:off x="7589520" y="1188720"/>
+            <a:ext cx="4297680" cy="5029200"/>
+          </a:xfrm>
+          <a:prstGeom prst="rect">
+            <a:avLst/>
+          </a:prstGeom>
+          <a:noFill/>
+        </p:spPr>
+        <p:txBody>
+          <a:bodyPr wrap="square">
+            <a:spAutoFit/>
+          </a:bodyPr>
+          <a:lstStyle/>
+          <a:p>
+            <a:pPr algn="l">
+              <a:lnSpc>
+                <a:spcPct val="115000"/>
+              </a:lnSpc>
+            </a:pPr>
+            <a:r>
+              <a:rPr sz="1200">
                 <a:solidFill>
                   <a:srgbClr val="333333"/>
                 </a:solidFill>
                 <a:latin typeface="Malgun Gothic"/>
               </a:rPr>
-              <a:t>Q &amp; A · 토론 · 다음 단계 우선순위</a:t>
-            </a:r>
-          </a:p>
-        </p:txBody>
-      </p:sp>
-      <p:sp>
-        <p:nvSpPr>
-          <p:cNvPr id="4" name="TextBox 3"/>
+              <a:t>• Cross-label ordering 한국어에서 4/5 모델 보존 (planet &gt; ball &gt; circle).</a:t>
+            </a:r>
+          </a:p>
+          <a:p>
+            <a:pPr algn="l">
+              <a:lnSpc>
+                <a:spcPct val="115000"/>
+              </a:lnSpc>
+            </a:pPr>
+            <a:r>
+              <a:rPr sz="1200">
+                <a:solidFill>
+                  <a:srgbClr val="333333"/>
+                </a:solidFill>
+                <a:latin typeface="Malgun Gothic"/>
+              </a:rPr>
+              <a:t>• LLaVA-1.5 가 가장 큰 swing (avg |Δ| = 0.11) — Vicuna 의 한국어 coverage 가 가장 약함.</a:t>
+            </a:r>
+          </a:p>
+          <a:p>
+            <a:pPr algn="l">
+              <a:lnSpc>
+                <a:spcPct val="115000"/>
+              </a:lnSpc>
+            </a:pPr>
+            <a:r>
+              <a:rPr sz="1200">
+                <a:solidFill>
+                  <a:srgbClr val="333333"/>
+                </a:solidFill>
+                <a:latin typeface="Malgun Gothic"/>
+              </a:rPr>
+              <a:t>• **일본어** 는 다른 mechanism 노출: Qwen genuinely engages JA (label-echo 85-91%); LLaVA-1.5 internally translates kanji to English; **Idefics2 falls back to Chinese on 惑星** (24%).</a:t>
+            </a:r>
+          </a:p>
+          <a:p>
+            <a:pPr algn="l">
+              <a:lnSpc>
+                <a:spcPct val="115000"/>
+              </a:lnSpc>
+            </a:pPr>
+            <a:r>
+              <a:rPr sz="1200">
+                <a:solidFill>
+                  <a:srgbClr val="333333"/>
+                </a:solidFill>
+                <a:latin typeface="Malgun Gothic"/>
+              </a:rPr>
+              <a:t>• Scorer 다국어 확장 (KO/JA/CN substring matching, 51→54 케이스).</a:t>
+            </a:r>
+          </a:p>
+        </p:txBody>
+      </p:sp>
+      <p:sp>
+        <p:nvSpPr>
+          <p:cNvPr id="7" name="TextBox 6"/>
           <p:cNvSpPr txBox="1"/>
           <p:nvPr/>
         </p:nvSpPr>
         <p:spPr>
           <a:xfrm>
-            <a:off x="457200" y="5029200"/>
-            <a:ext cx="11247120" cy="365760"/>
+            <a:off x="274320" y="6492240"/>
+            <a:ext cx="7315200" cy="274320"/>
           </a:xfrm>
           <a:prstGeom prst="rect">
             <a:avLst/>
@@ -10485,29 +13979,29 @@
           </a:bodyPr>
           <a:lstStyle/>
           <a:p>
-            <a:pPr algn="ctr"/>
-            <a:r>
-              <a:rPr sz="1400" b="0">
-                <a:solidFill>
-                  <a:srgbClr val="666666"/>
-                </a:solidFill>
-                <a:latin typeface="Malgun Gothic"/>
-              </a:rPr>
-              <a:t>Repo: github.com/namam3gy/physical-mode-activation</a:t>
-            </a:r>
-          </a:p>
-        </p:txBody>
-      </p:sp>
-      <p:sp>
-        <p:nvSpPr>
-          <p:cNvPr id="5" name="TextBox 4"/>
+            <a:pPr algn="l"/>
+            <a:r>
+              <a:rPr sz="900" b="0">
+                <a:solidFill>
+                  <a:srgbClr val="CCCCCC"/>
+                </a:solidFill>
+                <a:latin typeface="Malgun Gothic"/>
+              </a:rPr>
+              <a:t>VLM 의 추상-물리 shortcut — 5-model 실험과 픽셀-인코드 가능성</a:t>
+            </a:r>
+          </a:p>
+        </p:txBody>
+      </p:sp>
+      <p:sp>
+        <p:nvSpPr>
+          <p:cNvPr id="8" name="TextBox 7"/>
           <p:cNvSpPr txBox="1"/>
           <p:nvPr/>
         </p:nvSpPr>
         <p:spPr>
           <a:xfrm>
-            <a:off x="457200" y="5486400"/>
-            <a:ext cx="11247120" cy="365760"/>
+            <a:off x="10972800" y="6492240"/>
+            <a:ext cx="914400" cy="274320"/>
           </a:xfrm>
           <a:prstGeom prst="rect">
             <a:avLst/>
@@ -10520,15 +14014,940 @@
           </a:bodyPr>
           <a:lstStyle/>
           <a:p>
+            <a:pPr algn="r"/>
+            <a:r>
+              <a:rPr sz="900" b="0">
+                <a:solidFill>
+                  <a:srgbClr val="CCCCCC"/>
+                </a:solidFill>
+                <a:latin typeface="Malgun Gothic"/>
+              </a:rPr>
+              <a:t>26 / 30</a:t>
+            </a:r>
+          </a:p>
+        </p:txBody>
+      </p:sp>
+    </p:spTree>
+  </p:cSld>
+  <p:clrMapOvr>
+    <a:masterClrMapping/>
+  </p:clrMapOvr>
+</p:sld>
+</file>
+
+<file path=ppt/slides/slide27.xml><?xml version="1.0" encoding="utf-8"?>
+<p:sld xmlns:a="http://schemas.openxmlformats.org/drawingml/2006/main" xmlns:p="http://schemas.openxmlformats.org/presentationml/2006/main" xmlns:r="http://schemas.openxmlformats.org/officeDocument/2006/relationships">
+  <p:cSld>
+    <p:spTree>
+      <p:nvGrpSpPr>
+        <p:cNvPr id="1" name=""/>
+        <p:cNvGrpSpPr/>
+        <p:nvPr/>
+      </p:nvGrpSpPr>
+      <p:grpSpPr/>
+      <p:sp>
+        <p:nvSpPr>
+          <p:cNvPr id="2" name="Rectangle 1"/>
+          <p:cNvSpPr/>
+          <p:nvPr/>
+        </p:nvSpPr>
+        <p:spPr>
+          <a:xfrm>
+            <a:off x="0" y="0"/>
+            <a:ext cx="164592" cy="914400"/>
+          </a:xfrm>
+          <a:prstGeom prst="rect">
+            <a:avLst/>
+          </a:prstGeom>
+          <a:solidFill>
+            <a:srgbClr val="2E4A7F"/>
+          </a:solidFill>
+          <a:ln>
+            <a:noFill/>
+          </a:ln>
+        </p:spPr>
+        <p:style>
+          <a:lnRef idx="1">
+            <a:schemeClr val="accent1"/>
+          </a:lnRef>
+          <a:fillRef idx="3">
+            <a:schemeClr val="accent1"/>
+          </a:fillRef>
+          <a:effectRef idx="2">
+            <a:schemeClr val="accent1"/>
+          </a:effectRef>
+          <a:fontRef idx="minor">
+            <a:schemeClr val="lt1"/>
+          </a:fontRef>
+        </p:style>
+        <p:txBody>
+          <a:bodyPr rtlCol="0" anchor="ctr"/>
+          <a:lstStyle/>
+          <a:p>
             <a:pPr algn="ctr"/>
-            <a:r>
-              <a:rPr sz="1200" b="0">
+          </a:p>
+        </p:txBody>
+      </p:sp>
+      <p:sp>
+        <p:nvSpPr>
+          <p:cNvPr id="3" name="TextBox 2"/>
+          <p:cNvSpPr txBox="1"/>
+          <p:nvPr/>
+        </p:nvSpPr>
+        <p:spPr>
+          <a:xfrm>
+            <a:off x="365760" y="164592"/>
+            <a:ext cx="11430000" cy="548640"/>
+          </a:xfrm>
+          <a:prstGeom prst="rect">
+            <a:avLst/>
+          </a:prstGeom>
+          <a:noFill/>
+        </p:spPr>
+        <p:txBody>
+          <a:bodyPr wrap="square" anchor="ctr">
+            <a:spAutoFit/>
+          </a:bodyPr>
+          <a:lstStyle/>
+          <a:p>
+            <a:pPr algn="l"/>
+            <a:r>
+              <a:rPr sz="2600" b="1">
+                <a:solidFill>
+                  <a:srgbClr val="2E4A7F"/>
+                </a:solidFill>
+                <a:latin typeface="Malgun Gothic"/>
+              </a:rPr>
+              <a:t>Discussion (1) — Architecture-level reframe (5 downstream signatures)</a:t>
+            </a:r>
+          </a:p>
+        </p:txBody>
+      </p:sp>
+      <p:sp>
+        <p:nvSpPr>
+          <p:cNvPr id="4" name="TextBox 3"/>
+          <p:cNvSpPr txBox="1"/>
+          <p:nvPr/>
+        </p:nvSpPr>
+        <p:spPr>
+          <a:xfrm>
+            <a:off x="365760" y="621792"/>
+            <a:ext cx="11430000" cy="365760"/>
+          </a:xfrm>
+          <a:prstGeom prst="rect">
+            <a:avLst/>
+          </a:prstGeom>
+          <a:noFill/>
+        </p:spPr>
+        <p:txBody>
+          <a:bodyPr wrap="square" anchor="ctr">
+            <a:spAutoFit/>
+          </a:bodyPr>
+          <a:lstStyle/>
+          <a:p>
+            <a:pPr algn="l"/>
+            <a:r>
+              <a:rPr sz="1400" b="0">
                 <a:solidFill>
                   <a:srgbClr val="666666"/>
                 </a:solidFill>
                 <a:latin typeface="Malgun Gothic"/>
               </a:rPr>
-              <a:t>동반 자료: docs/review_ppt/physical_mode_paper_ko.md (슬라이드별 상세 설명)</a:t>
+              <a:t>5 가지 saturation 시그니처가 동일 architectural 속성을 5-fold redundant 하게 표현</a:t>
+            </a:r>
+          </a:p>
+        </p:txBody>
+      </p:sp>
+      <p:sp>
+        <p:nvSpPr>
+          <p:cNvPr id="5" name="TextBox 4"/>
+          <p:cNvSpPr txBox="1"/>
+          <p:nvPr/>
+        </p:nvSpPr>
+        <p:spPr>
+          <a:xfrm>
+            <a:off x="457200" y="1188720"/>
+            <a:ext cx="11247120" cy="5486400"/>
+          </a:xfrm>
+          <a:prstGeom prst="rect">
+            <a:avLst/>
+          </a:prstGeom>
+          <a:noFill/>
+        </p:spPr>
+        <p:txBody>
+          <a:bodyPr wrap="square">
+            <a:spAutoFit/>
+          </a:bodyPr>
+          <a:lstStyle/>
+          <a:p>
+            <a:pPr algn="l">
+              <a:lnSpc>
+                <a:spcPct val="115000"/>
+              </a:lnSpc>
+            </a:pPr>
+            <a:r>
+              <a:rPr sz="1300">
+                <a:solidFill>
+                  <a:srgbClr val="333333"/>
+                </a:solidFill>
+                <a:latin typeface="Malgun Gothic"/>
+              </a:rPr>
+              <a:t>• **Signature 1 — PMR ceiling** (M9 paper Table 1): 행동 PMR 이 non-CLIP cluster [0.80, 0.92] 와 CLIP cluster [0.14, 0.37] 로 분리. 사진에서는 [0.18, 0.67] 로 수렴.</a:t>
+            </a:r>
+          </a:p>
+          <a:p>
+            <a:pPr algn="l">
+              <a:lnSpc>
+                <a:spcPct val="115000"/>
+              </a:lnSpc>
+            </a:pPr>
+            <a:r>
+              <a:rPr sz="1300">
+                <a:solidFill>
+                  <a:srgbClr val="333333"/>
+                </a:solidFill>
+                <a:latin typeface="Malgun Gothic"/>
+              </a:rPr>
+              <a:t>• **Signature 2 — Decision-stability ceiling** (§4.7): non-CLIP 모델 (Qwen/Idefics2/InternVL3) 이 cue 발화 시 5 seed 모두 같은 PMR call 로 수렴 (RC ≈ 1.0). CLIP-기반은 강한 cue 에서도 seed variance.</a:t>
+            </a:r>
+          </a:p>
+          <a:p>
+            <a:pPr algn="l">
+              <a:lnSpc>
+                <a:spcPct val="115000"/>
+              </a:lnSpc>
+            </a:pPr>
+            <a:r>
+              <a:rPr sz="1300">
+                <a:solidFill>
+                  <a:srgbClr val="333333"/>
+                </a:solidFill>
+                <a:latin typeface="Malgun Gothic"/>
+              </a:rPr>
+              <a:t>• **Signature 3 — Pixel encodability** (§4.6 + Idefics2 9-layer): **3 of 5 testable** 가 픽셀 ascent 로 flip (Qwen broad / LLaVA-Next L20+L25 / LLaVA-1.5 L25 weak). Idefics2 0/9 → **perceiver-resampler bottleneck 후보**. InternVL3 protocol-saturated.</a:t>
+            </a:r>
+          </a:p>
+          <a:p>
+            <a:pPr algn="l">
+              <a:lnSpc>
+                <a:spcPct val="115000"/>
+              </a:lnSpc>
+            </a:pPr>
+            <a:r>
+              <a:rPr sz="1300">
+                <a:solidFill>
+                  <a:srgbClr val="333333"/>
+                </a:solidFill>
+                <a:latin typeface="Malgun Gothic"/>
+              </a:rPr>
+              <a:t>• **Signature 4 — LM logit-lens probe AUC** (M4 cross-model, Slide 17b): 5-model × 5-layer LM probe AUC 가 encoder probe AUC ladder 와 동일 클러스터링. **Idefics2 LM 0.995 &gt; vision 0.93** — perceiver 가 정보 strip 안 하고 *집중*; §4.6 0/9 와의 dissociation → "정보 LM 도달 ≠ 픽셀-공간 routability".</a:t>
+            </a:r>
+          </a:p>
+          <a:p>
+            <a:pPr algn="l">
+              <a:lnSpc>
+                <a:spcPct val="115000"/>
+              </a:lnSpc>
+            </a:pPr>
+            <a:r>
+              <a:rPr sz="1300">
+                <a:solidFill>
+                  <a:srgbClr val="333333"/>
+                </a:solidFill>
+                <a:latin typeface="Malgun Gothic"/>
+              </a:rPr>
+              <a:t>• **Signature 5 — Encoder-side SAE intervention** (M5b cross-model round 2, Slide 18c): per-model actually-consumed layer 에서 top-k feature ablation. **3 of 5 break** (Qwen k=40, Idefics2/InternVL3 k=160) + **2 LLaVA NULL** (k≤800). 인코더에 *국소화된 physics-cue feature 표현* 이 비-CLIP 클러스터에만 존재.</a:t>
+            </a:r>
+          </a:p>
+          <a:p>
+            <a:pPr algn="l">
+              <a:lnSpc>
+                <a:spcPct val="115000"/>
+              </a:lnSpc>
+            </a:pPr>
+            <a:r>
+              <a:rPr sz="1300">
+                <a:solidFill>
+                  <a:srgbClr val="333333"/>
+                </a:solidFill>
+                <a:latin typeface="Malgun Gothic"/>
+              </a:rPr>
+              <a:t>• 5 signature **모두 동일한 3-cluster decomposition 만듦** (High-saturation Qwen / Mid-saturation Idefics2-InternVL3 / Low-saturation LLaVA family). 단일 architectural property 가 5-fold redundant 하게 표현 — "encoder capacity 만" 단순 가설 disconfirm; joint encoder + LM + **projector design** 이 결정자.</a:t>
+            </a:r>
+          </a:p>
+        </p:txBody>
+      </p:sp>
+      <p:sp>
+        <p:nvSpPr>
+          <p:cNvPr id="6" name="TextBox 5"/>
+          <p:cNvSpPr txBox="1"/>
+          <p:nvPr/>
+        </p:nvSpPr>
+        <p:spPr>
+          <a:xfrm>
+            <a:off x="274320" y="6492240"/>
+            <a:ext cx="7315200" cy="274320"/>
+          </a:xfrm>
+          <a:prstGeom prst="rect">
+            <a:avLst/>
+          </a:prstGeom>
+          <a:noFill/>
+        </p:spPr>
+        <p:txBody>
+          <a:bodyPr wrap="square" anchor="t">
+            <a:spAutoFit/>
+          </a:bodyPr>
+          <a:lstStyle/>
+          <a:p>
+            <a:pPr algn="l"/>
+            <a:r>
+              <a:rPr sz="900" b="0">
+                <a:solidFill>
+                  <a:srgbClr val="CCCCCC"/>
+                </a:solidFill>
+                <a:latin typeface="Malgun Gothic"/>
+              </a:rPr>
+              <a:t>VLM 의 추상-물리 shortcut — 5-model 실험과 픽셀-인코드 가능성</a:t>
+            </a:r>
+          </a:p>
+        </p:txBody>
+      </p:sp>
+      <p:sp>
+        <p:nvSpPr>
+          <p:cNvPr id="7" name="TextBox 6"/>
+          <p:cNvSpPr txBox="1"/>
+          <p:nvPr/>
+        </p:nvSpPr>
+        <p:spPr>
+          <a:xfrm>
+            <a:off x="10972800" y="6492240"/>
+            <a:ext cx="914400" cy="274320"/>
+          </a:xfrm>
+          <a:prstGeom prst="rect">
+            <a:avLst/>
+          </a:prstGeom>
+          <a:noFill/>
+        </p:spPr>
+        <p:txBody>
+          <a:bodyPr wrap="square" anchor="t">
+            <a:spAutoFit/>
+          </a:bodyPr>
+          <a:lstStyle/>
+          <a:p>
+            <a:pPr algn="r"/>
+            <a:r>
+              <a:rPr sz="900" b="0">
+                <a:solidFill>
+                  <a:srgbClr val="CCCCCC"/>
+                </a:solidFill>
+                <a:latin typeface="Malgun Gothic"/>
+              </a:rPr>
+              <a:t>27 / 30</a:t>
+            </a:r>
+          </a:p>
+        </p:txBody>
+      </p:sp>
+    </p:spTree>
+  </p:cSld>
+  <p:clrMapOvr>
+    <a:masterClrMapping/>
+  </p:clrMapOvr>
+</p:sld>
+</file>
+
+<file path=ppt/slides/slide28.xml><?xml version="1.0" encoding="utf-8"?>
+<p:sld xmlns:a="http://schemas.openxmlformats.org/drawingml/2006/main" xmlns:p="http://schemas.openxmlformats.org/presentationml/2006/main" xmlns:r="http://schemas.openxmlformats.org/officeDocument/2006/relationships">
+  <p:cSld>
+    <p:spTree>
+      <p:nvGrpSpPr>
+        <p:cNvPr id="1" name=""/>
+        <p:cNvGrpSpPr/>
+        <p:nvPr/>
+      </p:nvGrpSpPr>
+      <p:grpSpPr/>
+      <p:sp>
+        <p:nvSpPr>
+          <p:cNvPr id="2" name="Rectangle 1"/>
+          <p:cNvSpPr/>
+          <p:nvPr/>
+        </p:nvSpPr>
+        <p:spPr>
+          <a:xfrm>
+            <a:off x="0" y="0"/>
+            <a:ext cx="164592" cy="914400"/>
+          </a:xfrm>
+          <a:prstGeom prst="rect">
+            <a:avLst/>
+          </a:prstGeom>
+          <a:solidFill>
+            <a:srgbClr val="2E4A7F"/>
+          </a:solidFill>
+          <a:ln>
+            <a:noFill/>
+          </a:ln>
+        </p:spPr>
+        <p:style>
+          <a:lnRef idx="1">
+            <a:schemeClr val="accent1"/>
+          </a:lnRef>
+          <a:fillRef idx="3">
+            <a:schemeClr val="accent1"/>
+          </a:fillRef>
+          <a:effectRef idx="2">
+            <a:schemeClr val="accent1"/>
+          </a:effectRef>
+          <a:fontRef idx="minor">
+            <a:schemeClr val="lt1"/>
+          </a:fontRef>
+        </p:style>
+        <p:txBody>
+          <a:bodyPr rtlCol="0" anchor="ctr"/>
+          <a:lstStyle/>
+          <a:p>
+            <a:pPr algn="ctr"/>
+          </a:p>
+        </p:txBody>
+      </p:sp>
+      <p:sp>
+        <p:nvSpPr>
+          <p:cNvPr id="3" name="TextBox 2"/>
+          <p:cNvSpPr txBox="1"/>
+          <p:nvPr/>
+        </p:nvSpPr>
+        <p:spPr>
+          <a:xfrm>
+            <a:off x="365760" y="164592"/>
+            <a:ext cx="11430000" cy="548640"/>
+          </a:xfrm>
+          <a:prstGeom prst="rect">
+            <a:avLst/>
+          </a:prstGeom>
+          <a:noFill/>
+        </p:spPr>
+        <p:txBody>
+          <a:bodyPr wrap="square" anchor="ctr">
+            <a:spAutoFit/>
+          </a:bodyPr>
+          <a:lstStyle/>
+          <a:p>
+            <a:pPr algn="l"/>
+            <a:r>
+              <a:rPr sz="2600" b="1">
+                <a:solidFill>
+                  <a:srgbClr val="2E4A7F"/>
+                </a:solidFill>
+                <a:latin typeface="Malgun Gothic"/>
+              </a:rPr>
+              <a:t>Discussion (2) — 한계 및 미해결 질문 (2026-04-28 evening update)</a:t>
+            </a:r>
+          </a:p>
+        </p:txBody>
+      </p:sp>
+      <p:sp>
+        <p:nvSpPr>
+          <p:cNvPr id="4" name="TextBox 3"/>
+          <p:cNvSpPr txBox="1"/>
+          <p:nvPr/>
+        </p:nvSpPr>
+        <p:spPr>
+          <a:xfrm>
+            <a:off x="457200" y="1051560"/>
+            <a:ext cx="11247120" cy="5029200"/>
+          </a:xfrm>
+          <a:prstGeom prst="rect">
+            <a:avLst/>
+          </a:prstGeom>
+          <a:noFill/>
+        </p:spPr>
+        <p:txBody>
+          <a:bodyPr wrap="square">
+            <a:spAutoFit/>
+          </a:bodyPr>
+          <a:lstStyle/>
+          <a:p>
+            <a:pPr algn="l">
+              <a:lnSpc>
+                <a:spcPct val="115000"/>
+              </a:lnSpc>
+            </a:pPr>
+            <a:r>
+              <a:rPr sz="1300">
+                <a:solidFill>
+                  <a:srgbClr val="333333"/>
+                </a:solidFill>
+                <a:latin typeface="Malgun Gothic"/>
+              </a:rPr>
+              <a:t>• **Projector isolation 미검증**: §4.6 + M5b 결과로 Idefics2 가 MLP-projector 모델들과 4축 confound. Perceiver-resampler 가 leading candidate 이지만 controlled projector-swap (encoder/LM 동일 + perceiver↔MLP) 은 재학습 필요 — out of scope. M4+M5a+§4.6 의 forward/inverse dissociation 으로 가설은 정밀화됨.</a:t>
+            </a:r>
+          </a:p>
+          <a:p>
+            <a:pPr algn="l">
+              <a:lnSpc>
+                <a:spcPct val="115000"/>
+              </a:lnSpc>
+            </a:pPr>
+            <a:r>
+              <a:rPr sz="1300">
+                <a:solidFill>
+                  <a:srgbClr val="333333"/>
+                </a:solidFill>
+                <a:latin typeface="Malgun Gothic"/>
+              </a:rPr>
+              <a:t>• **LM-only counterfactual 부재**: LLaVA-1.5 → LLaVA-Next 의 0.52 PMR jump 는 4축 confound. M5a positive + M5b NULL dissociation 이 "LM-side direction 으로 라우팅" 시사하지만 controlled LM swap 만 fully isolated. Future work.</a:t>
+            </a:r>
+          </a:p>
+          <a:p>
+            <a:pPr algn="l">
+              <a:lnSpc>
+                <a:spcPct val="115000"/>
+              </a:lnSpc>
+            </a:pPr>
+            <a:r>
+              <a:rPr sz="1300">
+                <a:solidFill>
+                  <a:srgbClr val="333333"/>
+                </a:solidFill>
+                <a:latin typeface="Malgun Gothic"/>
+              </a:rPr>
+              <a:t>• **InternVL3 §4.6 untestable**: `line_blank_none_fall_*` baseline_pmr=1.0. M5b 에서는 baseline=1 stim 의 top-160 ablation break 으로 testable.</a:t>
+            </a:r>
+          </a:p>
+          <a:p>
+            <a:pPr algn="l">
+              <a:lnSpc>
+                <a:spcPct val="115000"/>
+              </a:lnSpc>
+            </a:pPr>
+            <a:r>
+              <a:rPr sz="1200">
+                <a:solidFill>
+                  <a:srgbClr val="333333"/>
+                </a:solidFill>
+                <a:latin typeface="Malgun Gothic"/>
+              </a:rPr>
+              <a:t>• ~~**v_L 1-d class-mean axis**~~: ✅ **M5b cross-model intervention round 2 완료**: 모델별 actually-consumed layer (LLaVA L22 / Idefics2 L26 / InternVL3 L23 / Qwen L31) 에서 SAE retrain + top-k ablation. **3 of 5 break** (Qwen k=40, Idefics2/InternVL3 k=160), **2 LLaVA NULL** at k≤800. Multi-axis SAE / non-linear decomposition 은 v2 paper scope.</a:t>
+            </a:r>
+          </a:p>
+          <a:p>
+            <a:pPr algn="l">
+              <a:lnSpc>
+                <a:spcPct val="115000"/>
+              </a:lnSpc>
+            </a:pPr>
+            <a:r>
+              <a:rPr sz="1300">
+                <a:solidFill>
+                  <a:srgbClr val="333333"/>
+                </a:solidFill>
+                <a:latin typeface="Malgun Gothic"/>
+              </a:rPr>
+              <a:t>• **Qwen 72B PMR scaling 미실시**: 7B (0.931) vs 32B (0.926) 완료. 72B (~144 GB bf16, dual-GPU 또는 quantization 필요) 는 confirmatory 역할 — 32B/7B null pattern 으로 72B 도 ~0.93 예측. 자원 비용 trade-off 로 v1 out of scope.</a:t>
+            </a:r>
+          </a:p>
+          <a:p>
+            <a:pPr algn="l">
+              <a:lnSpc>
+                <a:spcPct val="115000"/>
+              </a:lnSpc>
+            </a:pPr>
+            <a:r>
+              <a:rPr sz="1300">
+                <a:solidFill>
+                  <a:srgbClr val="333333"/>
+                </a:solidFill>
+                <a:latin typeface="Malgun Gothic"/>
+              </a:rPr>
+              <a:t>• **Single-task evaluation**: "next-state-prediction" 만 검증. Counting / spatial / causality 등 다른 shortcut 미검증.</a:t>
+            </a:r>
+          </a:p>
+          <a:p>
+            <a:pPr algn="l">
+              <a:lnSpc>
+                <a:spcPct val="115000"/>
+              </a:lnSpc>
+            </a:pPr>
+            <a:r>
+              <a:rPr sz="1300">
+                <a:solidFill>
+                  <a:srgbClr val="333333"/>
+                </a:solidFill>
+                <a:latin typeface="Malgun Gothic"/>
+              </a:rPr>
+              <a:t>• **Human baseline 미수집**: M7 Prolific (20 raters × 50 stim) paper-blocking, 다음 단계.</a:t>
+            </a:r>
+          </a:p>
+          <a:p>
+            <a:pPr algn="l">
+              <a:lnSpc>
+                <a:spcPct val="115000"/>
+              </a:lnSpc>
+            </a:pPr>
+            <a:r>
+              <a:rPr sz="1200">
+                <a:solidFill>
+                  <a:srgbClr val="333333"/>
+                </a:solidFill>
+                <a:latin typeface="Malgun Gothic"/>
+              </a:rPr>
+              <a:t>• **ST5 prompt-steering retire** (Gavrikov 2024): 명시적 "abstract/physical" prompt steering 은 paper scope 에서 retire — §4.3 KO/JA + label-free + open vs FC 가 prompt-variation axis 를 cover.</a:t>
+            </a:r>
+          </a:p>
+        </p:txBody>
+      </p:sp>
+      <p:sp>
+        <p:nvSpPr>
+          <p:cNvPr id="5" name="TextBox 4"/>
+          <p:cNvSpPr txBox="1"/>
+          <p:nvPr/>
+        </p:nvSpPr>
+        <p:spPr>
+          <a:xfrm>
+            <a:off x="274320" y="6492240"/>
+            <a:ext cx="7315200" cy="274320"/>
+          </a:xfrm>
+          <a:prstGeom prst="rect">
+            <a:avLst/>
+          </a:prstGeom>
+          <a:noFill/>
+        </p:spPr>
+        <p:txBody>
+          <a:bodyPr wrap="square" anchor="t">
+            <a:spAutoFit/>
+          </a:bodyPr>
+          <a:lstStyle/>
+          <a:p>
+            <a:pPr algn="l"/>
+            <a:r>
+              <a:rPr sz="900" b="0">
+                <a:solidFill>
+                  <a:srgbClr val="CCCCCC"/>
+                </a:solidFill>
+                <a:latin typeface="Malgun Gothic"/>
+              </a:rPr>
+              <a:t>VLM 의 추상-물리 shortcut — 5-model 실험과 픽셀-인코드 가능성</a:t>
+            </a:r>
+          </a:p>
+        </p:txBody>
+      </p:sp>
+      <p:sp>
+        <p:nvSpPr>
+          <p:cNvPr id="6" name="TextBox 5"/>
+          <p:cNvSpPr txBox="1"/>
+          <p:nvPr/>
+        </p:nvSpPr>
+        <p:spPr>
+          <a:xfrm>
+            <a:off x="10972800" y="6492240"/>
+            <a:ext cx="914400" cy="274320"/>
+          </a:xfrm>
+          <a:prstGeom prst="rect">
+            <a:avLst/>
+          </a:prstGeom>
+          <a:noFill/>
+        </p:spPr>
+        <p:txBody>
+          <a:bodyPr wrap="square" anchor="t">
+            <a:spAutoFit/>
+          </a:bodyPr>
+          <a:lstStyle/>
+          <a:p>
+            <a:pPr algn="r"/>
+            <a:r>
+              <a:rPr sz="900" b="0">
+                <a:solidFill>
+                  <a:srgbClr val="CCCCCC"/>
+                </a:solidFill>
+                <a:latin typeface="Malgun Gothic"/>
+              </a:rPr>
+              <a:t>28 / 30</a:t>
+            </a:r>
+          </a:p>
+        </p:txBody>
+      </p:sp>
+    </p:spTree>
+  </p:cSld>
+  <p:clrMapOvr>
+    <a:masterClrMapping/>
+  </p:clrMapOvr>
+</p:sld>
+</file>
+
+<file path=ppt/slides/slide29.xml><?xml version="1.0" encoding="utf-8"?>
+<p:sld xmlns:a="http://schemas.openxmlformats.org/drawingml/2006/main" xmlns:p="http://schemas.openxmlformats.org/presentationml/2006/main" xmlns:r="http://schemas.openxmlformats.org/officeDocument/2006/relationships">
+  <p:cSld>
+    <p:spTree>
+      <p:nvGrpSpPr>
+        <p:cNvPr id="1" name=""/>
+        <p:cNvGrpSpPr/>
+        <p:nvPr/>
+      </p:nvGrpSpPr>
+      <p:grpSpPr/>
+      <p:sp>
+        <p:nvSpPr>
+          <p:cNvPr id="2" name="Rectangle 1"/>
+          <p:cNvSpPr/>
+          <p:nvPr/>
+        </p:nvSpPr>
+        <p:spPr>
+          <a:xfrm>
+            <a:off x="0" y="0"/>
+            <a:ext cx="164592" cy="914400"/>
+          </a:xfrm>
+          <a:prstGeom prst="rect">
+            <a:avLst/>
+          </a:prstGeom>
+          <a:solidFill>
+            <a:srgbClr val="2E4A7F"/>
+          </a:solidFill>
+          <a:ln>
+            <a:noFill/>
+          </a:ln>
+        </p:spPr>
+        <p:style>
+          <a:lnRef idx="1">
+            <a:schemeClr val="accent1"/>
+          </a:lnRef>
+          <a:fillRef idx="3">
+            <a:schemeClr val="accent1"/>
+          </a:fillRef>
+          <a:effectRef idx="2">
+            <a:schemeClr val="accent1"/>
+          </a:effectRef>
+          <a:fontRef idx="minor">
+            <a:schemeClr val="lt1"/>
+          </a:fontRef>
+        </p:style>
+        <p:txBody>
+          <a:bodyPr rtlCol="0" anchor="ctr"/>
+          <a:lstStyle/>
+          <a:p>
+            <a:pPr algn="ctr"/>
+          </a:p>
+        </p:txBody>
+      </p:sp>
+      <p:sp>
+        <p:nvSpPr>
+          <p:cNvPr id="3" name="TextBox 2"/>
+          <p:cNvSpPr txBox="1"/>
+          <p:nvPr/>
+        </p:nvSpPr>
+        <p:spPr>
+          <a:xfrm>
+            <a:off x="365760" y="164592"/>
+            <a:ext cx="11430000" cy="548640"/>
+          </a:xfrm>
+          <a:prstGeom prst="rect">
+            <a:avLst/>
+          </a:prstGeom>
+          <a:noFill/>
+        </p:spPr>
+        <p:txBody>
+          <a:bodyPr wrap="square" anchor="ctr">
+            <a:spAutoFit/>
+          </a:bodyPr>
+          <a:lstStyle/>
+          <a:p>
+            <a:pPr algn="l"/>
+            <a:r>
+              <a:rPr sz="2600" b="1">
+                <a:solidFill>
+                  <a:srgbClr val="2E4A7F"/>
+                </a:solidFill>
+                <a:latin typeface="Malgun Gothic"/>
+              </a:rPr>
+              <a:t>결론 — 3 가지 paper-grade 기여 (2026-04-28 evening update)</a:t>
+            </a:r>
+          </a:p>
+        </p:txBody>
+      </p:sp>
+      <p:sp>
+        <p:nvSpPr>
+          <p:cNvPr id="4" name="TextBox 3"/>
+          <p:cNvSpPr txBox="1"/>
+          <p:nvPr/>
+        </p:nvSpPr>
+        <p:spPr>
+          <a:xfrm>
+            <a:off x="365760" y="621792"/>
+            <a:ext cx="11430000" cy="365760"/>
+          </a:xfrm>
+          <a:prstGeom prst="rect">
+            <a:avLst/>
+          </a:prstGeom>
+          <a:noFill/>
+        </p:spPr>
+        <p:txBody>
+          <a:bodyPr wrap="square" anchor="ctr">
+            <a:spAutoFit/>
+          </a:bodyPr>
+          <a:lstStyle/>
+          <a:p>
+            <a:pPr algn="l"/>
+            <a:r>
+              <a:rPr sz="1400" b="0">
+                <a:solidFill>
+                  <a:srgbClr val="666666"/>
+                </a:solidFill>
+                <a:latin typeface="Malgun Gothic"/>
+              </a:rPr>
+              <a:t>VLM 의 추상→물리 shortcut 을 행동 / 인과 / 픽셀 3차원으로 cross-model localize</a:t>
+            </a:r>
+          </a:p>
+        </p:txBody>
+      </p:sp>
+      <p:sp>
+        <p:nvSpPr>
+          <p:cNvPr id="5" name="TextBox 4"/>
+          <p:cNvSpPr txBox="1"/>
+          <p:nvPr/>
+        </p:nvSpPr>
+        <p:spPr>
+          <a:xfrm>
+            <a:off x="457200" y="1188720"/>
+            <a:ext cx="11247120" cy="5486400"/>
+          </a:xfrm>
+          <a:prstGeom prst="rect">
+            <a:avLst/>
+          </a:prstGeom>
+          <a:noFill/>
+        </p:spPr>
+        <p:txBody>
+          <a:bodyPr wrap="square">
+            <a:spAutoFit/>
+          </a:bodyPr>
+          <a:lstStyle/>
+          <a:p>
+            <a:pPr algn="l">
+              <a:lnSpc>
+                <a:spcPct val="115000"/>
+              </a:lnSpc>
+            </a:pPr>
+            <a:r>
+              <a:rPr sz="1300">
+                <a:solidFill>
+                  <a:srgbClr val="333333"/>
+                </a:solidFill>
+                <a:latin typeface="Malgun Gothic"/>
+              </a:rPr>
+              <a:t>• **[기여 1] Architecture-level reframe**. 5 모델 × 3 stim source × bootstrap CI 로, 행동 PMR ceiling 이 encoder representational capacity *만으로* 결정되지 않음을 disconfirm. 2-CLIP-point insight (LLaVA-1.5 vs LLaVA-Next) 가 가장 깨끗한 disconfirmer. **5-fold downstream signature** 가 동일 architectural property 의 5 가지 표현.</a:t>
+            </a:r>
+          </a:p>
+          <a:p>
+            <a:pPr algn="l">
+              <a:lnSpc>
+                <a:spcPct val="115000"/>
+              </a:lnSpc>
+            </a:pPr>
+            <a:r>
+              <a:rPr sz="1200">
+                <a:solidFill>
+                  <a:srgbClr val="333333"/>
+                </a:solidFill>
+                <a:latin typeface="Malgun Gothic"/>
+              </a:rPr>
+              <a:t>• **[기여 2] 인과 localization (LM-side + encoder-side cross-model)**. **M5a runtime steering**: Qwen L10 + LLaVA-Next L20+L25 + Idefics2 L25 의 *3 of 4 testable* 가 10/10 PMR flip — Qwen-only → cross-model 확장. **M5b SAE encoder-side intervention**: 모델별 actually-consumed layer 에서 *3 of 5 break* (Qwen k=40, Idefics2/InternVL3 k=160), *2 LLaVA NULL*. **LLaVA-Next 의 M5a-positive + M5b-NULL dissociation** 으로 "CLIP cluster 의 commitment 가 LM-side direction 만 사용, 비-CLIP 은 encoder + LM 둘 다" mechanistic claim. v_L 은 regime axis (M5a-ext).</a:t>
+            </a:r>
+          </a:p>
+          <a:p>
+            <a:pPr algn="l">
+              <a:lnSpc>
+                <a:spcPct val="115000"/>
+              </a:lnSpc>
+            </a:pPr>
+            <a:r>
+              <a:rPr sz="1200">
+                <a:solidFill>
+                  <a:srgbClr val="333333"/>
+                </a:solidFill>
+                <a:latin typeface="Malgun Gothic"/>
+              </a:rPr>
+              <a:t>• **[기여 3] Pixel encodability — architecture-conditional**. 5-model n=10 layer sweep + Idefics2 9-layer disambiguation: **3 of 5 testable** 가 픽셀 ascent 로 flip (Qwen broad / LLaVA-Next L20+L25 / LLaVA-1.5 L25 weak). Idefics2 0/9 (L5-L31) → **wrong-relative-depth falsified, perceiver-resampler 후보**; M4 LM AUC 0.995 + M5a 10/10 + §4.6 0/9 의 triangulation 으로 **"perceiver 가 inverse pixel-routability 만 차단, forward 는 작동"** 으로 가설 정밀화. InternVL3 protocol-saturated. Random 1/250 in aggregate. M9 PMR-ceiling / §4.7 결정-안정성 ceiling / M4 LM AUC / M5b SAE 와 평행한 **architecture-level signature** 5 개 (5-fold redundancy).</a:t>
+            </a:r>
+          </a:p>
+          <a:p>
+            <a:pPr algn="l">
+              <a:lnSpc>
+                <a:spcPct val="115000"/>
+              </a:lnSpc>
+            </a:pPr>
+            <a:r>
+              <a:rPr sz="1200">
+                <a:solidFill>
+                  <a:srgbClr val="333333"/>
+                </a:solidFill>
+                <a:latin typeface="Malgun Gothic"/>
+              </a:rPr>
+              <a:t>• **Big picture**: VLM shortcut 은 단순 "model quirk" 가 아니라 *architecture-level saturation 의 다차원 표현*. 5 가지 downstream 시그니처가 단일 architectural property 의 *redundant manifestation*. **Future work**: controlled projector-swap, controlled LM-swap, multi-axis SAE decomposition, M7 Prolific human baseline.</a:t>
+            </a:r>
+          </a:p>
+        </p:txBody>
+      </p:sp>
+      <p:sp>
+        <p:nvSpPr>
+          <p:cNvPr id="6" name="TextBox 5"/>
+          <p:cNvSpPr txBox="1"/>
+          <p:nvPr/>
+        </p:nvSpPr>
+        <p:spPr>
+          <a:xfrm>
+            <a:off x="274320" y="6492240"/>
+            <a:ext cx="7315200" cy="274320"/>
+          </a:xfrm>
+          <a:prstGeom prst="rect">
+            <a:avLst/>
+          </a:prstGeom>
+          <a:noFill/>
+        </p:spPr>
+        <p:txBody>
+          <a:bodyPr wrap="square" anchor="t">
+            <a:spAutoFit/>
+          </a:bodyPr>
+          <a:lstStyle/>
+          <a:p>
+            <a:pPr algn="l"/>
+            <a:r>
+              <a:rPr sz="900" b="0">
+                <a:solidFill>
+                  <a:srgbClr val="CCCCCC"/>
+                </a:solidFill>
+                <a:latin typeface="Malgun Gothic"/>
+              </a:rPr>
+              <a:t>VLM 의 추상-물리 shortcut — 5-model 실험과 픽셀-인코드 가능성</a:t>
+            </a:r>
+          </a:p>
+        </p:txBody>
+      </p:sp>
+      <p:sp>
+        <p:nvSpPr>
+          <p:cNvPr id="7" name="TextBox 6"/>
+          <p:cNvSpPr txBox="1"/>
+          <p:nvPr/>
+        </p:nvSpPr>
+        <p:spPr>
+          <a:xfrm>
+            <a:off x="10972800" y="6492240"/>
+            <a:ext cx="914400" cy="274320"/>
+          </a:xfrm>
+          <a:prstGeom prst="rect">
+            <a:avLst/>
+          </a:prstGeom>
+          <a:noFill/>
+        </p:spPr>
+        <p:txBody>
+          <a:bodyPr wrap="square" anchor="t">
+            <a:spAutoFit/>
+          </a:bodyPr>
+          <a:lstStyle/>
+          <a:p>
+            <a:pPr algn="r"/>
+            <a:r>
+              <a:rPr sz="900" b="0">
+                <a:solidFill>
+                  <a:srgbClr val="CCCCCC"/>
+                </a:solidFill>
+                <a:latin typeface="Malgun Gothic"/>
+              </a:rPr>
+              <a:t>29 / 30</a:t>
             </a:r>
           </a:p>
         </p:txBody>
@@ -10800,7 +15219,165 @@
                 </a:solidFill>
                 <a:latin typeface="Malgun Gothic"/>
               </a:rPr>
-              <a:t>3 / 26</a:t>
+              <a:t>3 / 30</a:t>
+            </a:r>
+          </a:p>
+        </p:txBody>
+      </p:sp>
+    </p:spTree>
+  </p:cSld>
+  <p:clrMapOvr>
+    <a:masterClrMapping/>
+  </p:clrMapOvr>
+</p:sld>
+</file>
+
+<file path=ppt/slides/slide30.xml><?xml version="1.0" encoding="utf-8"?>
+<p:sld xmlns:a="http://schemas.openxmlformats.org/drawingml/2006/main" xmlns:p="http://schemas.openxmlformats.org/presentationml/2006/main" xmlns:r="http://schemas.openxmlformats.org/officeDocument/2006/relationships">
+  <p:cSld>
+    <p:spTree>
+      <p:nvGrpSpPr>
+        <p:cNvPr id="1" name=""/>
+        <p:cNvGrpSpPr/>
+        <p:nvPr/>
+      </p:nvGrpSpPr>
+      <p:grpSpPr/>
+      <p:sp>
+        <p:nvSpPr>
+          <p:cNvPr id="2" name="TextBox 1"/>
+          <p:cNvSpPr txBox="1"/>
+          <p:nvPr/>
+        </p:nvSpPr>
+        <p:spPr>
+          <a:xfrm>
+            <a:off x="457200" y="2286000"/>
+            <a:ext cx="11247120" cy="1097280"/>
+          </a:xfrm>
+          <a:prstGeom prst="rect">
+            <a:avLst/>
+          </a:prstGeom>
+          <a:noFill/>
+        </p:spPr>
+        <p:txBody>
+          <a:bodyPr wrap="square" anchor="ctr">
+            <a:spAutoFit/>
+          </a:bodyPr>
+          <a:lstStyle/>
+          <a:p>
+            <a:pPr algn="ctr"/>
+            <a:r>
+              <a:rPr sz="6000" b="1">
+                <a:solidFill>
+                  <a:srgbClr val="2E4A7F"/>
+                </a:solidFill>
+                <a:latin typeface="Malgun Gothic"/>
+              </a:rPr>
+              <a:t>감사합니다</a:t>
+            </a:r>
+          </a:p>
+        </p:txBody>
+      </p:sp>
+      <p:sp>
+        <p:nvSpPr>
+          <p:cNvPr id="3" name="TextBox 2"/>
+          <p:cNvSpPr txBox="1"/>
+          <p:nvPr/>
+        </p:nvSpPr>
+        <p:spPr>
+          <a:xfrm>
+            <a:off x="457200" y="3657600"/>
+            <a:ext cx="11247120" cy="731520"/>
+          </a:xfrm>
+          <a:prstGeom prst="rect">
+            <a:avLst/>
+          </a:prstGeom>
+          <a:noFill/>
+        </p:spPr>
+        <p:txBody>
+          <a:bodyPr wrap="square" anchor="ctr">
+            <a:spAutoFit/>
+          </a:bodyPr>
+          <a:lstStyle/>
+          <a:p>
+            <a:pPr algn="ctr"/>
+            <a:r>
+              <a:rPr sz="2200" b="0">
+                <a:solidFill>
+                  <a:srgbClr val="333333"/>
+                </a:solidFill>
+                <a:latin typeface="Malgun Gothic"/>
+              </a:rPr>
+              <a:t>Q &amp; A · 토론 · 다음 단계 우선순위</a:t>
+            </a:r>
+          </a:p>
+        </p:txBody>
+      </p:sp>
+      <p:sp>
+        <p:nvSpPr>
+          <p:cNvPr id="4" name="TextBox 3"/>
+          <p:cNvSpPr txBox="1"/>
+          <p:nvPr/>
+        </p:nvSpPr>
+        <p:spPr>
+          <a:xfrm>
+            <a:off x="457200" y="5029200"/>
+            <a:ext cx="11247120" cy="365760"/>
+          </a:xfrm>
+          <a:prstGeom prst="rect">
+            <a:avLst/>
+          </a:prstGeom>
+          <a:noFill/>
+        </p:spPr>
+        <p:txBody>
+          <a:bodyPr wrap="square" anchor="t">
+            <a:spAutoFit/>
+          </a:bodyPr>
+          <a:lstStyle/>
+          <a:p>
+            <a:pPr algn="ctr"/>
+            <a:r>
+              <a:rPr sz="1400" b="0">
+                <a:solidFill>
+                  <a:srgbClr val="666666"/>
+                </a:solidFill>
+                <a:latin typeface="Malgun Gothic"/>
+              </a:rPr>
+              <a:t>Repo: github.com/namam3gy/physical-mode-activation</a:t>
+            </a:r>
+          </a:p>
+        </p:txBody>
+      </p:sp>
+      <p:sp>
+        <p:nvSpPr>
+          <p:cNvPr id="5" name="TextBox 4"/>
+          <p:cNvSpPr txBox="1"/>
+          <p:nvPr/>
+        </p:nvSpPr>
+        <p:spPr>
+          <a:xfrm>
+            <a:off x="457200" y="5486400"/>
+            <a:ext cx="11247120" cy="365760"/>
+          </a:xfrm>
+          <a:prstGeom prst="rect">
+            <a:avLst/>
+          </a:prstGeom>
+          <a:noFill/>
+        </p:spPr>
+        <p:txBody>
+          <a:bodyPr wrap="square" anchor="t">
+            <a:spAutoFit/>
+          </a:bodyPr>
+          <a:lstStyle/>
+          <a:p>
+            <a:pPr algn="ctr"/>
+            <a:r>
+              <a:rPr sz="1200" b="0">
+                <a:solidFill>
+                  <a:srgbClr val="666666"/>
+                </a:solidFill>
+                <a:latin typeface="Malgun Gothic"/>
+              </a:rPr>
+              <a:t>동반 자료: docs/review_ppt/physical_mode_paper_ko.md (슬라이드별 상세 설명)</a:t>
             </a:r>
           </a:p>
         </p:txBody>
@@ -10945,13 +15522,13 @@
               </a:lnSpc>
             </a:pPr>
             <a:r>
-              <a:rPr sz="1600">
+              <a:rPr sz="1400">
                 <a:solidFill>
                   <a:srgbClr val="333333"/>
                 </a:solidFill>
                 <a:latin typeface="Malgun Gothic"/>
               </a:rPr>
-              <a:t>• **Causal localization**: Qwen2.5-VL 의 LM layer 10 에 단일 선형 방향 `v_L10` 이 존재. forward-hook 으로 +α=40 더하면 line/blank/none stim 의 10/10 이 "D: abstract" → "B: stays still" flip. 다른 layer 는 같은 α 로 안 움직임.</a:t>
+              <a:t>• **Causal localization (LM-side + encoder-side cross-model)**: **M5a runtime steering** 으로 Qwen L10 + LLaVA-Next L20+L25 + Idefics2 L25 의 *3 of 4 testable* 가 10/10 PMR flip. **M5b SAE encoder-side intervention** 로 *3 of 5* 모델이 top-k feature ablation 에서 break (Qwen k=40, Idefics2 k=160, InternVL3 k=160). LLaVA family 는 encoder-NULL 이지만 LM-side POSITIVE → CLIP cluster 의 commitment 는 *LM-side direction 만* 사용. v_L 은 regime axis (M5a-ext).</a:t>
             </a:r>
           </a:p>
           <a:p>
@@ -10961,13 +15538,13 @@
               </a:lnSpc>
             </a:pPr>
             <a:r>
-              <a:rPr sz="1600">
+              <a:rPr sz="1400">
                 <a:solidFill>
                   <a:srgbClr val="333333"/>
                 </a:solidFill>
                 <a:latin typeface="Malgun Gothic"/>
               </a:rPr>
-              <a:t>• **Pixel encodability — architecture-conditional**: 픽셀-공간 gradient ascent 가 **5 모델 중 3 모델 testable** 에서 PMR flip 가능 (Qwen / LLaVA-Next / LLaVA-1.5). **Idefics2 9 레이어 (L5-L31) 모두 0 shortcuts → wrong-relative-depth falsified, perceiver-resampler 후보**. InternVL3 protocol-saturated. 상세 설명은 Slide 19-20 참조.</a:t>
+              <a:t>• **Pixel encodability — architecture-conditional**: 픽셀-공간 gradient ascent 가 **5 모델 중 3 모델 testable** 에서 PMR flip 가능 (Qwen / LLaVA-Next / LLaVA-1.5). **Idefics2 9 레이어 (L5-L31) 모두 0 shortcuts → wrong-relative-depth falsified, perceiver-resampler 후보** (M4 + M5a + §4.6 의 forward/inverse dissociation 으로 정밀화). InternVL3 protocol-saturated. 상세 설명은 Slide 17b/18b/18c/19/20 참조.</a:t>
             </a:r>
           </a:p>
         </p:txBody>
@@ -11037,7 +15614,7 @@
                 </a:solidFill>
                 <a:latin typeface="Malgun Gothic"/>
               </a:rPr>
-              <a:t>4 / 26</a:t>
+              <a:t>4 / 30</a:t>
             </a:r>
           </a:p>
         </p:txBody>
@@ -11290,7 +15867,7 @@
                 </a:solidFill>
                 <a:latin typeface="Malgun Gothic"/>
               </a:rPr>
-              <a:t>5 / 26</a:t>
+              <a:t>5 / 30</a:t>
             </a:r>
           </a:p>
         </p:txBody>
@@ -11559,7 +16136,7 @@
                 </a:solidFill>
                 <a:latin typeface="Malgun Gothic"/>
               </a:rPr>
-              <a:t>6 / 26</a:t>
+              <a:t>6 / 30</a:t>
             </a:r>
           </a:p>
         </p:txBody>
@@ -11988,7 +16565,7 @@
                 </a:solidFill>
                 <a:latin typeface="Malgun Gothic"/>
               </a:rPr>
-              <a:t>7 / 26</a:t>
+              <a:t>7 / 30</a:t>
             </a:r>
           </a:p>
         </p:txBody>
@@ -12669,7 +17246,7 @@
                 </a:solidFill>
                 <a:latin typeface="Malgun Gothic"/>
               </a:rPr>
-              <a:t>8 / 26</a:t>
+              <a:t>8 / 30</a:t>
             </a:r>
           </a:p>
         </p:txBody>
@@ -13378,7 +17955,7 @@
                 </a:solidFill>
                 <a:latin typeface="Malgun Gothic"/>
               </a:rPr>
-              <a:t>9 / 26</a:t>
+              <a:t>9 / 30</a:t>
             </a:r>
           </a:p>
         </p:txBody>
